--- a/site/slides/Week6_Recap.pptx
+++ b/site/slides/Week6_Recap.pptx
@@ -5,10 +5,10 @@
     <p:sldMasterId id="2147485087" r:id="rId1"/>
   </p:sldMasterIdLst>
   <p:notesMasterIdLst>
-    <p:notesMasterId r:id="rId12"/>
+    <p:notesMasterId r:id="rId13"/>
   </p:notesMasterIdLst>
   <p:handoutMasterIdLst>
-    <p:handoutMasterId r:id="rId13"/>
+    <p:handoutMasterId r:id="rId14"/>
   </p:handoutMasterIdLst>
   <p:sldIdLst>
     <p:sldId id="256" r:id="rId2"/>
@@ -18,9 +18,10 @@
     <p:sldId id="622" r:id="rId6"/>
     <p:sldId id="635" r:id="rId7"/>
     <p:sldId id="639" r:id="rId8"/>
-    <p:sldId id="525" r:id="rId9"/>
-    <p:sldId id="638" r:id="rId10"/>
-    <p:sldId id="637" r:id="rId11"/>
+    <p:sldId id="646" r:id="rId9"/>
+    <p:sldId id="525" r:id="rId10"/>
+    <p:sldId id="638" r:id="rId11"/>
+    <p:sldId id="637" r:id="rId12"/>
   </p:sldIdLst>
   <p:sldSz cx="9144000" cy="6858000" type="screen4x3"/>
   <p:notesSz cx="7010400" cy="9296400"/>
@@ -185,7 +186,7 @@
 <file path=ppt/revisionInfo.xml><?xml version="1.0" encoding="utf-8"?>
 <p1510:revInfo xmlns:a="http://schemas.openxmlformats.org/drawingml/2006/main" xmlns:r="http://schemas.openxmlformats.org/officeDocument/2006/relationships" xmlns:p1510="http://schemas.microsoft.com/office/powerpoint/2015/10/main">
   <p1510:revLst>
-    <p1510:client id="{BDE3D77F-2089-4978-8538-76D0C854FC7E}" v="16" dt="2025-03-11T01:38:46.924"/>
+    <p1510:client id="{F2513EC9-0471-4668-A741-1784502CE65F}" v="19" dt="2026-03-09T08:39:11.796"/>
   </p1510:revLst>
 </p1510:revInfo>
 </file>
@@ -193,1276 +194,214 @@
 <file path=ppt/changesInfos/changesInfo1.xml><?xml version="1.0" encoding="utf-8"?>
 <pc:chgInfo xmlns:a="http://schemas.openxmlformats.org/drawingml/2006/main" xmlns:r="http://schemas.openxmlformats.org/officeDocument/2006/relationships" xmlns:ac="http://schemas.microsoft.com/office/drawing/2013/main/command" xmlns:pc="http://schemas.microsoft.com/office/powerpoint/2013/main/command">
   <pc:docChgLst>
-    <pc:chgData name="Zhao Jin" userId="cd05a825-544c-438a-9ba1-08e63db50b47" providerId="ADAL" clId="{6A3951C8-7780-4031-8A2B-7971BC0F9707}"/>
-    <pc:docChg chg="modSld">
-      <pc:chgData name="Zhao Jin" userId="cd05a825-544c-438a-9ba1-08e63db50b47" providerId="ADAL" clId="{6A3951C8-7780-4031-8A2B-7971BC0F9707}" dt="2021-01-27T06:40:05.693" v="157" actId="20577"/>
+    <pc:chgData name="Zhao Jin" userId="cd05a825-544c-438a-9ba1-08e63db50b47" providerId="ADAL" clId="{5DF3A229-1965-414E-AF54-F4C37AC7DF68}"/>
+    <pc:docChg chg="undo custSel addSld modSld">
+      <pc:chgData name="Zhao Jin" userId="cd05a825-544c-438a-9ba1-08e63db50b47" providerId="ADAL" clId="{5DF3A229-1965-414E-AF54-F4C37AC7DF68}" dt="2026-03-09T08:42:16.905" v="155" actId="207"/>
       <pc:docMkLst>
         <pc:docMk/>
       </pc:docMkLst>
-      <pc:sldChg chg="addSp modSp mod">
-        <pc:chgData name="Zhao Jin" userId="cd05a825-544c-438a-9ba1-08e63db50b47" providerId="ADAL" clId="{6A3951C8-7780-4031-8A2B-7971BC0F9707}" dt="2021-01-27T06:39:09.281" v="89" actId="1036"/>
-        <pc:sldMkLst>
-          <pc:docMk/>
-          <pc:sldMk cId="3949125736" sldId="548"/>
-        </pc:sldMkLst>
-      </pc:sldChg>
-      <pc:sldChg chg="addSp modSp mod">
-        <pc:chgData name="Zhao Jin" userId="cd05a825-544c-438a-9ba1-08e63db50b47" providerId="ADAL" clId="{6A3951C8-7780-4031-8A2B-7971BC0F9707}" dt="2021-01-27T06:40:05.693" v="157" actId="20577"/>
-        <pc:sldMkLst>
-          <pc:docMk/>
-          <pc:sldMk cId="2939077141" sldId="549"/>
-        </pc:sldMkLst>
-      </pc:sldChg>
-    </pc:docChg>
-  </pc:docChgLst>
-  <pc:docChgLst>
-    <pc:chgData name="Zhao Jin" userId="cd05a825-544c-438a-9ba1-08e63db50b47" providerId="ADAL" clId="{3734313E-5771-4880-93AA-BBBC93FA4756}"/>
-    <pc:docChg chg="modSld modMainMaster">
-      <pc:chgData name="Zhao Jin" userId="cd05a825-544c-438a-9ba1-08e63db50b47" providerId="ADAL" clId="{3734313E-5771-4880-93AA-BBBC93FA4756}" dt="2024-02-01T09:42:55.831" v="1" actId="255"/>
-      <pc:docMkLst>
-        <pc:docMk/>
-      </pc:docMkLst>
-      <pc:sldChg chg="modSp">
-        <pc:chgData name="Zhao Jin" userId="cd05a825-544c-438a-9ba1-08e63db50b47" providerId="ADAL" clId="{3734313E-5771-4880-93AA-BBBC93FA4756}" dt="2024-02-01T09:42:47.057" v="0"/>
+      <pc:sldChg chg="modSp mod">
+        <pc:chgData name="Zhao Jin" userId="cd05a825-544c-438a-9ba1-08e63db50b47" providerId="ADAL" clId="{5DF3A229-1965-414E-AF54-F4C37AC7DF68}" dt="2026-03-09T08:28:11.631" v="135" actId="20577"/>
         <pc:sldMkLst>
           <pc:docMk/>
           <pc:sldMk cId="4078418712" sldId="525"/>
         </pc:sldMkLst>
+        <pc:spChg chg="mod">
+          <ac:chgData name="Zhao Jin" userId="cd05a825-544c-438a-9ba1-08e63db50b47" providerId="ADAL" clId="{5DF3A229-1965-414E-AF54-F4C37AC7DF68}" dt="2026-03-09T08:28:11.631" v="135" actId="20577"/>
+          <ac:spMkLst>
+            <pc:docMk/>
+            <pc:sldMk cId="4078418712" sldId="525"/>
+            <ac:spMk id="6" creationId="{00568286-6850-338C-8176-699E16332DA1}"/>
+          </ac:spMkLst>
+        </pc:spChg>
       </pc:sldChg>
-      <pc:sldChg chg="modSp">
-        <pc:chgData name="Zhao Jin" userId="cd05a825-544c-438a-9ba1-08e63db50b47" providerId="ADAL" clId="{3734313E-5771-4880-93AA-BBBC93FA4756}" dt="2024-02-01T09:42:47.057" v="0"/>
-        <pc:sldMkLst>
-          <pc:docMk/>
-          <pc:sldMk cId="1427618944" sldId="553"/>
-        </pc:sldMkLst>
-      </pc:sldChg>
-      <pc:sldChg chg="modSp mod">
-        <pc:chgData name="Zhao Jin" userId="cd05a825-544c-438a-9ba1-08e63db50b47" providerId="ADAL" clId="{3734313E-5771-4880-93AA-BBBC93FA4756}" dt="2024-02-01T09:42:55.831" v="1" actId="255"/>
-        <pc:sldMkLst>
-          <pc:docMk/>
-          <pc:sldMk cId="1542002799" sldId="602"/>
-        </pc:sldMkLst>
-      </pc:sldChg>
-      <pc:sldChg chg="modSp">
-        <pc:chgData name="Zhao Jin" userId="cd05a825-544c-438a-9ba1-08e63db50b47" providerId="ADAL" clId="{3734313E-5771-4880-93AA-BBBC93FA4756}" dt="2024-02-01T09:42:47.057" v="0"/>
-        <pc:sldMkLst>
-          <pc:docMk/>
-          <pc:sldMk cId="2489370454" sldId="605"/>
-        </pc:sldMkLst>
-      </pc:sldChg>
-      <pc:sldChg chg="modSp">
-        <pc:chgData name="Zhao Jin" userId="cd05a825-544c-438a-9ba1-08e63db50b47" providerId="ADAL" clId="{3734313E-5771-4880-93AA-BBBC93FA4756}" dt="2024-02-01T09:42:47.057" v="0"/>
-        <pc:sldMkLst>
-          <pc:docMk/>
-          <pc:sldMk cId="640598186" sldId="606"/>
-        </pc:sldMkLst>
-      </pc:sldChg>
-      <pc:sldChg chg="modSp">
-        <pc:chgData name="Zhao Jin" userId="cd05a825-544c-438a-9ba1-08e63db50b47" providerId="ADAL" clId="{3734313E-5771-4880-93AA-BBBC93FA4756}" dt="2024-02-01T09:42:47.057" v="0"/>
-        <pc:sldMkLst>
-          <pc:docMk/>
-          <pc:sldMk cId="282410985" sldId="620"/>
-        </pc:sldMkLst>
-      </pc:sldChg>
-      <pc:sldChg chg="modSp">
-        <pc:chgData name="Zhao Jin" userId="cd05a825-544c-438a-9ba1-08e63db50b47" providerId="ADAL" clId="{3734313E-5771-4880-93AA-BBBC93FA4756}" dt="2024-02-01T09:42:47.057" v="0"/>
+      <pc:sldChg chg="addSp modSp mod modAnim">
+        <pc:chgData name="Zhao Jin" userId="cd05a825-544c-438a-9ba1-08e63db50b47" providerId="ADAL" clId="{5DF3A229-1965-414E-AF54-F4C37AC7DF68}" dt="2026-03-09T08:25:33.400" v="96" actId="1036"/>
         <pc:sldMkLst>
           <pc:docMk/>
           <pc:sldMk cId="3503582036" sldId="622"/>
         </pc:sldMkLst>
-      </pc:sldChg>
-      <pc:sldChg chg="modSp">
-        <pc:chgData name="Zhao Jin" userId="cd05a825-544c-438a-9ba1-08e63db50b47" providerId="ADAL" clId="{3734313E-5771-4880-93AA-BBBC93FA4756}" dt="2024-02-01T09:42:47.057" v="0"/>
-        <pc:sldMkLst>
-          <pc:docMk/>
-          <pc:sldMk cId="1258830549" sldId="635"/>
-        </pc:sldMkLst>
-      </pc:sldChg>
-      <pc:sldChg chg="modSp">
-        <pc:chgData name="Zhao Jin" userId="cd05a825-544c-438a-9ba1-08e63db50b47" providerId="ADAL" clId="{3734313E-5771-4880-93AA-BBBC93FA4756}" dt="2024-02-01T09:42:47.057" v="0"/>
-        <pc:sldMkLst>
-          <pc:docMk/>
-          <pc:sldMk cId="1235845528" sldId="637"/>
-        </pc:sldMkLst>
-      </pc:sldChg>
-      <pc:sldChg chg="modSp">
-        <pc:chgData name="Zhao Jin" userId="cd05a825-544c-438a-9ba1-08e63db50b47" providerId="ADAL" clId="{3734313E-5771-4880-93AA-BBBC93FA4756}" dt="2024-02-01T09:42:47.057" v="0"/>
-        <pc:sldMkLst>
-          <pc:docMk/>
-          <pc:sldMk cId="3042096305" sldId="638"/>
-        </pc:sldMkLst>
-      </pc:sldChg>
-      <pc:sldMasterChg chg="modSp modSldLayout">
-        <pc:chgData name="Zhao Jin" userId="cd05a825-544c-438a-9ba1-08e63db50b47" providerId="ADAL" clId="{3734313E-5771-4880-93AA-BBBC93FA4756}" dt="2024-02-01T09:42:47.057" v="0"/>
-        <pc:sldMasterMkLst>
-          <pc:docMk/>
-          <pc:sldMasterMk cId="0" sldId="2147485087"/>
-        </pc:sldMasterMkLst>
-        <pc:sldLayoutChg chg="modSp">
-          <pc:chgData name="Zhao Jin" userId="cd05a825-544c-438a-9ba1-08e63db50b47" providerId="ADAL" clId="{3734313E-5771-4880-93AA-BBBC93FA4756}" dt="2024-02-01T09:42:47.057" v="0"/>
-          <pc:sldLayoutMkLst>
-            <pc:docMk/>
-            <pc:sldMasterMk cId="0" sldId="2147485087"/>
-            <pc:sldLayoutMk cId="0" sldId="2147485088"/>
-          </pc:sldLayoutMkLst>
-        </pc:sldLayoutChg>
-        <pc:sldLayoutChg chg="modSp">
-          <pc:chgData name="Zhao Jin" userId="cd05a825-544c-438a-9ba1-08e63db50b47" providerId="ADAL" clId="{3734313E-5771-4880-93AA-BBBC93FA4756}" dt="2024-02-01T09:42:47.057" v="0"/>
-          <pc:sldLayoutMkLst>
-            <pc:docMk/>
-            <pc:sldMasterMk cId="0" sldId="2147485087"/>
-            <pc:sldLayoutMk cId="0" sldId="2147485089"/>
-          </pc:sldLayoutMkLst>
-        </pc:sldLayoutChg>
-        <pc:sldLayoutChg chg="modSp">
-          <pc:chgData name="Zhao Jin" userId="cd05a825-544c-438a-9ba1-08e63db50b47" providerId="ADAL" clId="{3734313E-5771-4880-93AA-BBBC93FA4756}" dt="2024-02-01T09:42:47.057" v="0"/>
-          <pc:sldLayoutMkLst>
-            <pc:docMk/>
-            <pc:sldMasterMk cId="0" sldId="2147485087"/>
-            <pc:sldLayoutMk cId="0" sldId="2147485090"/>
-          </pc:sldLayoutMkLst>
-        </pc:sldLayoutChg>
-        <pc:sldLayoutChg chg="modSp">
-          <pc:chgData name="Zhao Jin" userId="cd05a825-544c-438a-9ba1-08e63db50b47" providerId="ADAL" clId="{3734313E-5771-4880-93AA-BBBC93FA4756}" dt="2024-02-01T09:42:47.057" v="0"/>
-          <pc:sldLayoutMkLst>
-            <pc:docMk/>
-            <pc:sldMasterMk cId="0" sldId="2147485087"/>
-            <pc:sldLayoutMk cId="0" sldId="2147485091"/>
-          </pc:sldLayoutMkLst>
-        </pc:sldLayoutChg>
-        <pc:sldLayoutChg chg="modSp">
-          <pc:chgData name="Zhao Jin" userId="cd05a825-544c-438a-9ba1-08e63db50b47" providerId="ADAL" clId="{3734313E-5771-4880-93AA-BBBC93FA4756}" dt="2024-02-01T09:42:47.057" v="0"/>
-          <pc:sldLayoutMkLst>
-            <pc:docMk/>
-            <pc:sldMasterMk cId="0" sldId="2147485087"/>
-            <pc:sldLayoutMk cId="0" sldId="2147485092"/>
-          </pc:sldLayoutMkLst>
-        </pc:sldLayoutChg>
-        <pc:sldLayoutChg chg="modSp">
-          <pc:chgData name="Zhao Jin" userId="cd05a825-544c-438a-9ba1-08e63db50b47" providerId="ADAL" clId="{3734313E-5771-4880-93AA-BBBC93FA4756}" dt="2024-02-01T09:42:47.057" v="0"/>
-          <pc:sldLayoutMkLst>
-            <pc:docMk/>
-            <pc:sldMasterMk cId="0" sldId="2147485087"/>
-            <pc:sldLayoutMk cId="0" sldId="2147485093"/>
-          </pc:sldLayoutMkLst>
-        </pc:sldLayoutChg>
-        <pc:sldLayoutChg chg="modSp">
-          <pc:chgData name="Zhao Jin" userId="cd05a825-544c-438a-9ba1-08e63db50b47" providerId="ADAL" clId="{3734313E-5771-4880-93AA-BBBC93FA4756}" dt="2024-02-01T09:42:47.057" v="0"/>
-          <pc:sldLayoutMkLst>
-            <pc:docMk/>
-            <pc:sldMasterMk cId="0" sldId="2147485087"/>
-            <pc:sldLayoutMk cId="0" sldId="2147485094"/>
-          </pc:sldLayoutMkLst>
-        </pc:sldLayoutChg>
-        <pc:sldLayoutChg chg="modSp">
-          <pc:chgData name="Zhao Jin" userId="cd05a825-544c-438a-9ba1-08e63db50b47" providerId="ADAL" clId="{3734313E-5771-4880-93AA-BBBC93FA4756}" dt="2024-02-01T09:42:47.057" v="0"/>
-          <pc:sldLayoutMkLst>
-            <pc:docMk/>
-            <pc:sldMasterMk cId="0" sldId="2147485087"/>
-            <pc:sldLayoutMk cId="0" sldId="2147485095"/>
-          </pc:sldLayoutMkLst>
-        </pc:sldLayoutChg>
-        <pc:sldLayoutChg chg="modSp">
-          <pc:chgData name="Zhao Jin" userId="cd05a825-544c-438a-9ba1-08e63db50b47" providerId="ADAL" clId="{3734313E-5771-4880-93AA-BBBC93FA4756}" dt="2024-02-01T09:42:47.057" v="0"/>
-          <pc:sldLayoutMkLst>
-            <pc:docMk/>
-            <pc:sldMasterMk cId="0" sldId="2147485087"/>
-            <pc:sldLayoutMk cId="0" sldId="2147485096"/>
-          </pc:sldLayoutMkLst>
-        </pc:sldLayoutChg>
-        <pc:sldLayoutChg chg="modSp">
-          <pc:chgData name="Zhao Jin" userId="cd05a825-544c-438a-9ba1-08e63db50b47" providerId="ADAL" clId="{3734313E-5771-4880-93AA-BBBC93FA4756}" dt="2024-02-01T09:42:47.057" v="0"/>
-          <pc:sldLayoutMkLst>
-            <pc:docMk/>
-            <pc:sldMasterMk cId="0" sldId="2147485087"/>
-            <pc:sldLayoutMk cId="0" sldId="2147485097"/>
-          </pc:sldLayoutMkLst>
-        </pc:sldLayoutChg>
-        <pc:sldLayoutChg chg="modSp">
-          <pc:chgData name="Zhao Jin" userId="cd05a825-544c-438a-9ba1-08e63db50b47" providerId="ADAL" clId="{3734313E-5771-4880-93AA-BBBC93FA4756}" dt="2024-02-01T09:42:47.057" v="0"/>
-          <pc:sldLayoutMkLst>
-            <pc:docMk/>
-            <pc:sldMasterMk cId="0" sldId="2147485087"/>
-            <pc:sldLayoutMk cId="0" sldId="2147485098"/>
-          </pc:sldLayoutMkLst>
-        </pc:sldLayoutChg>
-      </pc:sldMasterChg>
-    </pc:docChg>
-  </pc:docChgLst>
-  <pc:docChgLst>
-    <pc:chgData name="Zhao Jin" userId="cd05a825-544c-438a-9ba1-08e63db50b47" providerId="ADAL" clId="{FB8F02A0-9B99-4C9E-A1D1-3BF41D9621D7}"/>
-    <pc:docChg chg="undo custSel addSld delSld modSld sldOrd">
-      <pc:chgData name="Zhao Jin" userId="cd05a825-544c-438a-9ba1-08e63db50b47" providerId="ADAL" clId="{FB8F02A0-9B99-4C9E-A1D1-3BF41D9621D7}" dt="2021-02-08T02:21:29.074" v="2208" actId="20577"/>
-      <pc:docMkLst>
-        <pc:docMk/>
-      </pc:docMkLst>
-      <pc:sldChg chg="modSp">
-        <pc:chgData name="Zhao Jin" userId="cd05a825-544c-438a-9ba1-08e63db50b47" providerId="ADAL" clId="{FB8F02A0-9B99-4C9E-A1D1-3BF41D9621D7}" dt="2021-02-03T06:53:35.324" v="0"/>
-        <pc:sldMkLst>
-          <pc:docMk/>
-          <pc:sldMk cId="0" sldId="256"/>
-        </pc:sldMkLst>
-      </pc:sldChg>
-      <pc:sldChg chg="modSp del">
-        <pc:chgData name="Zhao Jin" userId="cd05a825-544c-438a-9ba1-08e63db50b47" providerId="ADAL" clId="{FB8F02A0-9B99-4C9E-A1D1-3BF41D9621D7}" dt="2021-02-03T07:15:04.758" v="547" actId="47"/>
-        <pc:sldMkLst>
-          <pc:docMk/>
-          <pc:sldMk cId="1492339910" sldId="485"/>
-        </pc:sldMkLst>
-      </pc:sldChg>
-      <pc:sldChg chg="addSp modSp add del mod">
-        <pc:chgData name="Zhao Jin" userId="cd05a825-544c-438a-9ba1-08e63db50b47" providerId="ADAL" clId="{FB8F02A0-9B99-4C9E-A1D1-3BF41D9621D7}" dt="2021-02-03T07:45:22.990" v="2123" actId="20577"/>
-        <pc:sldMkLst>
-          <pc:docMk/>
-          <pc:sldMk cId="2775173622" sldId="524"/>
-        </pc:sldMkLst>
-      </pc:sldChg>
-      <pc:sldChg chg="modSp mod">
-        <pc:chgData name="Zhao Jin" userId="cd05a825-544c-438a-9ba1-08e63db50b47" providerId="ADAL" clId="{FB8F02A0-9B99-4C9E-A1D1-3BF41D9621D7}" dt="2021-02-03T09:16:16.308" v="2184" actId="20577"/>
-        <pc:sldMkLst>
-          <pc:docMk/>
-          <pc:sldMk cId="4078418712" sldId="525"/>
-        </pc:sldMkLst>
-      </pc:sldChg>
-      <pc:sldChg chg="modSp del">
-        <pc:chgData name="Zhao Jin" userId="cd05a825-544c-438a-9ba1-08e63db50b47" providerId="ADAL" clId="{FB8F02A0-9B99-4C9E-A1D1-3BF41D9621D7}" dt="2021-02-03T07:02:36.712" v="7" actId="47"/>
-        <pc:sldMkLst>
-          <pc:docMk/>
-          <pc:sldMk cId="3949125736" sldId="548"/>
-        </pc:sldMkLst>
-      </pc:sldChg>
-      <pc:sldChg chg="modSp del">
-        <pc:chgData name="Zhao Jin" userId="cd05a825-544c-438a-9ba1-08e63db50b47" providerId="ADAL" clId="{FB8F02A0-9B99-4C9E-A1D1-3BF41D9621D7}" dt="2021-02-03T07:02:36.889" v="8" actId="47"/>
-        <pc:sldMkLst>
-          <pc:docMk/>
-          <pc:sldMk cId="2939077141" sldId="549"/>
-        </pc:sldMkLst>
-      </pc:sldChg>
-      <pc:sldChg chg="add del">
-        <pc:chgData name="Zhao Jin" userId="cd05a825-544c-438a-9ba1-08e63db50b47" providerId="ADAL" clId="{FB8F02A0-9B99-4C9E-A1D1-3BF41D9621D7}" dt="2021-02-03T07:07:45.930" v="221" actId="47"/>
-        <pc:sldMkLst>
-          <pc:docMk/>
-          <pc:sldMk cId="1352675019" sldId="551"/>
-        </pc:sldMkLst>
-      </pc:sldChg>
-      <pc:sldChg chg="addSp delSp modSp add mod">
-        <pc:chgData name="Zhao Jin" userId="cd05a825-544c-438a-9ba1-08e63db50b47" providerId="ADAL" clId="{FB8F02A0-9B99-4C9E-A1D1-3BF41D9621D7}" dt="2021-02-03T07:41:34.595" v="1864" actId="20578"/>
-        <pc:sldMkLst>
-          <pc:docMk/>
-          <pc:sldMk cId="2882118053" sldId="552"/>
-        </pc:sldMkLst>
-      </pc:sldChg>
-      <pc:sldChg chg="modSp add mod">
-        <pc:chgData name="Zhao Jin" userId="cd05a825-544c-438a-9ba1-08e63db50b47" providerId="ADAL" clId="{FB8F02A0-9B99-4C9E-A1D1-3BF41D9621D7}" dt="2021-02-03T07:20:30.275" v="935"/>
-        <pc:sldMkLst>
-          <pc:docMk/>
-          <pc:sldMk cId="2082920116" sldId="553"/>
-        </pc:sldMkLst>
-      </pc:sldChg>
-      <pc:sldChg chg="addSp delSp modSp add mod modAnim">
-        <pc:chgData name="Zhao Jin" userId="cd05a825-544c-438a-9ba1-08e63db50b47" providerId="ADAL" clId="{FB8F02A0-9B99-4C9E-A1D1-3BF41D9621D7}" dt="2021-02-03T07:42:15.454" v="1867" actId="20577"/>
-        <pc:sldMkLst>
-          <pc:docMk/>
-          <pc:sldMk cId="1659983766" sldId="554"/>
-        </pc:sldMkLst>
-      </pc:sldChg>
-      <pc:sldChg chg="addSp delSp modSp add del mod">
-        <pc:chgData name="Zhao Jin" userId="cd05a825-544c-438a-9ba1-08e63db50b47" providerId="ADAL" clId="{FB8F02A0-9B99-4C9E-A1D1-3BF41D9621D7}" dt="2021-02-03T07:07:06.993" v="219" actId="47"/>
-        <pc:sldMkLst>
-          <pc:docMk/>
-          <pc:sldMk cId="1268238251" sldId="555"/>
-        </pc:sldMkLst>
-      </pc:sldChg>
-      <pc:sldChg chg="modSp add del mod">
-        <pc:chgData name="Zhao Jin" userId="cd05a825-544c-438a-9ba1-08e63db50b47" providerId="ADAL" clId="{FB8F02A0-9B99-4C9E-A1D1-3BF41D9621D7}" dt="2021-02-03T07:42:30.854" v="1869" actId="47"/>
-        <pc:sldMkLst>
-          <pc:docMk/>
-          <pc:sldMk cId="788021743" sldId="557"/>
-        </pc:sldMkLst>
-      </pc:sldChg>
-      <pc:sldChg chg="delSp modSp add mod">
-        <pc:chgData name="Zhao Jin" userId="cd05a825-544c-438a-9ba1-08e63db50b47" providerId="ADAL" clId="{FB8F02A0-9B99-4C9E-A1D1-3BF41D9621D7}" dt="2021-02-08T02:19:37.781" v="2198" actId="478"/>
-        <pc:sldMkLst>
-          <pc:docMk/>
-          <pc:sldMk cId="686532275" sldId="558"/>
-        </pc:sldMkLst>
-      </pc:sldChg>
-      <pc:sldChg chg="delSp modSp add del mod delAnim">
-        <pc:chgData name="Zhao Jin" userId="cd05a825-544c-438a-9ba1-08e63db50b47" providerId="ADAL" clId="{FB8F02A0-9B99-4C9E-A1D1-3BF41D9621D7}" dt="2021-02-03T07:30:13.895" v="1095" actId="47"/>
-        <pc:sldMkLst>
-          <pc:docMk/>
-          <pc:sldMk cId="182578491" sldId="559"/>
-        </pc:sldMkLst>
-      </pc:sldChg>
-      <pc:sldChg chg="modSp add mod">
-        <pc:chgData name="Zhao Jin" userId="cd05a825-544c-438a-9ba1-08e63db50b47" providerId="ADAL" clId="{FB8F02A0-9B99-4C9E-A1D1-3BF41D9621D7}" dt="2021-02-03T07:20:33.509" v="937"/>
-        <pc:sldMkLst>
-          <pc:docMk/>
-          <pc:sldMk cId="1986771488" sldId="561"/>
-        </pc:sldMkLst>
-      </pc:sldChg>
-      <pc:sldChg chg="addSp delSp modSp add del mod delAnim modAnim">
-        <pc:chgData name="Zhao Jin" userId="cd05a825-544c-438a-9ba1-08e63db50b47" providerId="ADAL" clId="{FB8F02A0-9B99-4C9E-A1D1-3BF41D9621D7}" dt="2021-02-03T07:41:57.313" v="1865" actId="47"/>
-        <pc:sldMkLst>
-          <pc:docMk/>
-          <pc:sldMk cId="92291925" sldId="563"/>
-        </pc:sldMkLst>
-      </pc:sldChg>
-      <pc:sldChg chg="addSp modSp add mod modAnim">
-        <pc:chgData name="Zhao Jin" userId="cd05a825-544c-438a-9ba1-08e63db50b47" providerId="ADAL" clId="{FB8F02A0-9B99-4C9E-A1D1-3BF41D9621D7}" dt="2021-02-03T07:20:31.915" v="936"/>
-        <pc:sldMkLst>
-          <pc:docMk/>
-          <pc:sldMk cId="1276365520" sldId="564"/>
-        </pc:sldMkLst>
-      </pc:sldChg>
-      <pc:sldChg chg="delSp modSp add mod">
-        <pc:chgData name="Zhao Jin" userId="cd05a825-544c-438a-9ba1-08e63db50b47" providerId="ADAL" clId="{FB8F02A0-9B99-4C9E-A1D1-3BF41D9621D7}" dt="2021-02-03T07:20:28.829" v="934"/>
-        <pc:sldMkLst>
-          <pc:docMk/>
-          <pc:sldMk cId="827193018" sldId="565"/>
-        </pc:sldMkLst>
-      </pc:sldChg>
-      <pc:sldChg chg="modSp add mod">
-        <pc:chgData name="Zhao Jin" userId="cd05a825-544c-438a-9ba1-08e63db50b47" providerId="ADAL" clId="{FB8F02A0-9B99-4C9E-A1D1-3BF41D9621D7}" dt="2021-02-08T02:21:29.074" v="2208" actId="20577"/>
-        <pc:sldMkLst>
-          <pc:docMk/>
-          <pc:sldMk cId="3959984611" sldId="566"/>
-        </pc:sldMkLst>
-      </pc:sldChg>
-      <pc:sldChg chg="add del">
-        <pc:chgData name="Zhao Jin" userId="cd05a825-544c-438a-9ba1-08e63db50b47" providerId="ADAL" clId="{FB8F02A0-9B99-4C9E-A1D1-3BF41D9621D7}" dt="2021-02-03T07:34:00.322" v="1372" actId="47"/>
-        <pc:sldMkLst>
-          <pc:docMk/>
-          <pc:sldMk cId="243231529" sldId="567"/>
-        </pc:sldMkLst>
-      </pc:sldChg>
-      <pc:sldChg chg="modSp add del mod">
-        <pc:chgData name="Zhao Jin" userId="cd05a825-544c-438a-9ba1-08e63db50b47" providerId="ADAL" clId="{FB8F02A0-9B99-4C9E-A1D1-3BF41D9621D7}" dt="2021-02-03T07:30:57.488" v="1096" actId="47"/>
-        <pc:sldMkLst>
-          <pc:docMk/>
-          <pc:sldMk cId="3003604107" sldId="567"/>
-        </pc:sldMkLst>
-      </pc:sldChg>
-      <pc:sldChg chg="addSp delSp modSp add mod ord">
-        <pc:chgData name="Zhao Jin" userId="cd05a825-544c-438a-9ba1-08e63db50b47" providerId="ADAL" clId="{FB8F02A0-9B99-4C9E-A1D1-3BF41D9621D7}" dt="2021-02-03T07:45:20.173" v="2121" actId="20577"/>
-        <pc:sldMkLst>
-          <pc:docMk/>
-          <pc:sldMk cId="2879329457" sldId="568"/>
-        </pc:sldMkLst>
-      </pc:sldChg>
-      <pc:sldChg chg="modSp add mod">
-        <pc:chgData name="Zhao Jin" userId="cd05a825-544c-438a-9ba1-08e63db50b47" providerId="ADAL" clId="{FB8F02A0-9B99-4C9E-A1D1-3BF41D9621D7}" dt="2021-02-03T07:42:36.973" v="1870"/>
-        <pc:sldMkLst>
-          <pc:docMk/>
-          <pc:sldMk cId="4240540711" sldId="569"/>
-        </pc:sldMkLst>
-      </pc:sldChg>
-    </pc:docChg>
-  </pc:docChgLst>
-  <pc:docChgLst>
-    <pc:chgData name="Zhao Jin" userId="cd05a825-544c-438a-9ba1-08e63db50b47" providerId="ADAL" clId="{40B02829-7445-394A-990C-032942059FD9}"/>
-    <pc:docChg chg="custSel modSld">
-      <pc:chgData name="Zhao Jin" userId="cd05a825-544c-438a-9ba1-08e63db50b47" providerId="ADAL" clId="{40B02829-7445-394A-990C-032942059FD9}" dt="2021-01-18T05:50:34.611" v="4" actId="478"/>
-      <pc:docMkLst>
-        <pc:docMk/>
-      </pc:docMkLst>
-      <pc:sldChg chg="delSp">
-        <pc:chgData name="Zhao Jin" userId="cd05a825-544c-438a-9ba1-08e63db50b47" providerId="ADAL" clId="{40B02829-7445-394A-990C-032942059FD9}" dt="2021-01-18T05:50:34.611" v="4" actId="478"/>
-        <pc:sldMkLst>
-          <pc:docMk/>
-          <pc:sldMk cId="3871162519" sldId="525"/>
-        </pc:sldMkLst>
-      </pc:sldChg>
-      <pc:sldChg chg="modSp">
-        <pc:chgData name="Zhao Jin" userId="cd05a825-544c-438a-9ba1-08e63db50b47" providerId="ADAL" clId="{40B02829-7445-394A-990C-032942059FD9}" dt="2021-01-18T05:50:03.685" v="3" actId="122"/>
-        <pc:sldMkLst>
-          <pc:docMk/>
-          <pc:sldMk cId="770306953" sldId="526"/>
-        </pc:sldMkLst>
-      </pc:sldChg>
-      <pc:sldChg chg="modAnim">
-        <pc:chgData name="Zhao Jin" userId="cd05a825-544c-438a-9ba1-08e63db50b47" providerId="ADAL" clId="{40B02829-7445-394A-990C-032942059FD9}" dt="2021-01-18T05:49:08.491" v="0"/>
-        <pc:sldMkLst>
-          <pc:docMk/>
-          <pc:sldMk cId="4288789163" sldId="527"/>
-        </pc:sldMkLst>
-      </pc:sldChg>
-    </pc:docChg>
-  </pc:docChgLst>
-  <pc:docChgLst>
-    <pc:chgData name="Zhao Jin" userId="cd05a825-544c-438a-9ba1-08e63db50b47" providerId="ADAL" clId="{BDE3D77F-2089-4978-8538-76D0C854FC7E}"/>
-    <pc:docChg chg="undo custSel addSld modSld">
-      <pc:chgData name="Zhao Jin" userId="cd05a825-544c-438a-9ba1-08e63db50b47" providerId="ADAL" clId="{BDE3D77F-2089-4978-8538-76D0C854FC7E}" dt="2025-03-11T01:40:03.723" v="418" actId="5793"/>
-      <pc:docMkLst>
-        <pc:docMk/>
-      </pc:docMkLst>
-      <pc:sldChg chg="modSp mod">
-        <pc:chgData name="Zhao Jin" userId="cd05a825-544c-438a-9ba1-08e63db50b47" providerId="ADAL" clId="{BDE3D77F-2089-4978-8538-76D0C854FC7E}" dt="2025-03-11T01:38:25.173" v="223" actId="20577"/>
-        <pc:sldMkLst>
-          <pc:docMk/>
-          <pc:sldMk cId="4199745321" sldId="619"/>
-        </pc:sldMkLst>
-        <pc:spChg chg="mod">
-          <ac:chgData name="Zhao Jin" userId="cd05a825-544c-438a-9ba1-08e63db50b47" providerId="ADAL" clId="{BDE3D77F-2089-4978-8538-76D0C854FC7E}" dt="2025-03-10T07:04:48.690" v="57" actId="1036"/>
+        <pc:spChg chg="add mod">
+          <ac:chgData name="Zhao Jin" userId="cd05a825-544c-438a-9ba1-08e63db50b47" providerId="ADAL" clId="{5DF3A229-1965-414E-AF54-F4C37AC7DF68}" dt="2026-03-09T08:25:21.591" v="74"/>
           <ac:spMkLst>
             <pc:docMk/>
-            <pc:sldMk cId="4199745321" sldId="619"/>
-            <ac:spMk id="4" creationId="{2E8F10BF-00EA-4821-B538-7C75A02A3AC3}"/>
+            <pc:sldMk cId="3503582036" sldId="622"/>
+            <ac:spMk id="10" creationId="{05A07E57-F734-BE7E-C6B2-F5E59B60BE98}"/>
           </ac:spMkLst>
         </pc:spChg>
         <pc:spChg chg="mod">
-          <ac:chgData name="Zhao Jin" userId="cd05a825-544c-438a-9ba1-08e63db50b47" providerId="ADAL" clId="{BDE3D77F-2089-4978-8538-76D0C854FC7E}" dt="2025-03-10T07:04:46.569" v="56" actId="13926"/>
-          <ac:spMkLst>
-            <pc:docMk/>
-            <pc:sldMk cId="4199745321" sldId="619"/>
-            <ac:spMk id="13" creationId="{A6C30920-C994-477D-BF38-FB31A7971AB0}"/>
-          </ac:spMkLst>
-        </pc:spChg>
-        <pc:spChg chg="mod">
-          <ac:chgData name="Zhao Jin" userId="cd05a825-544c-438a-9ba1-08e63db50b47" providerId="ADAL" clId="{BDE3D77F-2089-4978-8538-76D0C854FC7E}" dt="2025-03-11T01:38:25.173" v="223" actId="20577"/>
-          <ac:spMkLst>
-            <pc:docMk/>
-            <pc:sldMk cId="4199745321" sldId="619"/>
-            <ac:spMk id="14338" creationId="{00000000-0000-0000-0000-000000000000}"/>
-          </ac:spMkLst>
-        </pc:spChg>
-      </pc:sldChg>
-      <pc:sldChg chg="modSp mod">
-        <pc:chgData name="Zhao Jin" userId="cd05a825-544c-438a-9ba1-08e63db50b47" providerId="ADAL" clId="{BDE3D77F-2089-4978-8538-76D0C854FC7E}" dt="2025-03-10T07:02:28.503" v="50" actId="20577"/>
-        <pc:sldMkLst>
-          <pc:docMk/>
-          <pc:sldMk cId="3503582036" sldId="622"/>
-        </pc:sldMkLst>
-        <pc:spChg chg="mod">
-          <ac:chgData name="Zhao Jin" userId="cd05a825-544c-438a-9ba1-08e63db50b47" providerId="ADAL" clId="{BDE3D77F-2089-4978-8538-76D0C854FC7E}" dt="2025-03-10T06:57:25.655" v="40" actId="207"/>
-          <ac:spMkLst>
-            <pc:docMk/>
-            <pc:sldMk cId="3503582036" sldId="622"/>
-            <ac:spMk id="61" creationId="{4C4155C8-4656-E0CD-BBA0-2F96A7655BC8}"/>
-          </ac:spMkLst>
-        </pc:spChg>
-        <pc:spChg chg="mod">
-          <ac:chgData name="Zhao Jin" userId="cd05a825-544c-438a-9ba1-08e63db50b47" providerId="ADAL" clId="{BDE3D77F-2089-4978-8538-76D0C854FC7E}" dt="2025-03-10T07:02:28.503" v="50" actId="20577"/>
+          <ac:chgData name="Zhao Jin" userId="cd05a825-544c-438a-9ba1-08e63db50b47" providerId="ADAL" clId="{5DF3A229-1965-414E-AF54-F4C37AC7DF68}" dt="2026-03-09T08:25:11.853" v="73" actId="20577"/>
           <ac:spMkLst>
             <pc:docMk/>
             <pc:sldMk cId="3503582036" sldId="622"/>
             <ac:spMk id="62" creationId="{6C12A07D-29B9-1094-692E-279280E4A2F4}"/>
           </ac:spMkLst>
         </pc:spChg>
-      </pc:sldChg>
-      <pc:sldChg chg="modSp mod">
-        <pc:chgData name="Zhao Jin" userId="cd05a825-544c-438a-9ba1-08e63db50b47" providerId="ADAL" clId="{BDE3D77F-2089-4978-8538-76D0C854FC7E}" dt="2025-03-10T07:27:32.513" v="72" actId="207"/>
-        <pc:sldMkLst>
-          <pc:docMk/>
-          <pc:sldMk cId="1258830549" sldId="635"/>
-        </pc:sldMkLst>
         <pc:spChg chg="mod">
-          <ac:chgData name="Zhao Jin" userId="cd05a825-544c-438a-9ba1-08e63db50b47" providerId="ADAL" clId="{BDE3D77F-2089-4978-8538-76D0C854FC7E}" dt="2025-03-10T07:27:32.513" v="72" actId="207"/>
+          <ac:chgData name="Zhao Jin" userId="cd05a825-544c-438a-9ba1-08e63db50b47" providerId="ADAL" clId="{5DF3A229-1965-414E-AF54-F4C37AC7DF68}" dt="2026-03-09T08:25:33.400" v="96" actId="1036"/>
           <ac:spMkLst>
             <pc:docMk/>
-            <pc:sldMk cId="1258830549" sldId="635"/>
-            <ac:spMk id="4" creationId="{016708B5-5385-A496-A2BA-A726A047DCEE}"/>
+            <pc:sldMk cId="3503582036" sldId="622"/>
+            <ac:spMk id="14339" creationId="{5A6D85C6-FC8C-49CD-3BF4-A3C4021BC290}"/>
           </ac:spMkLst>
         </pc:spChg>
+        <pc:grpChg chg="mod">
+          <ac:chgData name="Zhao Jin" userId="cd05a825-544c-438a-9ba1-08e63db50b47" providerId="ADAL" clId="{5DF3A229-1965-414E-AF54-F4C37AC7DF68}" dt="2026-03-09T08:25:29.171" v="75"/>
+          <ac:grpSpMkLst>
+            <pc:docMk/>
+            <pc:sldMk cId="3503582036" sldId="622"/>
+            <ac:grpSpMk id="63" creationId="{91A95408-C20A-89FF-A4AE-829DC1E681A0}"/>
+          </ac:grpSpMkLst>
+        </pc:grpChg>
+        <pc:cxnChg chg="add mod">
+          <ac:chgData name="Zhao Jin" userId="cd05a825-544c-438a-9ba1-08e63db50b47" providerId="ADAL" clId="{5DF3A229-1965-414E-AF54-F4C37AC7DF68}" dt="2026-03-09T08:25:21.591" v="74"/>
+          <ac:cxnSpMkLst>
+            <pc:docMk/>
+            <pc:sldMk cId="3503582036" sldId="622"/>
+            <ac:cxnSpMk id="6" creationId="{BB9677F0-3898-7BDA-8730-4F78C3437C7B}"/>
+          </ac:cxnSpMkLst>
+        </pc:cxnChg>
+        <pc:cxnChg chg="mod">
+          <ac:chgData name="Zhao Jin" userId="cd05a825-544c-438a-9ba1-08e63db50b47" providerId="ADAL" clId="{5DF3A229-1965-414E-AF54-F4C37AC7DF68}" dt="2026-03-09T08:25:29.171" v="75"/>
+          <ac:cxnSpMkLst>
+            <pc:docMk/>
+            <pc:sldMk cId="3503582036" sldId="622"/>
+            <ac:cxnSpMk id="14336" creationId="{F48D6EC2-1149-A127-9503-32C3D4740D09}"/>
+          </ac:cxnSpMkLst>
+        </pc:cxnChg>
+        <pc:cxnChg chg="mod">
+          <ac:chgData name="Zhao Jin" userId="cd05a825-544c-438a-9ba1-08e63db50b47" providerId="ADAL" clId="{5DF3A229-1965-414E-AF54-F4C37AC7DF68}" dt="2026-03-09T08:25:29.171" v="75"/>
+          <ac:cxnSpMkLst>
+            <pc:docMk/>
+            <pc:sldMk cId="3503582036" sldId="622"/>
+            <ac:cxnSpMk id="14337" creationId="{28B09226-F743-5D62-FF5E-AB065747AD1F}"/>
+          </ac:cxnSpMkLst>
+        </pc:cxnChg>
       </pc:sldChg>
-      <pc:sldChg chg="addSp delSp modSp mod modAnim">
-        <pc:chgData name="Zhao Jin" userId="cd05a825-544c-438a-9ba1-08e63db50b47" providerId="ADAL" clId="{BDE3D77F-2089-4978-8538-76D0C854FC7E}" dt="2025-03-11T01:37:08.140" v="127" actId="1035"/>
+      <pc:sldChg chg="addSp delSp modSp mod delAnim modAnim">
+        <pc:chgData name="Zhao Jin" userId="cd05a825-544c-438a-9ba1-08e63db50b47" providerId="ADAL" clId="{5DF3A229-1965-414E-AF54-F4C37AC7DF68}" dt="2026-03-09T08:24:25.603" v="66" actId="1076"/>
         <pc:sldMkLst>
           <pc:docMk/>
           <pc:sldMk cId="980586276" sldId="636"/>
         </pc:sldMkLst>
-        <pc:spChg chg="add del mod">
-          <ac:chgData name="Zhao Jin" userId="cd05a825-544c-438a-9ba1-08e63db50b47" providerId="ADAL" clId="{BDE3D77F-2089-4978-8538-76D0C854FC7E}" dt="2025-03-11T01:35:58.841" v="91" actId="478"/>
-          <ac:spMkLst>
-            <pc:docMk/>
-            <pc:sldMk cId="980586276" sldId="636"/>
-            <ac:spMk id="5" creationId="{AD7718AB-FC7F-4121-7504-37A9D9B73A78}"/>
-          </ac:spMkLst>
-        </pc:spChg>
-        <pc:spChg chg="add del mod">
-          <ac:chgData name="Zhao Jin" userId="cd05a825-544c-438a-9ba1-08e63db50b47" providerId="ADAL" clId="{BDE3D77F-2089-4978-8538-76D0C854FC7E}" dt="2025-03-11T01:35:55.029" v="90" actId="21"/>
-          <ac:spMkLst>
-            <pc:docMk/>
-            <pc:sldMk cId="980586276" sldId="636"/>
-            <ac:spMk id="6" creationId="{4C9D842F-69A9-7546-9E0A-6AE26B6AB11F}"/>
-          </ac:spMkLst>
-        </pc:spChg>
         <pc:spChg chg="mod">
-          <ac:chgData name="Zhao Jin" userId="cd05a825-544c-438a-9ba1-08e63db50b47" providerId="ADAL" clId="{BDE3D77F-2089-4978-8538-76D0C854FC7E}" dt="2025-03-11T01:34:37.969" v="78"/>
+          <ac:chgData name="Zhao Jin" userId="cd05a825-544c-438a-9ba1-08e63db50b47" providerId="ADAL" clId="{5DF3A229-1965-414E-AF54-F4C37AC7DF68}" dt="2026-03-09T08:23:41.268" v="37" actId="113"/>
           <ac:spMkLst>
             <pc:docMk/>
             <pc:sldMk cId="980586276" sldId="636"/>
             <ac:spMk id="8" creationId="{AC72A9D4-4530-F731-81B0-8D27107DBA7E}"/>
           </ac:spMkLst>
         </pc:spChg>
-        <pc:spChg chg="mod">
-          <ac:chgData name="Zhao Jin" userId="cd05a825-544c-438a-9ba1-08e63db50b47" providerId="ADAL" clId="{BDE3D77F-2089-4978-8538-76D0C854FC7E}" dt="2025-03-11T01:37:08.140" v="127" actId="1035"/>
+        <pc:spChg chg="add del mod">
+          <ac:chgData name="Zhao Jin" userId="cd05a825-544c-438a-9ba1-08e63db50b47" providerId="ADAL" clId="{5DF3A229-1965-414E-AF54-F4C37AC7DF68}" dt="2026-03-09T08:24:09.686" v="50" actId="478"/>
           <ac:spMkLst>
             <pc:docMk/>
             <pc:sldMk cId="980586276" sldId="636"/>
-            <ac:spMk id="9" creationId="{474AF172-D699-A880-8434-3E2D5FA23022}"/>
+            <ac:spMk id="14" creationId="{4943BB1F-6FC2-C670-3C5B-172DB8528ADD}"/>
           </ac:spMkLst>
         </pc:spChg>
+        <pc:picChg chg="add mod ord">
+          <ac:chgData name="Zhao Jin" userId="cd05a825-544c-438a-9ba1-08e63db50b47" providerId="ADAL" clId="{5DF3A229-1965-414E-AF54-F4C37AC7DF68}" dt="2026-03-09T08:24:25.603" v="66" actId="1076"/>
+          <ac:picMkLst>
+            <pc:docMk/>
+            <pc:sldMk cId="980586276" sldId="636"/>
+            <ac:picMk id="5" creationId="{53C55348-3DE5-DACA-C2F9-49D0275D14FF}"/>
+          </ac:picMkLst>
+        </pc:picChg>
+        <pc:picChg chg="add mod ord">
+          <ac:chgData name="Zhao Jin" userId="cd05a825-544c-438a-9ba1-08e63db50b47" providerId="ADAL" clId="{5DF3A229-1965-414E-AF54-F4C37AC7DF68}" dt="2026-03-09T08:23:51.624" v="46" actId="1036"/>
+          <ac:picMkLst>
+            <pc:docMk/>
+            <pc:sldMk cId="980586276" sldId="636"/>
+            <ac:picMk id="6" creationId="{CF82E14C-F09D-F08E-8FED-AB210305528B}"/>
+          </ac:picMkLst>
+        </pc:picChg>
+        <pc:picChg chg="del">
+          <ac:chgData name="Zhao Jin" userId="cd05a825-544c-438a-9ba1-08e63db50b47" providerId="ADAL" clId="{5DF3A229-1965-414E-AF54-F4C37AC7DF68}" dt="2026-03-09T08:22:51.582" v="24" actId="478"/>
+          <ac:picMkLst>
+            <pc:docMk/>
+            <pc:sldMk cId="980586276" sldId="636"/>
+            <ac:picMk id="7" creationId="{D0152604-E4D0-7F95-C78A-689CBBE46706}"/>
+          </ac:picMkLst>
+        </pc:picChg>
+        <pc:picChg chg="del">
+          <ac:chgData name="Zhao Jin" userId="cd05a825-544c-438a-9ba1-08e63db50b47" providerId="ADAL" clId="{5DF3A229-1965-414E-AF54-F4C37AC7DF68}" dt="2026-03-09T08:22:50.690" v="23" actId="478"/>
+          <ac:picMkLst>
+            <pc:docMk/>
+            <pc:sldMk cId="980586276" sldId="636"/>
+            <ac:picMk id="10" creationId="{741E3252-5793-BC76-C690-21304EDB54AD}"/>
+          </ac:picMkLst>
+        </pc:picChg>
+        <pc:picChg chg="add del mod">
+          <ac:chgData name="Zhao Jin" userId="cd05a825-544c-438a-9ba1-08e63db50b47" providerId="ADAL" clId="{5DF3A229-1965-414E-AF54-F4C37AC7DF68}" dt="2026-03-09T08:24:09.095" v="49" actId="478"/>
+          <ac:picMkLst>
+            <pc:docMk/>
+            <pc:sldMk cId="980586276" sldId="636"/>
+            <ac:picMk id="11" creationId="{3A76A68F-5785-6DDE-4702-0ED8259BE782}"/>
+          </ac:picMkLst>
+        </pc:picChg>
+        <pc:picChg chg="add del">
+          <ac:chgData name="Zhao Jin" userId="cd05a825-544c-438a-9ba1-08e63db50b47" providerId="ADAL" clId="{5DF3A229-1965-414E-AF54-F4C37AC7DF68}" dt="2026-03-09T08:22:32.718" v="4" actId="478"/>
+          <ac:picMkLst>
+            <pc:docMk/>
+            <pc:sldMk cId="980586276" sldId="636"/>
+            <ac:picMk id="12" creationId="{E106D820-8748-71AD-D22F-7F3273634EE1}"/>
+          </ac:picMkLst>
+        </pc:picChg>
+        <pc:picChg chg="add mod ord">
+          <ac:chgData name="Zhao Jin" userId="cd05a825-544c-438a-9ba1-08e63db50b47" providerId="ADAL" clId="{5DF3A229-1965-414E-AF54-F4C37AC7DF68}" dt="2026-03-09T08:24:22.226" v="65" actId="1037"/>
+          <ac:picMkLst>
+            <pc:docMk/>
+            <pc:sldMk cId="980586276" sldId="636"/>
+            <ac:picMk id="15" creationId="{B8CEE51F-CA93-9146-D17A-A9C824721C66}"/>
+          </ac:picMkLst>
+        </pc:picChg>
       </pc:sldChg>
-      <pc:sldChg chg="modSp add mod">
-        <pc:chgData name="Zhao Jin" userId="cd05a825-544c-438a-9ba1-08e63db50b47" providerId="ADAL" clId="{BDE3D77F-2089-4978-8538-76D0C854FC7E}" dt="2025-03-11T01:40:03.723" v="418" actId="5793"/>
+      <pc:sldChg chg="modSp mod">
+        <pc:chgData name="Zhao Jin" userId="cd05a825-544c-438a-9ba1-08e63db50b47" providerId="ADAL" clId="{5DF3A229-1965-414E-AF54-F4C37AC7DF68}" dt="2026-03-09T08:27:10.665" v="130" actId="6549"/>
         <pc:sldMkLst>
           <pc:docMk/>
           <pc:sldMk cId="3405061206" sldId="639"/>
         </pc:sldMkLst>
         <pc:spChg chg="mod">
-          <ac:chgData name="Zhao Jin" userId="cd05a825-544c-438a-9ba1-08e63db50b47" providerId="ADAL" clId="{BDE3D77F-2089-4978-8538-76D0C854FC7E}" dt="2025-03-11T01:39:46.186" v="348" actId="12"/>
+          <ac:chgData name="Zhao Jin" userId="cd05a825-544c-438a-9ba1-08e63db50b47" providerId="ADAL" clId="{5DF3A229-1965-414E-AF54-F4C37AC7DF68}" dt="2026-03-09T08:27:10.665" v="130" actId="6549"/>
           <ac:spMkLst>
             <pc:docMk/>
             <pc:sldMk cId="3405061206" sldId="639"/>
             <ac:spMk id="6" creationId="{08B71498-0FDB-2170-A0B7-F9EF0AB5FA30}"/>
           </ac:spMkLst>
         </pc:spChg>
+      </pc:sldChg>
+      <pc:sldChg chg="modSp add mod">
+        <pc:chgData name="Zhao Jin" userId="cd05a825-544c-438a-9ba1-08e63db50b47" providerId="ADAL" clId="{5DF3A229-1965-414E-AF54-F4C37AC7DF68}" dt="2026-03-09T08:42:16.905" v="155" actId="207"/>
+        <pc:sldMkLst>
+          <pc:docMk/>
+          <pc:sldMk cId="1414353441" sldId="646"/>
+        </pc:sldMkLst>
         <pc:spChg chg="mod">
-          <ac:chgData name="Zhao Jin" userId="cd05a825-544c-438a-9ba1-08e63db50b47" providerId="ADAL" clId="{BDE3D77F-2089-4978-8538-76D0C854FC7E}" dt="2025-03-11T01:40:03.723" v="418" actId="5793"/>
+          <ac:chgData name="Zhao Jin" userId="cd05a825-544c-438a-9ba1-08e63db50b47" providerId="ADAL" clId="{5DF3A229-1965-414E-AF54-F4C37AC7DF68}" dt="2026-03-09T08:39:29.110" v="144" actId="20577"/>
           <ac:spMkLst>
             <pc:docMk/>
-            <pc:sldMk cId="3405061206" sldId="639"/>
-            <ac:spMk id="13" creationId="{4E81BBB0-3E76-B07B-161A-0459AAE18007}"/>
+            <pc:sldMk cId="1414353441" sldId="646"/>
+            <ac:spMk id="5" creationId="{5FFB8BAB-4C2A-0B3D-48A1-99993A14B541}"/>
           </ac:spMkLst>
         </pc:spChg>
-      </pc:sldChg>
-    </pc:docChg>
-  </pc:docChgLst>
-  <pc:docChgLst>
-    <pc:chgData name="Zhao Jin" userId="cd05a825-544c-438a-9ba1-08e63db50b47" providerId="ADAL" clId="{A4A0FEF4-5388-4642-A424-D6144C2A9D07}"/>
-    <pc:docChg chg="undo custSel modSld">
-      <pc:chgData name="Zhao Jin" userId="cd05a825-544c-438a-9ba1-08e63db50b47" providerId="ADAL" clId="{A4A0FEF4-5388-4642-A424-D6144C2A9D07}" dt="2021-01-25T03:36:28.487" v="214" actId="20577"/>
-      <pc:docMkLst>
-        <pc:docMk/>
-      </pc:docMkLst>
-      <pc:sldChg chg="delSp modSp">
-        <pc:chgData name="Zhao Jin" userId="cd05a825-544c-438a-9ba1-08e63db50b47" providerId="ADAL" clId="{A4A0FEF4-5388-4642-A424-D6144C2A9D07}" dt="2021-01-25T03:33:46.226" v="179"/>
-        <pc:sldMkLst>
-          <pc:docMk/>
-          <pc:sldMk cId="2543678377" sldId="531"/>
-        </pc:sldMkLst>
-      </pc:sldChg>
-      <pc:sldChg chg="delSp modSp">
-        <pc:chgData name="Zhao Jin" userId="cd05a825-544c-438a-9ba1-08e63db50b47" providerId="ADAL" clId="{A4A0FEF4-5388-4642-A424-D6144C2A9D07}" dt="2021-01-25T03:33:46.226" v="179"/>
-        <pc:sldMkLst>
-          <pc:docMk/>
-          <pc:sldMk cId="2025693378" sldId="532"/>
-        </pc:sldMkLst>
-      </pc:sldChg>
-      <pc:sldChg chg="delSp modSp">
-        <pc:chgData name="Zhao Jin" userId="cd05a825-544c-438a-9ba1-08e63db50b47" providerId="ADAL" clId="{A4A0FEF4-5388-4642-A424-D6144C2A9D07}" dt="2021-01-25T03:36:13.902" v="213" actId="403"/>
-        <pc:sldMkLst>
-          <pc:docMk/>
-          <pc:sldMk cId="266706937" sldId="533"/>
-        </pc:sldMkLst>
-      </pc:sldChg>
-      <pc:sldChg chg="addSp delSp modSp">
-        <pc:chgData name="Zhao Jin" userId="cd05a825-544c-438a-9ba1-08e63db50b47" providerId="ADAL" clId="{A4A0FEF4-5388-4642-A424-D6144C2A9D07}" dt="2021-01-25T03:36:28.487" v="214" actId="20577"/>
-        <pc:sldMkLst>
-          <pc:docMk/>
-          <pc:sldMk cId="3198948174" sldId="535"/>
-        </pc:sldMkLst>
-      </pc:sldChg>
-    </pc:docChg>
-  </pc:docChgLst>
-  <pc:docChgLst>
-    <pc:chgData name="Zhao Jin" userId="cd05a825-544c-438a-9ba1-08e63db50b47" providerId="ADAL" clId="{75F7C722-C61E-471A-9B33-2309D7EAF671}"/>
-    <pc:docChg chg="custSel modSld">
-      <pc:chgData name="Zhao Jin" userId="cd05a825-544c-438a-9ba1-08e63db50b47" providerId="ADAL" clId="{75F7C722-C61E-471A-9B33-2309D7EAF671}" dt="2024-01-31T05:14:53.295" v="2" actId="27636"/>
-      <pc:docMkLst>
-        <pc:docMk/>
-      </pc:docMkLst>
-      <pc:sldChg chg="addSp modSp">
-        <pc:chgData name="Zhao Jin" userId="cd05a825-544c-438a-9ba1-08e63db50b47" providerId="ADAL" clId="{75F7C722-C61E-471A-9B33-2309D7EAF671}" dt="2024-01-31T05:13:50.104" v="0"/>
-        <pc:sldMkLst>
-          <pc:docMk/>
-          <pc:sldMk cId="0" sldId="256"/>
-        </pc:sldMkLst>
-      </pc:sldChg>
-      <pc:sldChg chg="modSp">
-        <pc:chgData name="Zhao Jin" userId="cd05a825-544c-438a-9ba1-08e63db50b47" providerId="ADAL" clId="{75F7C722-C61E-471A-9B33-2309D7EAF671}" dt="2024-01-31T05:14:53.252" v="1"/>
-        <pc:sldMkLst>
-          <pc:docMk/>
-          <pc:sldMk cId="4078418712" sldId="525"/>
-        </pc:sldMkLst>
-      </pc:sldChg>
-      <pc:sldChg chg="modSp">
-        <pc:chgData name="Zhao Jin" userId="cd05a825-544c-438a-9ba1-08e63db50b47" providerId="ADAL" clId="{75F7C722-C61E-471A-9B33-2309D7EAF671}" dt="2024-01-31T05:14:53.252" v="1"/>
-        <pc:sldMkLst>
-          <pc:docMk/>
-          <pc:sldMk cId="1427618944" sldId="553"/>
-        </pc:sldMkLst>
-      </pc:sldChg>
-      <pc:sldChg chg="modSp mod">
-        <pc:chgData name="Zhao Jin" userId="cd05a825-544c-438a-9ba1-08e63db50b47" providerId="ADAL" clId="{75F7C722-C61E-471A-9B33-2309D7EAF671}" dt="2024-01-31T05:14:53.295" v="2" actId="27636"/>
-        <pc:sldMkLst>
-          <pc:docMk/>
-          <pc:sldMk cId="1542002799" sldId="602"/>
-        </pc:sldMkLst>
-      </pc:sldChg>
-      <pc:sldChg chg="modSp">
-        <pc:chgData name="Zhao Jin" userId="cd05a825-544c-438a-9ba1-08e63db50b47" providerId="ADAL" clId="{75F7C722-C61E-471A-9B33-2309D7EAF671}" dt="2024-01-31T05:14:53.252" v="1"/>
-        <pc:sldMkLst>
-          <pc:docMk/>
-          <pc:sldMk cId="2489370454" sldId="605"/>
-        </pc:sldMkLst>
-      </pc:sldChg>
-      <pc:sldChg chg="modSp">
-        <pc:chgData name="Zhao Jin" userId="cd05a825-544c-438a-9ba1-08e63db50b47" providerId="ADAL" clId="{75F7C722-C61E-471A-9B33-2309D7EAF671}" dt="2024-01-31T05:14:53.252" v="1"/>
-        <pc:sldMkLst>
-          <pc:docMk/>
-          <pc:sldMk cId="640598186" sldId="606"/>
-        </pc:sldMkLst>
-      </pc:sldChg>
-      <pc:sldChg chg="modSp">
-        <pc:chgData name="Zhao Jin" userId="cd05a825-544c-438a-9ba1-08e63db50b47" providerId="ADAL" clId="{75F7C722-C61E-471A-9B33-2309D7EAF671}" dt="2024-01-31T05:14:53.252" v="1"/>
-        <pc:sldMkLst>
-          <pc:docMk/>
-          <pc:sldMk cId="282410985" sldId="620"/>
-        </pc:sldMkLst>
-      </pc:sldChg>
-      <pc:sldChg chg="modSp">
-        <pc:chgData name="Zhao Jin" userId="cd05a825-544c-438a-9ba1-08e63db50b47" providerId="ADAL" clId="{75F7C722-C61E-471A-9B33-2309D7EAF671}" dt="2024-01-31T05:14:53.252" v="1"/>
-        <pc:sldMkLst>
-          <pc:docMk/>
-          <pc:sldMk cId="3503582036" sldId="622"/>
-        </pc:sldMkLst>
-      </pc:sldChg>
-      <pc:sldChg chg="modSp">
-        <pc:chgData name="Zhao Jin" userId="cd05a825-544c-438a-9ba1-08e63db50b47" providerId="ADAL" clId="{75F7C722-C61E-471A-9B33-2309D7EAF671}" dt="2024-01-31T05:14:53.252" v="1"/>
-        <pc:sldMkLst>
-          <pc:docMk/>
-          <pc:sldMk cId="1258830549" sldId="635"/>
-        </pc:sldMkLst>
-      </pc:sldChg>
-      <pc:sldChg chg="modSp">
-        <pc:chgData name="Zhao Jin" userId="cd05a825-544c-438a-9ba1-08e63db50b47" providerId="ADAL" clId="{75F7C722-C61E-471A-9B33-2309D7EAF671}" dt="2024-01-31T05:14:53.252" v="1"/>
-        <pc:sldMkLst>
-          <pc:docMk/>
-          <pc:sldMk cId="1235845528" sldId="637"/>
-        </pc:sldMkLst>
-      </pc:sldChg>
-      <pc:sldChg chg="modSp">
-        <pc:chgData name="Zhao Jin" userId="cd05a825-544c-438a-9ba1-08e63db50b47" providerId="ADAL" clId="{75F7C722-C61E-471A-9B33-2309D7EAF671}" dt="2024-01-31T05:14:53.252" v="1"/>
-        <pc:sldMkLst>
-          <pc:docMk/>
-          <pc:sldMk cId="3042096305" sldId="638"/>
-        </pc:sldMkLst>
-      </pc:sldChg>
-    </pc:docChg>
-  </pc:docChgLst>
-  <pc:docChgLst>
-    <pc:chgData name="Zhao Jin" userId="cd05a825-544c-438a-9ba1-08e63db50b47" providerId="ADAL" clId="{867F3690-C100-40EE-A937-14612E9F3314}"/>
-    <pc:docChg chg="undo custSel addSld delSld modSld">
-      <pc:chgData name="Zhao Jin" userId="cd05a825-544c-438a-9ba1-08e63db50b47" providerId="ADAL" clId="{867F3690-C100-40EE-A937-14612E9F3314}" dt="2021-02-15T05:07:12.447" v="312" actId="1076"/>
-      <pc:docMkLst>
-        <pc:docMk/>
-      </pc:docMkLst>
-      <pc:sldChg chg="modSp mod">
-        <pc:chgData name="Zhao Jin" userId="cd05a825-544c-438a-9ba1-08e63db50b47" providerId="ADAL" clId="{867F3690-C100-40EE-A937-14612E9F3314}" dt="2021-02-10T03:53:02.282" v="0" actId="20577"/>
-        <pc:sldMkLst>
-          <pc:docMk/>
-          <pc:sldMk cId="0" sldId="256"/>
-        </pc:sldMkLst>
-      </pc:sldChg>
-      <pc:sldChg chg="modSp del">
-        <pc:chgData name="Zhao Jin" userId="cd05a825-544c-438a-9ba1-08e63db50b47" providerId="ADAL" clId="{867F3690-C100-40EE-A937-14612E9F3314}" dt="2021-02-11T11:12:55.303" v="2" actId="47"/>
-        <pc:sldMkLst>
-          <pc:docMk/>
-          <pc:sldMk cId="2775173622" sldId="524"/>
-        </pc:sldMkLst>
-      </pc:sldChg>
-      <pc:sldChg chg="modSp mod">
-        <pc:chgData name="Zhao Jin" userId="cd05a825-544c-438a-9ba1-08e63db50b47" providerId="ADAL" clId="{867F3690-C100-40EE-A937-14612E9F3314}" dt="2021-02-11T11:16:16.653" v="199" actId="207"/>
-        <pc:sldMkLst>
-          <pc:docMk/>
-          <pc:sldMk cId="4078418712" sldId="525"/>
-        </pc:sldMkLst>
-      </pc:sldChg>
-      <pc:sldChg chg="modSp del">
-        <pc:chgData name="Zhao Jin" userId="cd05a825-544c-438a-9ba1-08e63db50b47" providerId="ADAL" clId="{867F3690-C100-40EE-A937-14612E9F3314}" dt="2021-02-11T11:12:55.303" v="2" actId="47"/>
-        <pc:sldMkLst>
-          <pc:docMk/>
-          <pc:sldMk cId="2882118053" sldId="552"/>
-        </pc:sldMkLst>
-      </pc:sldChg>
-      <pc:sldChg chg="modSp add mod">
-        <pc:chgData name="Zhao Jin" userId="cd05a825-544c-438a-9ba1-08e63db50b47" providerId="ADAL" clId="{867F3690-C100-40EE-A937-14612E9F3314}" dt="2021-02-15T04:57:13.323" v="201"/>
-        <pc:sldMkLst>
-          <pc:docMk/>
-          <pc:sldMk cId="1427618944" sldId="553"/>
-        </pc:sldMkLst>
-      </pc:sldChg>
-      <pc:sldChg chg="modSp del">
-        <pc:chgData name="Zhao Jin" userId="cd05a825-544c-438a-9ba1-08e63db50b47" providerId="ADAL" clId="{867F3690-C100-40EE-A937-14612E9F3314}" dt="2021-02-11T11:12:55.303" v="2" actId="47"/>
-        <pc:sldMkLst>
-          <pc:docMk/>
-          <pc:sldMk cId="2082920116" sldId="553"/>
-        </pc:sldMkLst>
-      </pc:sldChg>
-      <pc:sldChg chg="modSp del">
-        <pc:chgData name="Zhao Jin" userId="cd05a825-544c-438a-9ba1-08e63db50b47" providerId="ADAL" clId="{867F3690-C100-40EE-A937-14612E9F3314}" dt="2021-02-11T11:12:55.303" v="2" actId="47"/>
-        <pc:sldMkLst>
-          <pc:docMk/>
-          <pc:sldMk cId="1659983766" sldId="554"/>
-        </pc:sldMkLst>
-      </pc:sldChg>
-      <pc:sldChg chg="modSp del">
-        <pc:chgData name="Zhao Jin" userId="cd05a825-544c-438a-9ba1-08e63db50b47" providerId="ADAL" clId="{867F3690-C100-40EE-A937-14612E9F3314}" dt="2021-02-11T11:12:55.303" v="2" actId="47"/>
-        <pc:sldMkLst>
-          <pc:docMk/>
-          <pc:sldMk cId="686532275" sldId="558"/>
-        </pc:sldMkLst>
-      </pc:sldChg>
-      <pc:sldChg chg="modSp add del mod">
-        <pc:chgData name="Zhao Jin" userId="cd05a825-544c-438a-9ba1-08e63db50b47" providerId="ADAL" clId="{867F3690-C100-40EE-A937-14612E9F3314}" dt="2021-02-15T04:59:11.851" v="203" actId="207"/>
-        <pc:sldMkLst>
-          <pc:docMk/>
-          <pc:sldMk cId="1663851036" sldId="559"/>
-        </pc:sldMkLst>
-      </pc:sldChg>
-      <pc:sldChg chg="addSp delSp modSp add mod">
-        <pc:chgData name="Zhao Jin" userId="cd05a825-544c-438a-9ba1-08e63db50b47" providerId="ADAL" clId="{867F3690-C100-40EE-A937-14612E9F3314}" dt="2021-02-15T05:07:12.447" v="312" actId="1076"/>
-        <pc:sldMkLst>
-          <pc:docMk/>
-          <pc:sldMk cId="1971208294" sldId="560"/>
-        </pc:sldMkLst>
-      </pc:sldChg>
-      <pc:sldChg chg="modSp del">
-        <pc:chgData name="Zhao Jin" userId="cd05a825-544c-438a-9ba1-08e63db50b47" providerId="ADAL" clId="{867F3690-C100-40EE-A937-14612E9F3314}" dt="2021-02-11T11:12:55.303" v="2" actId="47"/>
-        <pc:sldMkLst>
-          <pc:docMk/>
-          <pc:sldMk cId="1986771488" sldId="561"/>
-        </pc:sldMkLst>
-      </pc:sldChg>
-      <pc:sldChg chg="modSp add mod">
-        <pc:chgData name="Zhao Jin" userId="cd05a825-544c-438a-9ba1-08e63db50b47" providerId="ADAL" clId="{867F3690-C100-40EE-A937-14612E9F3314}" dt="2021-02-11T11:14:08.750" v="27" actId="20577"/>
-        <pc:sldMkLst>
-          <pc:docMk/>
-          <pc:sldMk cId="894186310" sldId="564"/>
-        </pc:sldMkLst>
-      </pc:sldChg>
-      <pc:sldChg chg="modSp del">
-        <pc:chgData name="Zhao Jin" userId="cd05a825-544c-438a-9ba1-08e63db50b47" providerId="ADAL" clId="{867F3690-C100-40EE-A937-14612E9F3314}" dt="2021-02-11T11:12:55.303" v="2" actId="47"/>
-        <pc:sldMkLst>
-          <pc:docMk/>
-          <pc:sldMk cId="1276365520" sldId="564"/>
-        </pc:sldMkLst>
-      </pc:sldChg>
-      <pc:sldChg chg="modSp del">
-        <pc:chgData name="Zhao Jin" userId="cd05a825-544c-438a-9ba1-08e63db50b47" providerId="ADAL" clId="{867F3690-C100-40EE-A937-14612E9F3314}" dt="2021-02-11T11:12:55.303" v="2" actId="47"/>
-        <pc:sldMkLst>
-          <pc:docMk/>
-          <pc:sldMk cId="827193018" sldId="565"/>
-        </pc:sldMkLst>
-      </pc:sldChg>
-      <pc:sldChg chg="modSp del">
-        <pc:chgData name="Zhao Jin" userId="cd05a825-544c-438a-9ba1-08e63db50b47" providerId="ADAL" clId="{867F3690-C100-40EE-A937-14612E9F3314}" dt="2021-02-11T11:12:55.303" v="2" actId="47"/>
-        <pc:sldMkLst>
-          <pc:docMk/>
-          <pc:sldMk cId="3959984611" sldId="566"/>
-        </pc:sldMkLst>
-      </pc:sldChg>
-      <pc:sldChg chg="modSp del">
-        <pc:chgData name="Zhao Jin" userId="cd05a825-544c-438a-9ba1-08e63db50b47" providerId="ADAL" clId="{867F3690-C100-40EE-A937-14612E9F3314}" dt="2021-02-11T11:12:55.303" v="2" actId="47"/>
-        <pc:sldMkLst>
-          <pc:docMk/>
-          <pc:sldMk cId="2879329457" sldId="568"/>
-        </pc:sldMkLst>
-      </pc:sldChg>
-      <pc:sldChg chg="modSp del">
-        <pc:chgData name="Zhao Jin" userId="cd05a825-544c-438a-9ba1-08e63db50b47" providerId="ADAL" clId="{867F3690-C100-40EE-A937-14612E9F3314}" dt="2021-02-11T11:12:55.303" v="2" actId="47"/>
-        <pc:sldMkLst>
-          <pc:docMk/>
-          <pc:sldMk cId="4240540711" sldId="569"/>
-        </pc:sldMkLst>
-      </pc:sldChg>
-      <pc:sldChg chg="delSp modSp add mod delAnim">
-        <pc:chgData name="Zhao Jin" userId="cd05a825-544c-438a-9ba1-08e63db50b47" providerId="ADAL" clId="{867F3690-C100-40EE-A937-14612E9F3314}" dt="2021-02-15T04:58:14.889" v="202" actId="478"/>
-        <pc:sldMkLst>
-          <pc:docMk/>
-          <pc:sldMk cId="4156536479" sldId="590"/>
-        </pc:sldMkLst>
-      </pc:sldChg>
-      <pc:sldChg chg="modSp add mod">
-        <pc:chgData name="Zhao Jin" userId="cd05a825-544c-438a-9ba1-08e63db50b47" providerId="ADAL" clId="{867F3690-C100-40EE-A937-14612E9F3314}" dt="2021-02-11T11:13:35.741" v="11"/>
-        <pc:sldMkLst>
-          <pc:docMk/>
-          <pc:sldMk cId="2217225800" sldId="594"/>
-        </pc:sldMkLst>
-      </pc:sldChg>
-      <pc:sldChg chg="delSp modSp add mod">
-        <pc:chgData name="Zhao Jin" userId="cd05a825-544c-438a-9ba1-08e63db50b47" providerId="ADAL" clId="{867F3690-C100-40EE-A937-14612E9F3314}" dt="2021-02-11T11:13:40.184" v="13" actId="478"/>
-        <pc:sldMkLst>
-          <pc:docMk/>
-          <pc:sldMk cId="2419983458" sldId="595"/>
-        </pc:sldMkLst>
-      </pc:sldChg>
-    </pc:docChg>
-  </pc:docChgLst>
-  <pc:docChgLst>
-    <pc:chgData name="Zhao Jin" userId="cd05a825-544c-438a-9ba1-08e63db50b47" providerId="ADAL" clId="{D2C53CB4-D98E-4A4D-AB3B-F903C3FA77B9}"/>
-    <pc:docChg chg="undo custSel addSld delSld modSld">
-      <pc:chgData name="Zhao Jin" userId="cd05a825-544c-438a-9ba1-08e63db50b47" providerId="ADAL" clId="{D2C53CB4-D98E-4A4D-AB3B-F903C3FA77B9}" dt="2021-03-08T05:37:18.936" v="540"/>
-      <pc:docMkLst>
-        <pc:docMk/>
-      </pc:docMkLst>
-      <pc:sldChg chg="modSp mod">
-        <pc:chgData name="Zhao Jin" userId="cd05a825-544c-438a-9ba1-08e63db50b47" providerId="ADAL" clId="{D2C53CB4-D98E-4A4D-AB3B-F903C3FA77B9}" dt="2021-03-01T05:22:09.674" v="0" actId="20577"/>
-        <pc:sldMkLst>
-          <pc:docMk/>
-          <pc:sldMk cId="0" sldId="256"/>
-        </pc:sldMkLst>
-      </pc:sldChg>
-      <pc:sldChg chg="modAnim">
-        <pc:chgData name="Zhao Jin" userId="cd05a825-544c-438a-9ba1-08e63db50b47" providerId="ADAL" clId="{D2C53CB4-D98E-4A4D-AB3B-F903C3FA77B9}" dt="2021-03-08T05:37:18.936" v="540"/>
-        <pc:sldMkLst>
-          <pc:docMk/>
-          <pc:sldMk cId="1427618944" sldId="553"/>
-        </pc:sldMkLst>
-      </pc:sldChg>
-      <pc:sldChg chg="delSp modSp add del mod">
-        <pc:chgData name="Zhao Jin" userId="cd05a825-544c-438a-9ba1-08e63db50b47" providerId="ADAL" clId="{D2C53CB4-D98E-4A4D-AB3B-F903C3FA77B9}" dt="2021-03-08T05:22:34.940" v="208" actId="47"/>
-        <pc:sldMkLst>
-          <pc:docMk/>
-          <pc:sldMk cId="830535321" sldId="603"/>
-        </pc:sldMkLst>
-      </pc:sldChg>
-      <pc:sldChg chg="modSp mod">
-        <pc:chgData name="Zhao Jin" userId="cd05a825-544c-438a-9ba1-08e63db50b47" providerId="ADAL" clId="{D2C53CB4-D98E-4A4D-AB3B-F903C3FA77B9}" dt="2021-03-08T05:28:03.001" v="534" actId="20577"/>
-        <pc:sldMkLst>
-          <pc:docMk/>
-          <pc:sldMk cId="640598186" sldId="606"/>
-        </pc:sldMkLst>
-      </pc:sldChg>
-      <pc:sldChg chg="addSp delSp modSp add mod modAnim">
-        <pc:chgData name="Zhao Jin" userId="cd05a825-544c-438a-9ba1-08e63db50b47" providerId="ADAL" clId="{D2C53CB4-D98E-4A4D-AB3B-F903C3FA77B9}" dt="2021-03-08T05:36:39.052" v="539" actId="20577"/>
-        <pc:sldMkLst>
-          <pc:docMk/>
-          <pc:sldMk cId="3042096305" sldId="638"/>
-        </pc:sldMkLst>
-      </pc:sldChg>
-    </pc:docChg>
-  </pc:docChgLst>
-  <pc:docChgLst>
-    <pc:chgData name="dcszjin@nus.edu.sg" userId="cd05a825-544c-438a-9ba1-08e63db50b47" providerId="ADAL" clId="{6F17B5A8-8938-4206-8B5F-1DF9007C99AC}"/>
-    <pc:docChg chg="undo custSel addSld delSld modSld sldOrd">
-      <pc:chgData name="dcszjin@nus.edu.sg" userId="cd05a825-544c-438a-9ba1-08e63db50b47" providerId="ADAL" clId="{6F17B5A8-8938-4206-8B5F-1DF9007C99AC}" dt="2021-03-08T06:53:03.979" v="1111" actId="20577"/>
-      <pc:docMkLst>
-        <pc:docMk/>
-      </pc:docMkLst>
-      <pc:sldChg chg="modSp mod">
-        <pc:chgData name="dcszjin@nus.edu.sg" userId="cd05a825-544c-438a-9ba1-08e63db50b47" providerId="ADAL" clId="{6F17B5A8-8938-4206-8B5F-1DF9007C99AC}" dt="2021-03-01T07:08:40.699" v="1092" actId="1076"/>
-        <pc:sldMkLst>
-          <pc:docMk/>
-          <pc:sldMk cId="0" sldId="256"/>
-        </pc:sldMkLst>
-      </pc:sldChg>
-      <pc:sldChg chg="modSp mod">
-        <pc:chgData name="dcszjin@nus.edu.sg" userId="cd05a825-544c-438a-9ba1-08e63db50b47" providerId="ADAL" clId="{6F17B5A8-8938-4206-8B5F-1DF9007C99AC}" dt="2021-03-01T06:53:46.482" v="1091"/>
-        <pc:sldMkLst>
-          <pc:docMk/>
-          <pc:sldMk cId="4078418712" sldId="525"/>
-        </pc:sldMkLst>
-      </pc:sldChg>
-      <pc:sldChg chg="modSp add del">
-        <pc:chgData name="dcszjin@nus.edu.sg" userId="cd05a825-544c-438a-9ba1-08e63db50b47" providerId="ADAL" clId="{6F17B5A8-8938-4206-8B5F-1DF9007C99AC}" dt="2021-03-01T06:53:41.009" v="1088"/>
-        <pc:sldMkLst>
-          <pc:docMk/>
-          <pc:sldMk cId="1427618944" sldId="553"/>
-        </pc:sldMkLst>
-      </pc:sldChg>
-      <pc:sldChg chg="del">
-        <pc:chgData name="dcszjin@nus.edu.sg" userId="cd05a825-544c-438a-9ba1-08e63db50b47" providerId="ADAL" clId="{6F17B5A8-8938-4206-8B5F-1DF9007C99AC}" dt="2021-03-01T06:25:00.903" v="56" actId="47"/>
-        <pc:sldMkLst>
-          <pc:docMk/>
-          <pc:sldMk cId="1663851036" sldId="559"/>
-        </pc:sldMkLst>
-      </pc:sldChg>
-      <pc:sldChg chg="del">
-        <pc:chgData name="dcszjin@nus.edu.sg" userId="cd05a825-544c-438a-9ba1-08e63db50b47" providerId="ADAL" clId="{6F17B5A8-8938-4206-8B5F-1DF9007C99AC}" dt="2021-03-01T06:25:00.903" v="56" actId="47"/>
-        <pc:sldMkLst>
-          <pc:docMk/>
-          <pc:sldMk cId="1971208294" sldId="560"/>
-        </pc:sldMkLst>
-      </pc:sldChg>
-      <pc:sldChg chg="del">
-        <pc:chgData name="dcszjin@nus.edu.sg" userId="cd05a825-544c-438a-9ba1-08e63db50b47" providerId="ADAL" clId="{6F17B5A8-8938-4206-8B5F-1DF9007C99AC}" dt="2021-03-01T06:25:00.903" v="56" actId="47"/>
-        <pc:sldMkLst>
-          <pc:docMk/>
-          <pc:sldMk cId="894186310" sldId="564"/>
-        </pc:sldMkLst>
-      </pc:sldChg>
-      <pc:sldChg chg="del">
-        <pc:chgData name="dcszjin@nus.edu.sg" userId="cd05a825-544c-438a-9ba1-08e63db50b47" providerId="ADAL" clId="{6F17B5A8-8938-4206-8B5F-1DF9007C99AC}" dt="2021-03-01T06:25:00.903" v="56" actId="47"/>
-        <pc:sldMkLst>
-          <pc:docMk/>
-          <pc:sldMk cId="4156536479" sldId="590"/>
-        </pc:sldMkLst>
-      </pc:sldChg>
-      <pc:sldChg chg="del">
-        <pc:chgData name="dcszjin@nus.edu.sg" userId="cd05a825-544c-438a-9ba1-08e63db50b47" providerId="ADAL" clId="{6F17B5A8-8938-4206-8B5F-1DF9007C99AC}" dt="2021-03-01T06:25:00.903" v="56" actId="47"/>
-        <pc:sldMkLst>
-          <pc:docMk/>
-          <pc:sldMk cId="2217225800" sldId="594"/>
-        </pc:sldMkLst>
-      </pc:sldChg>
-      <pc:sldChg chg="del">
-        <pc:chgData name="dcszjin@nus.edu.sg" userId="cd05a825-544c-438a-9ba1-08e63db50b47" providerId="ADAL" clId="{6F17B5A8-8938-4206-8B5F-1DF9007C99AC}" dt="2021-03-01T06:25:00.903" v="56" actId="47"/>
-        <pc:sldMkLst>
-          <pc:docMk/>
-          <pc:sldMk cId="2419983458" sldId="595"/>
-        </pc:sldMkLst>
-      </pc:sldChg>
-      <pc:sldChg chg="addSp delSp modSp add mod ord delAnim">
-        <pc:chgData name="dcszjin@nus.edu.sg" userId="cd05a825-544c-438a-9ba1-08e63db50b47" providerId="ADAL" clId="{6F17B5A8-8938-4206-8B5F-1DF9007C99AC}" dt="2021-03-01T06:53:44.441" v="1090"/>
-        <pc:sldMkLst>
-          <pc:docMk/>
-          <pc:sldMk cId="1542002799" sldId="602"/>
-        </pc:sldMkLst>
-      </pc:sldChg>
-      <pc:sldChg chg="addSp delSp modSp add del mod addAnim delAnim">
-        <pc:chgData name="dcszjin@nus.edu.sg" userId="cd05a825-544c-438a-9ba1-08e63db50b47" providerId="ADAL" clId="{6F17B5A8-8938-4206-8B5F-1DF9007C99AC}" dt="2021-03-01T07:15:54.669" v="1096" actId="47"/>
-        <pc:sldMkLst>
-          <pc:docMk/>
-          <pc:sldMk cId="600747522" sldId="604"/>
-        </pc:sldMkLst>
-      </pc:sldChg>
-      <pc:sldChg chg="modSp add mod">
-        <pc:chgData name="dcszjin@nus.edu.sg" userId="cd05a825-544c-438a-9ba1-08e63db50b47" providerId="ADAL" clId="{6F17B5A8-8938-4206-8B5F-1DF9007C99AC}" dt="2021-03-01T06:53:31.297" v="1084"/>
-        <pc:sldMkLst>
-          <pc:docMk/>
-          <pc:sldMk cId="2489370454" sldId="605"/>
-        </pc:sldMkLst>
-      </pc:sldChg>
-      <pc:sldChg chg="delSp modSp add mod">
-        <pc:chgData name="dcszjin@nus.edu.sg" userId="cd05a825-544c-438a-9ba1-08e63db50b47" providerId="ADAL" clId="{6F17B5A8-8938-4206-8B5F-1DF9007C99AC}" dt="2021-03-01T07:17:37.118" v="1107" actId="478"/>
-        <pc:sldMkLst>
-          <pc:docMk/>
-          <pc:sldMk cId="640598186" sldId="606"/>
-        </pc:sldMkLst>
-      </pc:sldChg>
-      <pc:sldChg chg="addSp delSp modSp add del mod delAnim modAnim">
-        <pc:chgData name="dcszjin@nus.edu.sg" userId="cd05a825-544c-438a-9ba1-08e63db50b47" providerId="ADAL" clId="{6F17B5A8-8938-4206-8B5F-1DF9007C99AC}" dt="2021-03-01T06:37:08.889" v="418" actId="47"/>
-        <pc:sldMkLst>
-          <pc:docMk/>
-          <pc:sldMk cId="4199745321" sldId="619"/>
-        </pc:sldMkLst>
-      </pc:sldChg>
-      <pc:sldChg chg="modSp add">
-        <pc:chgData name="dcszjin@nus.edu.sg" userId="cd05a825-544c-438a-9ba1-08e63db50b47" providerId="ADAL" clId="{6F17B5A8-8938-4206-8B5F-1DF9007C99AC}" dt="2021-03-01T06:53:33.809" v="1085"/>
-        <pc:sldMkLst>
-          <pc:docMk/>
-          <pc:sldMk cId="282410985" sldId="620"/>
-        </pc:sldMkLst>
-      </pc:sldChg>
-      <pc:sldChg chg="add del">
-        <pc:chgData name="dcszjin@nus.edu.sg" userId="cd05a825-544c-438a-9ba1-08e63db50b47" providerId="ADAL" clId="{6F17B5A8-8938-4206-8B5F-1DF9007C99AC}" dt="2021-03-01T06:34:44.863" v="242" actId="47"/>
-        <pc:sldMkLst>
-          <pc:docMk/>
-          <pc:sldMk cId="846468992" sldId="621"/>
-        </pc:sldMkLst>
-      </pc:sldChg>
-      <pc:sldChg chg="addSp modSp add mod">
-        <pc:chgData name="dcszjin@nus.edu.sg" userId="cd05a825-544c-438a-9ba1-08e63db50b47" providerId="ADAL" clId="{6F17B5A8-8938-4206-8B5F-1DF9007C99AC}" dt="2021-03-01T06:53:35.760" v="1086"/>
-        <pc:sldMkLst>
-          <pc:docMk/>
-          <pc:sldMk cId="3503582036" sldId="622"/>
-        </pc:sldMkLst>
-      </pc:sldChg>
-      <pc:sldChg chg="modSp add">
-        <pc:chgData name="dcszjin@nus.edu.sg" userId="cd05a825-544c-438a-9ba1-08e63db50b47" providerId="ADAL" clId="{6F17B5A8-8938-4206-8B5F-1DF9007C99AC}" dt="2021-03-01T06:53:37.536" v="1087"/>
-        <pc:sldMkLst>
-          <pc:docMk/>
-          <pc:sldMk cId="1258830549" sldId="635"/>
-        </pc:sldMkLst>
-      </pc:sldChg>
-      <pc:sldChg chg="delSp modSp add del mod delAnim">
-        <pc:chgData name="dcszjin@nus.edu.sg" userId="cd05a825-544c-438a-9ba1-08e63db50b47" providerId="ADAL" clId="{6F17B5A8-8938-4206-8B5F-1DF9007C99AC}" dt="2021-03-01T06:38:19.926" v="441" actId="47"/>
-        <pc:sldMkLst>
-          <pc:docMk/>
-          <pc:sldMk cId="1364216338" sldId="636"/>
-        </pc:sldMkLst>
-      </pc:sldChg>
-      <pc:sldChg chg="addSp delSp modSp add del mod">
-        <pc:chgData name="dcszjin@nus.edu.sg" userId="cd05a825-544c-438a-9ba1-08e63db50b47" providerId="ADAL" clId="{6F17B5A8-8938-4206-8B5F-1DF9007C99AC}" dt="2021-03-01T06:49:01.783" v="721" actId="47"/>
-        <pc:sldMkLst>
-          <pc:docMk/>
-          <pc:sldMk cId="3364444345" sldId="636"/>
-        </pc:sldMkLst>
-      </pc:sldChg>
-      <pc:sldChg chg="add del">
-        <pc:chgData name="dcszjin@nus.edu.sg" userId="cd05a825-544c-438a-9ba1-08e63db50b47" providerId="ADAL" clId="{6F17B5A8-8938-4206-8B5F-1DF9007C99AC}" dt="2021-03-01T06:41:43.577" v="611"/>
-        <pc:sldMkLst>
-          <pc:docMk/>
-          <pc:sldMk cId="1109647801" sldId="637"/>
-        </pc:sldMkLst>
-      </pc:sldChg>
-      <pc:sldChg chg="addSp modSp add mod">
-        <pc:chgData name="dcszjin@nus.edu.sg" userId="cd05a825-544c-438a-9ba1-08e63db50b47" providerId="ADAL" clId="{6F17B5A8-8938-4206-8B5F-1DF9007C99AC}" dt="2021-03-08T06:53:03.979" v="1111" actId="20577"/>
-        <pc:sldMkLst>
-          <pc:docMk/>
-          <pc:sldMk cId="1235845528" sldId="637"/>
-        </pc:sldMkLst>
-      </pc:sldChg>
-    </pc:docChg>
-  </pc:docChgLst>
-  <pc:docChgLst>
-    <pc:chgData name="Zhao Jin" userId="cd05a825-544c-438a-9ba1-08e63db50b47" providerId="ADAL" clId="{11CE9936-648B-4939-9FD1-F8103D69B7B2}"/>
-    <pc:docChg chg="undo custSel addSld delSld modSld">
-      <pc:chgData name="Zhao Jin" userId="cd05a825-544c-438a-9ba1-08e63db50b47" providerId="ADAL" clId="{11CE9936-648B-4939-9FD1-F8103D69B7B2}" dt="2024-03-12T00:53:14.942" v="602" actId="478"/>
-      <pc:docMkLst>
-        <pc:docMk/>
-      </pc:docMkLst>
-      <pc:sldChg chg="addSp delSp modSp mod delAnim modAnim">
-        <pc:chgData name="Zhao Jin" userId="cd05a825-544c-438a-9ba1-08e63db50b47" providerId="ADAL" clId="{11CE9936-648B-4939-9FD1-F8103D69B7B2}" dt="2024-03-11T05:45:19.868" v="593" actId="20577"/>
-        <pc:sldMkLst>
-          <pc:docMk/>
-          <pc:sldMk cId="4078418712" sldId="525"/>
-        </pc:sldMkLst>
-      </pc:sldChg>
-      <pc:sldChg chg="del">
-        <pc:chgData name="Zhao Jin" userId="cd05a825-544c-438a-9ba1-08e63db50b47" providerId="ADAL" clId="{11CE9936-648B-4939-9FD1-F8103D69B7B2}" dt="2024-03-08T08:40:46.350" v="84" actId="2696"/>
-        <pc:sldMkLst>
-          <pc:docMk/>
-          <pc:sldMk cId="1427618944" sldId="553"/>
-        </pc:sldMkLst>
-      </pc:sldChg>
-      <pc:sldChg chg="modSp add mod modAnim">
-        <pc:chgData name="Zhao Jin" userId="cd05a825-544c-438a-9ba1-08e63db50b47" providerId="ADAL" clId="{11CE9936-648B-4939-9FD1-F8103D69B7B2}" dt="2024-03-08T08:53:44.644" v="203"/>
-        <pc:sldMkLst>
-          <pc:docMk/>
-          <pc:sldMk cId="2900383044" sldId="601"/>
-        </pc:sldMkLst>
-      </pc:sldChg>
-      <pc:sldChg chg="del">
-        <pc:chgData name="Zhao Jin" userId="cd05a825-544c-438a-9ba1-08e63db50b47" providerId="ADAL" clId="{11CE9936-648B-4939-9FD1-F8103D69B7B2}" dt="2024-03-08T08:40:46.350" v="84" actId="2696"/>
-        <pc:sldMkLst>
-          <pc:docMk/>
-          <pc:sldMk cId="1542002799" sldId="602"/>
-        </pc:sldMkLst>
-      </pc:sldChg>
-      <pc:sldChg chg="del">
-        <pc:chgData name="Zhao Jin" userId="cd05a825-544c-438a-9ba1-08e63db50b47" providerId="ADAL" clId="{11CE9936-648B-4939-9FD1-F8103D69B7B2}" dt="2024-03-08T08:33:06.641" v="0" actId="2696"/>
-        <pc:sldMkLst>
-          <pc:docMk/>
-          <pc:sldMk cId="2489370454" sldId="605"/>
-        </pc:sldMkLst>
-      </pc:sldChg>
-      <pc:sldChg chg="addSp delSp modSp del mod">
-        <pc:chgData name="Zhao Jin" userId="cd05a825-544c-438a-9ba1-08e63db50b47" providerId="ADAL" clId="{11CE9936-648B-4939-9FD1-F8103D69B7B2}" dt="2024-03-08T08:47:52.577" v="142" actId="47"/>
-        <pc:sldMkLst>
-          <pc:docMk/>
-          <pc:sldMk cId="640598186" sldId="606"/>
-        </pc:sldMkLst>
-      </pc:sldChg>
-      <pc:sldChg chg="addSp delSp modSp add mod delAnim">
-        <pc:chgData name="Zhao Jin" userId="cd05a825-544c-438a-9ba1-08e63db50b47" providerId="ADAL" clId="{11CE9936-648B-4939-9FD1-F8103D69B7B2}" dt="2024-03-08T08:40:03.533" v="83" actId="1076"/>
-        <pc:sldMkLst>
-          <pc:docMk/>
-          <pc:sldMk cId="4199745321" sldId="619"/>
-        </pc:sldMkLst>
-      </pc:sldChg>
-      <pc:sldChg chg="delSp modSp del mod">
-        <pc:chgData name="Zhao Jin" userId="cd05a825-544c-438a-9ba1-08e63db50b47" providerId="ADAL" clId="{11CE9936-648B-4939-9FD1-F8103D69B7B2}" dt="2024-03-08T08:37:02.443" v="29" actId="47"/>
-        <pc:sldMkLst>
-          <pc:docMk/>
-          <pc:sldMk cId="282410985" sldId="620"/>
-        </pc:sldMkLst>
-      </pc:sldChg>
-      <pc:sldChg chg="addSp delSp modSp mod modAnim">
-        <pc:chgData name="Zhao Jin" userId="cd05a825-544c-438a-9ba1-08e63db50b47" providerId="ADAL" clId="{11CE9936-648B-4939-9FD1-F8103D69B7B2}" dt="2024-03-08T08:54:31.675" v="216"/>
-        <pc:sldMkLst>
-          <pc:docMk/>
-          <pc:sldMk cId="3503582036" sldId="622"/>
-        </pc:sldMkLst>
-      </pc:sldChg>
-      <pc:sldChg chg="addSp delSp modSp mod modAnim">
-        <pc:chgData name="Zhao Jin" userId="cd05a825-544c-438a-9ba1-08e63db50b47" providerId="ADAL" clId="{11CE9936-648B-4939-9FD1-F8103D69B7B2}" dt="2024-03-11T05:40:43.293" v="221" actId="20577"/>
-        <pc:sldMkLst>
-          <pc:docMk/>
-          <pc:sldMk cId="1258830549" sldId="635"/>
-        </pc:sldMkLst>
-      </pc:sldChg>
-      <pc:sldChg chg="addSp delSp modSp add mod modAnim">
-        <pc:chgData name="Zhao Jin" userId="cd05a825-544c-438a-9ba1-08e63db50b47" providerId="ADAL" clId="{11CE9936-648B-4939-9FD1-F8103D69B7B2}" dt="2024-03-08T08:53:04.968" v="202" actId="13926"/>
-        <pc:sldMkLst>
-          <pc:docMk/>
-          <pc:sldMk cId="980586276" sldId="636"/>
-        </pc:sldMkLst>
-      </pc:sldChg>
-      <pc:sldChg chg="del">
-        <pc:chgData name="Zhao Jin" userId="cd05a825-544c-438a-9ba1-08e63db50b47" providerId="ADAL" clId="{11CE9936-648B-4939-9FD1-F8103D69B7B2}" dt="2024-03-08T08:40:46.350" v="84" actId="2696"/>
-        <pc:sldMkLst>
-          <pc:docMk/>
-          <pc:sldMk cId="1235845528" sldId="637"/>
-        </pc:sldMkLst>
-      </pc:sldChg>
-      <pc:sldChg chg="add">
-        <pc:chgData name="Zhao Jin" userId="cd05a825-544c-438a-9ba1-08e63db50b47" providerId="ADAL" clId="{11CE9936-648B-4939-9FD1-F8103D69B7B2}" dt="2024-03-11T05:41:47.118" v="224"/>
-        <pc:sldMkLst>
-          <pc:docMk/>
-          <pc:sldMk cId="2505883410" sldId="637"/>
-        </pc:sldMkLst>
-      </pc:sldChg>
-      <pc:sldChg chg="add del">
-        <pc:chgData name="Zhao Jin" userId="cd05a825-544c-438a-9ba1-08e63db50b47" providerId="ADAL" clId="{11CE9936-648B-4939-9FD1-F8103D69B7B2}" dt="2024-03-08T08:48:57.268" v="149" actId="47"/>
-        <pc:sldMkLst>
-          <pc:docMk/>
-          <pc:sldMk cId="3361210275" sldId="637"/>
-        </pc:sldMkLst>
-      </pc:sldChg>
-      <pc:sldChg chg="addSp delSp modSp add mod delAnim modAnim">
-        <pc:chgData name="Zhao Jin" userId="cd05a825-544c-438a-9ba1-08e63db50b47" providerId="ADAL" clId="{11CE9936-648B-4939-9FD1-F8103D69B7B2}" dt="2024-03-12T00:53:14.942" v="602" actId="478"/>
-        <pc:sldMkLst>
-          <pc:docMk/>
-          <pc:sldMk cId="2802426808" sldId="638"/>
-        </pc:sldMkLst>
-      </pc:sldChg>
-      <pc:sldChg chg="del">
-        <pc:chgData name="Zhao Jin" userId="cd05a825-544c-438a-9ba1-08e63db50b47" providerId="ADAL" clId="{11CE9936-648B-4939-9FD1-F8103D69B7B2}" dt="2024-03-08T08:33:31.083" v="1" actId="47"/>
-        <pc:sldMkLst>
-          <pc:docMk/>
-          <pc:sldMk cId="3042096305" sldId="638"/>
-        </pc:sldMkLst>
-      </pc:sldChg>
-    </pc:docChg>
-  </pc:docChgLst>
-  <pc:docChgLst>
-    <pc:chgData name="Zhao Jin" userId="cd05a825-544c-438a-9ba1-08e63db50b47" providerId="ADAL" clId="{39F94C1A-1739-2146-9770-28C6D97CD74A}"/>
-    <pc:docChg chg="undo custSel addSld delSld modSld">
-      <pc:chgData name="Zhao Jin" userId="cd05a825-544c-438a-9ba1-08e63db50b47" providerId="ADAL" clId="{39F94C1A-1739-2146-9770-28C6D97CD74A}" dt="2021-01-27T04:54:28.852" v="864" actId="20577"/>
-      <pc:docMkLst>
-        <pc:docMk/>
-      </pc:docMkLst>
-      <pc:sldChg chg="modSp">
-        <pc:chgData name="Zhao Jin" userId="cd05a825-544c-438a-9ba1-08e63db50b47" providerId="ADAL" clId="{39F94C1A-1739-2146-9770-28C6D97CD74A}" dt="2021-01-27T04:29:55.834" v="1" actId="20577"/>
-        <pc:sldMkLst>
-          <pc:docMk/>
-          <pc:sldMk cId="0" sldId="256"/>
-        </pc:sldMkLst>
-      </pc:sldChg>
-      <pc:sldChg chg="addSp delSp modSp add delAnim modAnim">
-        <pc:chgData name="Zhao Jin" userId="cd05a825-544c-438a-9ba1-08e63db50b47" providerId="ADAL" clId="{39F94C1A-1739-2146-9770-28C6D97CD74A}" dt="2021-01-27T04:54:22.999" v="862" actId="20577"/>
-        <pc:sldMkLst>
-          <pc:docMk/>
-          <pc:sldMk cId="1492339910" sldId="485"/>
-        </pc:sldMkLst>
-      </pc:sldChg>
-      <pc:sldChg chg="addSp delSp modSp add modAnim">
-        <pc:chgData name="Zhao Jin" userId="cd05a825-544c-438a-9ba1-08e63db50b47" providerId="ADAL" clId="{39F94C1A-1739-2146-9770-28C6D97CD74A}" dt="2021-01-27T04:54:02.548" v="843" actId="20577"/>
-        <pc:sldMkLst>
-          <pc:docMk/>
-          <pc:sldMk cId="2775173622" sldId="524"/>
-        </pc:sldMkLst>
-      </pc:sldChg>
-      <pc:sldChg chg="add del">
-        <pc:chgData name="Zhao Jin" userId="cd05a825-544c-438a-9ba1-08e63db50b47" providerId="ADAL" clId="{39F94C1A-1739-2146-9770-28C6D97CD74A}" dt="2021-01-27T04:50:24.218" v="666"/>
-        <pc:sldMkLst>
-          <pc:docMk/>
-          <pc:sldMk cId="4023450610" sldId="524"/>
-        </pc:sldMkLst>
-      </pc:sldChg>
-      <pc:sldChg chg="del">
-        <pc:chgData name="Zhao Jin" userId="cd05a825-544c-438a-9ba1-08e63db50b47" providerId="ADAL" clId="{39F94C1A-1739-2146-9770-28C6D97CD74A}" dt="2021-01-27T04:30:02.278" v="7" actId="2696"/>
-        <pc:sldMkLst>
-          <pc:docMk/>
-          <pc:sldMk cId="3871162519" sldId="525"/>
-        </pc:sldMkLst>
-      </pc:sldChg>
-      <pc:sldChg chg="delSp modSp add">
-        <pc:chgData name="Zhao Jin" userId="cd05a825-544c-438a-9ba1-08e63db50b47" providerId="ADAL" clId="{39F94C1A-1739-2146-9770-28C6D97CD74A}" dt="2021-01-27T04:54:28.852" v="864" actId="20577"/>
-        <pc:sldMkLst>
-          <pc:docMk/>
-          <pc:sldMk cId="4078418712" sldId="525"/>
-        </pc:sldMkLst>
-      </pc:sldChg>
-      <pc:sldChg chg="del">
-        <pc:chgData name="Zhao Jin" userId="cd05a825-544c-438a-9ba1-08e63db50b47" providerId="ADAL" clId="{39F94C1A-1739-2146-9770-28C6D97CD74A}" dt="2021-01-27T04:30:02.169" v="2" actId="2696"/>
-        <pc:sldMkLst>
-          <pc:docMk/>
-          <pc:sldMk cId="2543678377" sldId="531"/>
-        </pc:sldMkLst>
-      </pc:sldChg>
-      <pc:sldChg chg="del">
-        <pc:chgData name="Zhao Jin" userId="cd05a825-544c-438a-9ba1-08e63db50b47" providerId="ADAL" clId="{39F94C1A-1739-2146-9770-28C6D97CD74A}" dt="2021-01-27T04:30:02.196" v="3" actId="2696"/>
-        <pc:sldMkLst>
-          <pc:docMk/>
-          <pc:sldMk cId="2025693378" sldId="532"/>
-        </pc:sldMkLst>
-      </pc:sldChg>
-      <pc:sldChg chg="del">
-        <pc:chgData name="Zhao Jin" userId="cd05a825-544c-438a-9ba1-08e63db50b47" providerId="ADAL" clId="{39F94C1A-1739-2146-9770-28C6D97CD74A}" dt="2021-01-27T04:30:02.254" v="5" actId="2696"/>
-        <pc:sldMkLst>
-          <pc:docMk/>
-          <pc:sldMk cId="266706937" sldId="533"/>
-        </pc:sldMkLst>
-      </pc:sldChg>
-      <pc:sldChg chg="del">
-        <pc:chgData name="Zhao Jin" userId="cd05a825-544c-438a-9ba1-08e63db50b47" providerId="ADAL" clId="{39F94C1A-1739-2146-9770-28C6D97CD74A}" dt="2021-01-27T04:30:02.230" v="4" actId="2696"/>
-        <pc:sldMkLst>
-          <pc:docMk/>
-          <pc:sldMk cId="3198948174" sldId="535"/>
-        </pc:sldMkLst>
-      </pc:sldChg>
-      <pc:sldChg chg="del">
-        <pc:chgData name="Zhao Jin" userId="cd05a825-544c-438a-9ba1-08e63db50b47" providerId="ADAL" clId="{39F94C1A-1739-2146-9770-28C6D97CD74A}" dt="2021-01-27T04:30:02.268" v="6" actId="2696"/>
-        <pc:sldMkLst>
-          <pc:docMk/>
-          <pc:sldMk cId="3984392134" sldId="537"/>
-        </pc:sldMkLst>
-      </pc:sldChg>
-      <pc:sldChg chg="modSp add">
-        <pc:chgData name="Zhao Jin" userId="cd05a825-544c-438a-9ba1-08e63db50b47" providerId="ADAL" clId="{39F94C1A-1739-2146-9770-28C6D97CD74A}" dt="2021-01-27T04:54:10.942" v="852" actId="20577"/>
-        <pc:sldMkLst>
-          <pc:docMk/>
-          <pc:sldMk cId="3949125736" sldId="548"/>
-        </pc:sldMkLst>
-      </pc:sldChg>
-      <pc:sldChg chg="modSp add">
-        <pc:chgData name="Zhao Jin" userId="cd05a825-544c-438a-9ba1-08e63db50b47" providerId="ADAL" clId="{39F94C1A-1739-2146-9770-28C6D97CD74A}" dt="2021-01-27T04:54:14.716" v="857" actId="20577"/>
-        <pc:sldMkLst>
-          <pc:docMk/>
-          <pc:sldMk cId="2939077141" sldId="549"/>
-        </pc:sldMkLst>
-      </pc:sldChg>
-    </pc:docChg>
-  </pc:docChgLst>
-  <pc:docChgLst>
-    <pc:chgData name="Zhao Jin" userId="cd05a825-544c-438a-9ba1-08e63db50b47" providerId="ADAL" clId="{C328B041-D897-B548-9F0A-DA2B3CC3BF8E}"/>
-    <pc:docChg chg="undo custSel modSld">
-      <pc:chgData name="Zhao Jin" userId="cd05a825-544c-438a-9ba1-08e63db50b47" providerId="ADAL" clId="{C328B041-D897-B548-9F0A-DA2B3CC3BF8E}" dt="2021-03-08T02:30:29.708" v="502" actId="478"/>
-      <pc:docMkLst>
-        <pc:docMk/>
-      </pc:docMkLst>
-      <pc:sldChg chg="addSp delSp modSp">
-        <pc:chgData name="Zhao Jin" userId="cd05a825-544c-438a-9ba1-08e63db50b47" providerId="ADAL" clId="{C328B041-D897-B548-9F0A-DA2B3CC3BF8E}" dt="2021-03-08T01:59:34.595" v="472" actId="1076"/>
-        <pc:sldMkLst>
-          <pc:docMk/>
-          <pc:sldMk cId="640598186" sldId="606"/>
-        </pc:sldMkLst>
-      </pc:sldChg>
-      <pc:sldChg chg="addSp delSp modSp delAnim modAnim">
-        <pc:chgData name="Zhao Jin" userId="cd05a825-544c-438a-9ba1-08e63db50b47" providerId="ADAL" clId="{C328B041-D897-B548-9F0A-DA2B3CC3BF8E}" dt="2021-03-08T02:29:23.604" v="485"/>
-        <pc:sldMkLst>
-          <pc:docMk/>
-          <pc:sldMk cId="282410985" sldId="620"/>
-        </pc:sldMkLst>
-      </pc:sldChg>
-      <pc:sldChg chg="modAnim">
-        <pc:chgData name="Zhao Jin" userId="cd05a825-544c-438a-9ba1-08e63db50b47" providerId="ADAL" clId="{C328B041-D897-B548-9F0A-DA2B3CC3BF8E}" dt="2021-03-08T02:28:00.489" v="483"/>
-        <pc:sldMkLst>
-          <pc:docMk/>
-          <pc:sldMk cId="3503582036" sldId="622"/>
-        </pc:sldMkLst>
-      </pc:sldChg>
-      <pc:sldChg chg="delSp modSp modAnim">
-        <pc:chgData name="Zhao Jin" userId="cd05a825-544c-438a-9ba1-08e63db50b47" providerId="ADAL" clId="{C328B041-D897-B548-9F0A-DA2B3CC3BF8E}" dt="2021-03-08T02:30:29.708" v="502" actId="478"/>
-        <pc:sldMkLst>
-          <pc:docMk/>
-          <pc:sldMk cId="1258830549" sldId="635"/>
-        </pc:sldMkLst>
+        <pc:spChg chg="mod">
+          <ac:chgData name="Zhao Jin" userId="cd05a825-544c-438a-9ba1-08e63db50b47" providerId="ADAL" clId="{5DF3A229-1965-414E-AF54-F4C37AC7DF68}" dt="2026-03-09T08:42:16.905" v="155" actId="207"/>
+          <ac:spMkLst>
+            <pc:docMk/>
+            <pc:sldMk cId="1414353441" sldId="646"/>
+            <ac:spMk id="7" creationId="{68FE83B9-5DAF-C4E0-7BA6-EE8195BF0690}"/>
+          </ac:spMkLst>
+        </pc:spChg>
+        <pc:spChg chg="mod">
+          <ac:chgData name="Zhao Jin" userId="cd05a825-544c-438a-9ba1-08e63db50b47" providerId="ADAL" clId="{5DF3A229-1965-414E-AF54-F4C37AC7DF68}" dt="2026-03-09T08:39:22.523" v="137"/>
+          <ac:spMkLst>
+            <pc:docMk/>
+            <pc:sldMk cId="1414353441" sldId="646"/>
+            <ac:spMk id="43" creationId="{5F68C6FD-7CF7-4365-CFB2-DD8947C1880C}"/>
+          </ac:spMkLst>
+        </pc:spChg>
       </pc:sldChg>
     </pc:docChg>
   </pc:docChgLst>
@@ -1943,7 +882,7 @@
               <a:pPr>
                 <a:defRPr/>
               </a:pPr>
-              <a:t>3/11/2025</a:t>
+              <a:t>3/9/2026</a:t>
             </a:fld>
             <a:endParaRPr lang="en-US"/>
           </a:p>
@@ -2369,6 +1308,122 @@
           <a:lstStyle/>
           <a:p>
             <a:pPr eaLnBrk="1" hangingPunct="1"/>
+            <a:endParaRPr lang="en-US" dirty="0"/>
+          </a:p>
+        </p:txBody>
+      </p:sp>
+    </p:spTree>
+    <p:extLst>
+      <p:ext uri="{BB962C8B-B14F-4D97-AF65-F5344CB8AC3E}">
+        <p14:creationId xmlns:p14="http://schemas.microsoft.com/office/powerpoint/2010/main" val="860814524"/>
+      </p:ext>
+    </p:extLst>
+  </p:cSld>
+  <p:clrMapOvr>
+    <a:masterClrMapping/>
+  </p:clrMapOvr>
+</p:notes>
+</file>
+
+<file path=ppt/notesSlides/notesSlide11.xml><?xml version="1.0" encoding="utf-8"?>
+<p:notes xmlns:a="http://schemas.openxmlformats.org/drawingml/2006/main" xmlns:r="http://schemas.openxmlformats.org/officeDocument/2006/relationships" xmlns:p="http://schemas.openxmlformats.org/presentationml/2006/main">
+  <p:cSld>
+    <p:spTree>
+      <p:nvGrpSpPr>
+        <p:cNvPr id="1" name=""/>
+        <p:cNvGrpSpPr/>
+        <p:nvPr/>
+      </p:nvGrpSpPr>
+      <p:grpSpPr>
+        <a:xfrm>
+          <a:off x="0" y="0"/>
+          <a:ext cx="0" cy="0"/>
+          <a:chOff x="0" y="0"/>
+          <a:chExt cx="0" cy="0"/>
+        </a:xfrm>
+      </p:grpSpPr>
+      <p:sp>
+        <p:nvSpPr>
+          <p:cNvPr id="74754" name="Rectangle 2"/>
+          <p:cNvSpPr>
+            <a:spLocks noGrp="1" noChangeArrowheads="1"/>
+          </p:cNvSpPr>
+          <p:nvPr>
+            <p:ph type="hdr" sz="quarter"/>
+          </p:nvPr>
+        </p:nvSpPr>
+        <p:spPr bwMode="auto">
+          <a:xfrm>
+            <a:off x="0" y="0"/>
+            <a:ext cx="3038786" cy="465341"/>
+          </a:xfrm>
+          <a:noFill/>
+          <a:ln>
+            <a:miter lim="800000"/>
+            <a:headEnd/>
+            <a:tailEnd/>
+          </a:ln>
+        </p:spPr>
+        <p:txBody>
+          <a:bodyPr wrap="square" numCol="1" anchor="t" anchorCtr="0" compatLnSpc="1">
+            <a:prstTxWarp prst="textNoShape">
+              <a:avLst/>
+            </a:prstTxWarp>
+          </a:bodyPr>
+          <a:lstStyle/>
+          <a:p>
+            <a:r>
+              <a:rPr lang="en-US"/>
+              <a:t>CS1010 Programming Methodology</a:t>
+            </a:r>
+          </a:p>
+        </p:txBody>
+      </p:sp>
+      <p:sp>
+        <p:nvSpPr>
+          <p:cNvPr id="74755" name="Rectangle 2"/>
+          <p:cNvSpPr>
+            <a:spLocks noGrp="1" noRot="1" noChangeAspect="1" noChangeArrowheads="1" noTextEdit="1"/>
+          </p:cNvSpPr>
+          <p:nvPr>
+            <p:ph type="sldImg"/>
+          </p:nvPr>
+        </p:nvSpPr>
+        <p:spPr bwMode="auto">
+          <a:xfrm>
+            <a:off x="1182688" y="696913"/>
+            <a:ext cx="4648200" cy="3486150"/>
+          </a:xfrm>
+          <a:noFill/>
+          <a:ln>
+            <a:solidFill>
+              <a:srgbClr val="000000"/>
+            </a:solidFill>
+            <a:miter lim="800000"/>
+            <a:headEnd/>
+            <a:tailEnd/>
+          </a:ln>
+        </p:spPr>
+      </p:sp>
+      <p:sp>
+        <p:nvSpPr>
+          <p:cNvPr id="74756" name="Rectangle 3"/>
+          <p:cNvSpPr>
+            <a:spLocks noGrp="1" noChangeArrowheads="1"/>
+          </p:cNvSpPr>
+          <p:nvPr>
+            <p:ph type="body" idx="1"/>
+          </p:nvPr>
+        </p:nvSpPr>
+        <p:spPr>
+          <a:noFill/>
+          <a:ln w="9525"/>
+        </p:spPr>
+        <p:txBody>
+          <a:bodyPr/>
+          <a:lstStyle/>
+          <a:p>
+            <a:pPr eaLnBrk="1" hangingPunct="1"/>
             <a:endParaRPr lang="en-US"/>
           </a:p>
         </p:txBody>
@@ -3140,7 +2195,13 @@
   <p:cSld>
     <p:spTree>
       <p:nvGrpSpPr>
-        <p:cNvPr id="1" name=""/>
+        <p:cNvPr id="1" name="">
+          <a:extLst>
+            <a:ext uri="{FF2B5EF4-FFF2-40B4-BE49-F238E27FC236}">
+              <a16:creationId xmlns:a16="http://schemas.microsoft.com/office/drawing/2014/main" id="{F4F53B2B-BF7B-C90E-EA01-098BC2A0AF9F}"/>
+            </a:ext>
+          </a:extLst>
+        </p:cNvPr>
         <p:cNvGrpSpPr/>
         <p:nvPr/>
       </p:nvGrpSpPr>
@@ -3154,7 +2215,13 @@
       </p:grpSpPr>
       <p:sp>
         <p:nvSpPr>
-          <p:cNvPr id="74754" name="Rectangle 2"/>
+          <p:cNvPr id="74754" name="Rectangle 2">
+            <a:extLst>
+              <a:ext uri="{FF2B5EF4-FFF2-40B4-BE49-F238E27FC236}">
+                <a16:creationId xmlns:a16="http://schemas.microsoft.com/office/drawing/2014/main" id="{B46FEA5C-0438-DFD0-5C5C-493B70182389}"/>
+              </a:ext>
+            </a:extLst>
+          </p:cNvPr>
           <p:cNvSpPr>
             <a:spLocks noGrp="1" noChangeArrowheads="1"/>
           </p:cNvSpPr>
@@ -3191,7 +2258,13 @@
       </p:sp>
       <p:sp>
         <p:nvSpPr>
-          <p:cNvPr id="74755" name="Rectangle 2"/>
+          <p:cNvPr id="74755" name="Rectangle 2">
+            <a:extLst>
+              <a:ext uri="{FF2B5EF4-FFF2-40B4-BE49-F238E27FC236}">
+                <a16:creationId xmlns:a16="http://schemas.microsoft.com/office/drawing/2014/main" id="{F8FE9C7D-056E-9D11-6989-F0A64695771D}"/>
+              </a:ext>
+            </a:extLst>
+          </p:cNvPr>
           <p:cNvSpPr>
             <a:spLocks noGrp="1" noRot="1" noChangeAspect="1" noChangeArrowheads="1" noTextEdit="1"/>
           </p:cNvSpPr>
@@ -3217,7 +2290,13 @@
       </p:sp>
       <p:sp>
         <p:nvSpPr>
-          <p:cNvPr id="74756" name="Rectangle 3"/>
+          <p:cNvPr id="74756" name="Rectangle 3">
+            <a:extLst>
+              <a:ext uri="{FF2B5EF4-FFF2-40B4-BE49-F238E27FC236}">
+                <a16:creationId xmlns:a16="http://schemas.microsoft.com/office/drawing/2014/main" id="{5DDA9328-FE7C-9339-034A-6F0A5F15010B}"/>
+              </a:ext>
+            </a:extLst>
+          </p:cNvPr>
           <p:cNvSpPr>
             <a:spLocks noGrp="1" noChangeArrowheads="1"/>
           </p:cNvSpPr>
@@ -3241,7 +2320,7 @@
     </p:spTree>
     <p:extLst>
       <p:ext uri="{BB962C8B-B14F-4D97-AF65-F5344CB8AC3E}">
-        <p14:creationId xmlns:p14="http://schemas.microsoft.com/office/powerpoint/2010/main" val="341052268"/>
+        <p14:creationId xmlns:p14="http://schemas.microsoft.com/office/powerpoint/2010/main" val="3270122078"/>
       </p:ext>
     </p:extLst>
   </p:cSld>
@@ -3350,14 +2429,14 @@
           <a:lstStyle/>
           <a:p>
             <a:pPr eaLnBrk="1" hangingPunct="1"/>
-            <a:endParaRPr lang="en-US" dirty="0"/>
+            <a:endParaRPr lang="en-US"/>
           </a:p>
         </p:txBody>
       </p:sp>
     </p:spTree>
     <p:extLst>
       <p:ext uri="{BB962C8B-B14F-4D97-AF65-F5344CB8AC3E}">
-        <p14:creationId xmlns:p14="http://schemas.microsoft.com/office/powerpoint/2010/main" val="860814524"/>
+        <p14:creationId xmlns:p14="http://schemas.microsoft.com/office/powerpoint/2010/main" val="341052268"/>
       </p:ext>
     </p:extLst>
   </p:cSld>
@@ -7185,6 +6264,1212 @@
       </p:grpSpPr>
       <p:sp>
         <p:nvSpPr>
+          <p:cNvPr id="2" name="Footer Placeholder 1">
+            <a:extLst>
+              <a:ext uri="{FF2B5EF4-FFF2-40B4-BE49-F238E27FC236}">
+                <a16:creationId xmlns:a16="http://schemas.microsoft.com/office/drawing/2014/main" id="{F00CF889-8BFE-01EA-A63A-1A40E622316A}"/>
+              </a:ext>
+            </a:extLst>
+          </p:cNvPr>
+          <p:cNvSpPr>
+            <a:spLocks noGrp="1"/>
+          </p:cNvSpPr>
+          <p:nvPr>
+            <p:ph type="ftr" sz="quarter" idx="11"/>
+          </p:nvPr>
+        </p:nvSpPr>
+        <p:spPr/>
+        <p:txBody>
+          <a:bodyPr/>
+          <a:lstStyle/>
+          <a:p>
+            <a:pPr algn="l">
+              <a:defRPr/>
+            </a:pPr>
+            <a:r>
+              <a:rPr lang="en-US"/>
+              <a:t>CS1010: Programming Methodology</a:t>
+            </a:r>
+          </a:p>
+        </p:txBody>
+      </p:sp>
+      <p:sp>
+        <p:nvSpPr>
+          <p:cNvPr id="3" name="Slide Number Placeholder 2">
+            <a:extLst>
+              <a:ext uri="{FF2B5EF4-FFF2-40B4-BE49-F238E27FC236}">
+                <a16:creationId xmlns:a16="http://schemas.microsoft.com/office/drawing/2014/main" id="{C3EBAA06-A369-CA77-B91F-58CCFB7351E4}"/>
+              </a:ext>
+            </a:extLst>
+          </p:cNvPr>
+          <p:cNvSpPr>
+            <a:spLocks noGrp="1"/>
+          </p:cNvSpPr>
+          <p:nvPr>
+            <p:ph type="sldNum" sz="quarter" idx="12"/>
+          </p:nvPr>
+        </p:nvSpPr>
+        <p:spPr/>
+        <p:txBody>
+          <a:bodyPr/>
+          <a:lstStyle/>
+          <a:p>
+            <a:pPr>
+              <a:defRPr/>
+            </a:pPr>
+            <a:r>
+              <a:rPr lang="en-US" dirty="0"/>
+              <a:t>Week6R - </a:t>
+            </a:r>
+            <a:fld id="{2E4790E1-2590-4AEE-892D-AB46A7688113}" type="slidenum">
+              <a:rPr lang="en-US" smtClean="0"/>
+              <a:pPr>
+                <a:defRPr/>
+              </a:pPr>
+              <a:t>10</a:t>
+            </a:fld>
+            <a:endParaRPr lang="en-US" dirty="0"/>
+          </a:p>
+        </p:txBody>
+      </p:sp>
+      <p:sp>
+        <p:nvSpPr>
+          <p:cNvPr id="9" name="Rectangle 2">
+            <a:extLst>
+              <a:ext uri="{FF2B5EF4-FFF2-40B4-BE49-F238E27FC236}">
+                <a16:creationId xmlns:a16="http://schemas.microsoft.com/office/drawing/2014/main" id="{4E812EE8-7A20-DB7E-0630-5C7863012CED}"/>
+              </a:ext>
+            </a:extLst>
+          </p:cNvPr>
+          <p:cNvSpPr>
+            <a:spLocks noGrp="1" noChangeArrowheads="1"/>
+          </p:cNvSpPr>
+          <p:nvPr>
+            <p:ph type="title"/>
+          </p:nvPr>
+        </p:nvSpPr>
+        <p:spPr>
+          <a:xfrm>
+            <a:off x="2841134" y="445546"/>
+            <a:ext cx="5595851" cy="685800"/>
+          </a:xfrm>
+        </p:spPr>
+        <p:txBody>
+          <a:bodyPr>
+            <a:normAutofit fontScale="90000"/>
+          </a:bodyPr>
+          <a:lstStyle/>
+          <a:p>
+            <a:pPr eaLnBrk="1" hangingPunct="1"/>
+            <a:r>
+              <a:rPr lang="en-GB" dirty="0">
+                <a:solidFill>
+                  <a:srgbClr val="0000FF"/>
+                </a:solidFill>
+              </a:rPr>
+              <a:t>Problem Solving Process</a:t>
+            </a:r>
+          </a:p>
+        </p:txBody>
+      </p:sp>
+      <p:grpSp>
+        <p:nvGrpSpPr>
+          <p:cNvPr id="10" name="[Group 28]">
+            <a:extLst>
+              <a:ext uri="{FF2B5EF4-FFF2-40B4-BE49-F238E27FC236}">
+                <a16:creationId xmlns:a16="http://schemas.microsoft.com/office/drawing/2014/main" id="{CAC017AD-F270-3C1F-5B11-0E2FEEE39DA5}"/>
+              </a:ext>
+            </a:extLst>
+          </p:cNvPr>
+          <p:cNvGrpSpPr/>
+          <p:nvPr/>
+        </p:nvGrpSpPr>
+        <p:grpSpPr>
+          <a:xfrm>
+            <a:off x="2895600" y="1377278"/>
+            <a:ext cx="3854488" cy="4406263"/>
+            <a:chOff x="2895600" y="1377278"/>
+            <a:chExt cx="3854488" cy="4406263"/>
+          </a:xfrm>
+        </p:grpSpPr>
+        <p:sp>
+          <p:nvSpPr>
+            <p:cNvPr id="11" name="TextBox 10">
+              <a:extLst>
+                <a:ext uri="{FF2B5EF4-FFF2-40B4-BE49-F238E27FC236}">
+                  <a16:creationId xmlns:a16="http://schemas.microsoft.com/office/drawing/2014/main" id="{9B6714A7-94AA-0189-17E3-F181678B106D}"/>
+                </a:ext>
+              </a:extLst>
+            </p:cNvPr>
+            <p:cNvSpPr txBox="1"/>
+            <p:nvPr/>
+          </p:nvSpPr>
+          <p:spPr bwMode="auto">
+            <a:xfrm>
+              <a:off x="2903851" y="1377278"/>
+              <a:ext cx="2768009" cy="523220"/>
+            </a:xfrm>
+            <a:prstGeom prst="rect">
+              <a:avLst/>
+            </a:prstGeom>
+            <a:gradFill flip="none" rotWithShape="1">
+              <a:gsLst>
+                <a:gs pos="0">
+                  <a:srgbClr val="9900CC">
+                    <a:shade val="30000"/>
+                    <a:satMod val="115000"/>
+                  </a:srgbClr>
+                </a:gs>
+                <a:gs pos="50000">
+                  <a:srgbClr val="CC00FF"/>
+                </a:gs>
+                <a:gs pos="100000">
+                  <a:srgbClr val="CC66FF"/>
+                </a:gs>
+              </a:gsLst>
+              <a:lin ang="2700000" scaled="1"/>
+              <a:tileRect/>
+            </a:gradFill>
+          </p:spPr>
+          <p:style>
+            <a:lnRef idx="0">
+              <a:schemeClr val="accent1"/>
+            </a:lnRef>
+            <a:fillRef idx="3">
+              <a:schemeClr val="accent1"/>
+            </a:fillRef>
+            <a:effectRef idx="3">
+              <a:schemeClr val="accent1"/>
+            </a:effectRef>
+            <a:fontRef idx="minor">
+              <a:schemeClr val="lt1"/>
+            </a:fontRef>
+          </p:style>
+          <p:txBody>
+            <a:bodyPr wrap="square">
+              <a:spAutoFit/>
+            </a:bodyPr>
+            <a:lstStyle/>
+            <a:p>
+              <a:pPr algn="ctr">
+                <a:defRPr/>
+              </a:pPr>
+              <a:r>
+                <a:rPr lang="en-US" sz="2800" dirty="0">
+                  <a:solidFill>
+                    <a:srgbClr val="FFFFFF"/>
+                  </a:solidFill>
+                </a:rPr>
+                <a:t>Analysis</a:t>
+              </a:r>
+              <a:endParaRPr lang="en-SG" sz="2800" dirty="0">
+                <a:solidFill>
+                  <a:srgbClr val="FFFFFF"/>
+                </a:solidFill>
+              </a:endParaRPr>
+            </a:p>
+          </p:txBody>
+        </p:sp>
+        <p:sp>
+          <p:nvSpPr>
+            <p:cNvPr id="12" name="TextBox 11">
+              <a:extLst>
+                <a:ext uri="{FF2B5EF4-FFF2-40B4-BE49-F238E27FC236}">
+                  <a16:creationId xmlns:a16="http://schemas.microsoft.com/office/drawing/2014/main" id="{57BB6960-99BB-D1F7-5E1E-5C21F7563470}"/>
+                </a:ext>
+              </a:extLst>
+            </p:cNvPr>
+            <p:cNvSpPr txBox="1"/>
+            <p:nvPr/>
+          </p:nvSpPr>
+          <p:spPr bwMode="auto">
+            <a:xfrm>
+              <a:off x="2895600" y="2656034"/>
+              <a:ext cx="2784511" cy="523220"/>
+            </a:xfrm>
+            <a:prstGeom prst="rect">
+              <a:avLst/>
+            </a:prstGeom>
+            <a:gradFill flip="none" rotWithShape="1">
+              <a:gsLst>
+                <a:gs pos="0">
+                  <a:srgbClr val="006600"/>
+                </a:gs>
+                <a:gs pos="50000">
+                  <a:srgbClr val="00CC00"/>
+                </a:gs>
+                <a:gs pos="100000">
+                  <a:srgbClr val="92D050"/>
+                </a:gs>
+              </a:gsLst>
+              <a:lin ang="2700000" scaled="1"/>
+              <a:tileRect/>
+            </a:gradFill>
+          </p:spPr>
+          <p:style>
+            <a:lnRef idx="0">
+              <a:schemeClr val="accent1"/>
+            </a:lnRef>
+            <a:fillRef idx="3">
+              <a:schemeClr val="accent1"/>
+            </a:fillRef>
+            <a:effectRef idx="3">
+              <a:schemeClr val="accent1"/>
+            </a:effectRef>
+            <a:fontRef idx="minor">
+              <a:schemeClr val="lt1"/>
+            </a:fontRef>
+          </p:style>
+          <p:txBody>
+            <a:bodyPr wrap="square">
+              <a:spAutoFit/>
+            </a:bodyPr>
+            <a:lstStyle/>
+            <a:p>
+              <a:pPr algn="ctr">
+                <a:defRPr/>
+              </a:pPr>
+              <a:r>
+                <a:rPr lang="en-US" sz="2800" dirty="0">
+                  <a:solidFill>
+                    <a:srgbClr val="FFFFFF"/>
+                  </a:solidFill>
+                </a:rPr>
+                <a:t>Design</a:t>
+              </a:r>
+              <a:endParaRPr lang="en-SG" sz="2800" dirty="0">
+                <a:solidFill>
+                  <a:srgbClr val="FFFFFF"/>
+                </a:solidFill>
+              </a:endParaRPr>
+            </a:p>
+          </p:txBody>
+        </p:sp>
+        <p:sp>
+          <p:nvSpPr>
+            <p:cNvPr id="14" name="TextBox 13">
+              <a:extLst>
+                <a:ext uri="{FF2B5EF4-FFF2-40B4-BE49-F238E27FC236}">
+                  <a16:creationId xmlns:a16="http://schemas.microsoft.com/office/drawing/2014/main" id="{BE699B9A-B227-8619-09DF-96FEC20DB90C}"/>
+                </a:ext>
+              </a:extLst>
+            </p:cNvPr>
+            <p:cNvSpPr txBox="1"/>
+            <p:nvPr/>
+          </p:nvSpPr>
+          <p:spPr bwMode="auto">
+            <a:xfrm>
+              <a:off x="2918632" y="3963128"/>
+              <a:ext cx="2738446" cy="523220"/>
+            </a:xfrm>
+            <a:prstGeom prst="rect">
+              <a:avLst/>
+            </a:prstGeom>
+            <a:gradFill>
+              <a:gsLst>
+                <a:gs pos="0">
+                  <a:srgbClr val="000099"/>
+                </a:gs>
+                <a:gs pos="50000">
+                  <a:srgbClr val="3333FF"/>
+                </a:gs>
+                <a:gs pos="100000">
+                  <a:srgbClr val="99CCFF"/>
+                </a:gs>
+              </a:gsLst>
+              <a:lin ang="2700000" scaled="1"/>
+            </a:gradFill>
+          </p:spPr>
+          <p:style>
+            <a:lnRef idx="0">
+              <a:schemeClr val="accent1"/>
+            </a:lnRef>
+            <a:fillRef idx="3">
+              <a:schemeClr val="accent1"/>
+            </a:fillRef>
+            <a:effectRef idx="3">
+              <a:schemeClr val="accent1"/>
+            </a:effectRef>
+            <a:fontRef idx="minor">
+              <a:schemeClr val="lt1"/>
+            </a:fontRef>
+          </p:style>
+          <p:txBody>
+            <a:bodyPr wrap="square">
+              <a:spAutoFit/>
+            </a:bodyPr>
+            <a:lstStyle/>
+            <a:p>
+              <a:pPr algn="ctr">
+                <a:defRPr/>
+              </a:pPr>
+              <a:r>
+                <a:rPr lang="en-US" sz="2800" dirty="0">
+                  <a:solidFill>
+                    <a:srgbClr val="FFFFFF"/>
+                  </a:solidFill>
+                </a:rPr>
+                <a:t>Implementation</a:t>
+              </a:r>
+              <a:endParaRPr lang="en-SG" sz="2800" dirty="0">
+                <a:solidFill>
+                  <a:srgbClr val="FFFFFF"/>
+                </a:solidFill>
+              </a:endParaRPr>
+            </a:p>
+          </p:txBody>
+        </p:sp>
+        <p:sp>
+          <p:nvSpPr>
+            <p:cNvPr id="15" name="TextBox 14">
+              <a:extLst>
+                <a:ext uri="{FF2B5EF4-FFF2-40B4-BE49-F238E27FC236}">
+                  <a16:creationId xmlns:a16="http://schemas.microsoft.com/office/drawing/2014/main" id="{B5F14E4F-4D2A-E5D6-5434-2A929D9CB1F3}"/>
+                </a:ext>
+              </a:extLst>
+            </p:cNvPr>
+            <p:cNvSpPr txBox="1"/>
+            <p:nvPr/>
+          </p:nvSpPr>
+          <p:spPr bwMode="auto">
+            <a:xfrm>
+              <a:off x="2904300" y="5260321"/>
+              <a:ext cx="2767111" cy="523220"/>
+            </a:xfrm>
+            <a:prstGeom prst="rect">
+              <a:avLst/>
+            </a:prstGeom>
+            <a:gradFill flip="none" rotWithShape="1">
+              <a:gsLst>
+                <a:gs pos="0">
+                  <a:srgbClr val="FF0000"/>
+                </a:gs>
+                <a:gs pos="50000">
+                  <a:srgbClr val="FF6600"/>
+                </a:gs>
+                <a:gs pos="100000">
+                  <a:srgbClr val="FF9966"/>
+                </a:gs>
+              </a:gsLst>
+              <a:lin ang="2700000" scaled="1"/>
+              <a:tileRect/>
+            </a:gradFill>
+          </p:spPr>
+          <p:style>
+            <a:lnRef idx="0">
+              <a:schemeClr val="accent1"/>
+            </a:lnRef>
+            <a:fillRef idx="3">
+              <a:schemeClr val="accent1"/>
+            </a:fillRef>
+            <a:effectRef idx="3">
+              <a:schemeClr val="accent1"/>
+            </a:effectRef>
+            <a:fontRef idx="minor">
+              <a:schemeClr val="lt1"/>
+            </a:fontRef>
+          </p:style>
+          <p:txBody>
+            <a:bodyPr wrap="square">
+              <a:spAutoFit/>
+            </a:bodyPr>
+            <a:lstStyle/>
+            <a:p>
+              <a:pPr algn="ctr">
+                <a:defRPr/>
+              </a:pPr>
+              <a:r>
+                <a:rPr lang="en-US" sz="2800" dirty="0">
+                  <a:solidFill>
+                    <a:srgbClr val="FFFFFF"/>
+                  </a:solidFill>
+                </a:rPr>
+                <a:t>Testing</a:t>
+              </a:r>
+              <a:endParaRPr lang="en-SG" sz="2800" dirty="0">
+                <a:solidFill>
+                  <a:srgbClr val="FFFFFF"/>
+                </a:solidFill>
+              </a:endParaRPr>
+            </a:p>
+          </p:txBody>
+        </p:sp>
+        <p:cxnSp>
+          <p:nvCxnSpPr>
+            <p:cNvPr id="16" name="Straight Arrow Connector 12">
+              <a:extLst>
+                <a:ext uri="{FF2B5EF4-FFF2-40B4-BE49-F238E27FC236}">
+                  <a16:creationId xmlns:a16="http://schemas.microsoft.com/office/drawing/2014/main" id="{9F76D268-050C-BE9F-020F-60B563AAE4C7}"/>
+                </a:ext>
+              </a:extLst>
+            </p:cNvPr>
+            <p:cNvCxnSpPr>
+              <a:cxnSpLocks noChangeShapeType="1"/>
+              <a:stCxn id="11" idx="2"/>
+              <a:endCxn id="12" idx="0"/>
+            </p:cNvCxnSpPr>
+            <p:nvPr/>
+          </p:nvCxnSpPr>
+          <p:spPr bwMode="auto">
+            <a:xfrm>
+              <a:off x="4287856" y="1900498"/>
+              <a:ext cx="0" cy="755536"/>
+            </a:xfrm>
+            <a:prstGeom prst="straightConnector1">
+              <a:avLst/>
+            </a:prstGeom>
+            <a:noFill/>
+            <a:ln w="38100" cap="sq" algn="ctr">
+              <a:solidFill>
+                <a:srgbClr val="660066"/>
+              </a:solidFill>
+              <a:round/>
+              <a:headEnd type="triangle" w="lg" len="med"/>
+              <a:tailEnd type="triangle" w="lg" len="med"/>
+            </a:ln>
+          </p:spPr>
+        </p:cxnSp>
+        <p:cxnSp>
+          <p:nvCxnSpPr>
+            <p:cNvPr id="17" name="Straight Arrow Connector 14">
+              <a:extLst>
+                <a:ext uri="{FF2B5EF4-FFF2-40B4-BE49-F238E27FC236}">
+                  <a16:creationId xmlns:a16="http://schemas.microsoft.com/office/drawing/2014/main" id="{EDEF90E4-B9C6-294A-DFC1-201888570D0B}"/>
+                </a:ext>
+              </a:extLst>
+            </p:cNvPr>
+            <p:cNvCxnSpPr>
+              <a:cxnSpLocks noChangeShapeType="1"/>
+              <a:stCxn id="12" idx="2"/>
+              <a:endCxn id="14" idx="0"/>
+            </p:cNvCxnSpPr>
+            <p:nvPr/>
+          </p:nvCxnSpPr>
+          <p:spPr bwMode="auto">
+            <a:xfrm flipH="1">
+              <a:off x="4287855" y="3179254"/>
+              <a:ext cx="1" cy="783874"/>
+            </a:xfrm>
+            <a:prstGeom prst="straightConnector1">
+              <a:avLst/>
+            </a:prstGeom>
+            <a:noFill/>
+            <a:ln w="38100" cap="sq" algn="ctr">
+              <a:solidFill>
+                <a:srgbClr val="660066"/>
+              </a:solidFill>
+              <a:round/>
+              <a:headEnd type="triangle" w="lg" len="med"/>
+              <a:tailEnd type="triangle" w="lg" len="med"/>
+            </a:ln>
+          </p:spPr>
+        </p:cxnSp>
+        <p:cxnSp>
+          <p:nvCxnSpPr>
+            <p:cNvPr id="18" name="Straight Arrow Connector 15">
+              <a:extLst>
+                <a:ext uri="{FF2B5EF4-FFF2-40B4-BE49-F238E27FC236}">
+                  <a16:creationId xmlns:a16="http://schemas.microsoft.com/office/drawing/2014/main" id="{3E05A97A-829A-0150-469A-117B56C5CF30}"/>
+                </a:ext>
+              </a:extLst>
+            </p:cNvPr>
+            <p:cNvCxnSpPr>
+              <a:cxnSpLocks noChangeShapeType="1"/>
+              <a:stCxn id="14" idx="2"/>
+              <a:endCxn id="15" idx="0"/>
+            </p:cNvCxnSpPr>
+            <p:nvPr/>
+          </p:nvCxnSpPr>
+          <p:spPr bwMode="auto">
+            <a:xfrm>
+              <a:off x="4287855" y="4486348"/>
+              <a:ext cx="1" cy="773973"/>
+            </a:xfrm>
+            <a:prstGeom prst="straightConnector1">
+              <a:avLst/>
+            </a:prstGeom>
+            <a:noFill/>
+            <a:ln w="38100" cap="sq" algn="ctr">
+              <a:solidFill>
+                <a:srgbClr val="660066"/>
+              </a:solidFill>
+              <a:round/>
+              <a:headEnd type="triangle" w="lg" len="med"/>
+              <a:tailEnd type="triangle" w="lg" len="med"/>
+            </a:ln>
+          </p:spPr>
+        </p:cxnSp>
+        <p:cxnSp>
+          <p:nvCxnSpPr>
+            <p:cNvPr id="19" name="Straight Connector 26">
+              <a:extLst>
+                <a:ext uri="{FF2B5EF4-FFF2-40B4-BE49-F238E27FC236}">
+                  <a16:creationId xmlns:a16="http://schemas.microsoft.com/office/drawing/2014/main" id="{D1C2933B-D8ED-29CC-8A84-8F2FB2AA88F5}"/>
+                </a:ext>
+              </a:extLst>
+            </p:cNvPr>
+            <p:cNvCxnSpPr>
+              <a:cxnSpLocks noChangeShapeType="1"/>
+            </p:cNvCxnSpPr>
+            <p:nvPr/>
+          </p:nvCxnSpPr>
+          <p:spPr bwMode="auto">
+            <a:xfrm>
+              <a:off x="5662710" y="4202706"/>
+              <a:ext cx="593714" cy="22032"/>
+            </a:xfrm>
+            <a:prstGeom prst="line">
+              <a:avLst/>
+            </a:prstGeom>
+            <a:noFill/>
+            <a:ln w="38100" cap="sq" algn="ctr">
+              <a:solidFill>
+                <a:schemeClr val="tx1"/>
+              </a:solidFill>
+              <a:round/>
+              <a:headEnd type="none" w="sm" len="sm"/>
+              <a:tailEnd type="none" w="sm" len="sm"/>
+            </a:ln>
+          </p:spPr>
+        </p:cxnSp>
+        <p:cxnSp>
+          <p:nvCxnSpPr>
+            <p:cNvPr id="20" name="Straight Connector 29">
+              <a:extLst>
+                <a:ext uri="{FF2B5EF4-FFF2-40B4-BE49-F238E27FC236}">
+                  <a16:creationId xmlns:a16="http://schemas.microsoft.com/office/drawing/2014/main" id="{2C34C445-3E93-7E1C-9836-39C13E529D63}"/>
+                </a:ext>
+              </a:extLst>
+            </p:cNvPr>
+            <p:cNvCxnSpPr>
+              <a:cxnSpLocks noChangeShapeType="1"/>
+            </p:cNvCxnSpPr>
+            <p:nvPr/>
+          </p:nvCxnSpPr>
+          <p:spPr bwMode="auto">
+            <a:xfrm flipV="1">
+              <a:off x="6256424" y="1821677"/>
+              <a:ext cx="0" cy="2403061"/>
+            </a:xfrm>
+            <a:prstGeom prst="line">
+              <a:avLst/>
+            </a:prstGeom>
+            <a:noFill/>
+            <a:ln w="38100" cap="sq" algn="ctr">
+              <a:solidFill>
+                <a:schemeClr val="tx1"/>
+              </a:solidFill>
+              <a:round/>
+              <a:headEnd type="none" w="sm" len="sm"/>
+              <a:tailEnd type="none" w="sm" len="sm"/>
+            </a:ln>
+          </p:spPr>
+        </p:cxnSp>
+        <p:cxnSp>
+          <p:nvCxnSpPr>
+            <p:cNvPr id="21" name="Straight Connector 31">
+              <a:extLst>
+                <a:ext uri="{FF2B5EF4-FFF2-40B4-BE49-F238E27FC236}">
+                  <a16:creationId xmlns:a16="http://schemas.microsoft.com/office/drawing/2014/main" id="{CFA8BA1B-C225-2DAF-44A9-0B02F1BAF26A}"/>
+                </a:ext>
+              </a:extLst>
+            </p:cNvPr>
+            <p:cNvCxnSpPr>
+              <a:cxnSpLocks noChangeShapeType="1"/>
+            </p:cNvCxnSpPr>
+            <p:nvPr/>
+          </p:nvCxnSpPr>
+          <p:spPr bwMode="auto">
+            <a:xfrm flipH="1">
+              <a:off x="5747828" y="1821677"/>
+              <a:ext cx="508596" cy="0"/>
+            </a:xfrm>
+            <a:prstGeom prst="line">
+              <a:avLst/>
+            </a:prstGeom>
+            <a:noFill/>
+            <a:ln w="38100" cap="sq" algn="ctr">
+              <a:solidFill>
+                <a:schemeClr val="tx1"/>
+              </a:solidFill>
+              <a:round/>
+              <a:headEnd type="none" w="lg" len="med"/>
+              <a:tailEnd type="triangle" w="lg" len="med"/>
+            </a:ln>
+          </p:spPr>
+        </p:cxnSp>
+        <p:cxnSp>
+          <p:nvCxnSpPr>
+            <p:cNvPr id="22" name="Straight Connector 21">
+              <a:extLst>
+                <a:ext uri="{FF2B5EF4-FFF2-40B4-BE49-F238E27FC236}">
+                  <a16:creationId xmlns:a16="http://schemas.microsoft.com/office/drawing/2014/main" id="{911465F3-E803-88C2-7006-E3308D10DC77}"/>
+                </a:ext>
+              </a:extLst>
+            </p:cNvPr>
+            <p:cNvCxnSpPr>
+              <a:cxnSpLocks noChangeShapeType="1"/>
+            </p:cNvCxnSpPr>
+            <p:nvPr/>
+          </p:nvCxnSpPr>
+          <p:spPr bwMode="auto">
+            <a:xfrm>
+              <a:off x="5747828" y="5615139"/>
+              <a:ext cx="748649" cy="0"/>
+            </a:xfrm>
+            <a:prstGeom prst="line">
+              <a:avLst/>
+            </a:prstGeom>
+            <a:noFill/>
+            <a:ln w="38100" cap="sq" algn="ctr">
+              <a:solidFill>
+                <a:srgbClr val="006600"/>
+              </a:solidFill>
+              <a:round/>
+              <a:headEnd type="none" w="sm" len="sm"/>
+              <a:tailEnd type="none" w="sm" len="sm"/>
+            </a:ln>
+          </p:spPr>
+        </p:cxnSp>
+        <p:cxnSp>
+          <p:nvCxnSpPr>
+            <p:cNvPr id="23" name="Straight Connector 37">
+              <a:extLst>
+                <a:ext uri="{FF2B5EF4-FFF2-40B4-BE49-F238E27FC236}">
+                  <a16:creationId xmlns:a16="http://schemas.microsoft.com/office/drawing/2014/main" id="{9C476DE4-5ADC-7DEA-7EDB-B4046197927F}"/>
+                </a:ext>
+              </a:extLst>
+            </p:cNvPr>
+            <p:cNvCxnSpPr>
+              <a:cxnSpLocks noChangeShapeType="1"/>
+            </p:cNvCxnSpPr>
+            <p:nvPr/>
+          </p:nvCxnSpPr>
+          <p:spPr bwMode="auto">
+            <a:xfrm flipV="1">
+              <a:off x="6496477" y="1586719"/>
+              <a:ext cx="0" cy="4028421"/>
+            </a:xfrm>
+            <a:prstGeom prst="line">
+              <a:avLst/>
+            </a:prstGeom>
+            <a:noFill/>
+            <a:ln w="38100" cap="sq" algn="ctr">
+              <a:solidFill>
+                <a:srgbClr val="006600"/>
+              </a:solidFill>
+              <a:round/>
+              <a:headEnd type="none" w="sm" len="sm"/>
+              <a:tailEnd type="none" w="sm" len="sm"/>
+            </a:ln>
+          </p:spPr>
+        </p:cxnSp>
+        <p:cxnSp>
+          <p:nvCxnSpPr>
+            <p:cNvPr id="24" name="Straight Connector 41">
+              <a:extLst>
+                <a:ext uri="{FF2B5EF4-FFF2-40B4-BE49-F238E27FC236}">
+                  <a16:creationId xmlns:a16="http://schemas.microsoft.com/office/drawing/2014/main" id="{8643015E-3EA7-83BC-FDB6-9E0BD4DF1C40}"/>
+                </a:ext>
+              </a:extLst>
+            </p:cNvPr>
+            <p:cNvCxnSpPr>
+              <a:cxnSpLocks noChangeShapeType="1"/>
+            </p:cNvCxnSpPr>
+            <p:nvPr/>
+          </p:nvCxnSpPr>
+          <p:spPr bwMode="auto">
+            <a:xfrm flipH="1">
+              <a:off x="5734096" y="1586719"/>
+              <a:ext cx="762381" cy="0"/>
+            </a:xfrm>
+            <a:prstGeom prst="line">
+              <a:avLst/>
+            </a:prstGeom>
+            <a:noFill/>
+            <a:ln w="38100" cap="sq" algn="ctr">
+              <a:solidFill>
+                <a:srgbClr val="006600"/>
+              </a:solidFill>
+              <a:round/>
+              <a:headEnd type="none" w="lg" len="med"/>
+              <a:tailEnd type="triangle" w="lg" len="med"/>
+            </a:ln>
+          </p:spPr>
+        </p:cxnSp>
+        <p:cxnSp>
+          <p:nvCxnSpPr>
+            <p:cNvPr id="25" name="Straight Connector 48">
+              <a:extLst>
+                <a:ext uri="{FF2B5EF4-FFF2-40B4-BE49-F238E27FC236}">
+                  <a16:creationId xmlns:a16="http://schemas.microsoft.com/office/drawing/2014/main" id="{DD5EDC08-20EE-8FAB-9E87-A6633C3B661B}"/>
+                </a:ext>
+              </a:extLst>
+            </p:cNvPr>
+            <p:cNvCxnSpPr>
+              <a:cxnSpLocks noChangeShapeType="1"/>
+            </p:cNvCxnSpPr>
+            <p:nvPr/>
+          </p:nvCxnSpPr>
+          <p:spPr bwMode="auto">
+            <a:xfrm>
+              <a:off x="5734096" y="5404614"/>
+              <a:ext cx="1008546" cy="0"/>
+            </a:xfrm>
+            <a:prstGeom prst="line">
+              <a:avLst/>
+            </a:prstGeom>
+            <a:noFill/>
+            <a:ln w="38100" cap="sq" algn="ctr">
+              <a:solidFill>
+                <a:srgbClr val="800000"/>
+              </a:solidFill>
+              <a:round/>
+              <a:headEnd type="none" w="sm" len="sm"/>
+              <a:tailEnd type="none" w="sm" len="sm"/>
+            </a:ln>
+          </p:spPr>
+        </p:cxnSp>
+        <p:cxnSp>
+          <p:nvCxnSpPr>
+            <p:cNvPr id="26" name="Straight Connector 50">
+              <a:extLst>
+                <a:ext uri="{FF2B5EF4-FFF2-40B4-BE49-F238E27FC236}">
+                  <a16:creationId xmlns:a16="http://schemas.microsoft.com/office/drawing/2014/main" id="{0BC89241-8D29-4059-A38E-FA54DE15C4FB}"/>
+                </a:ext>
+              </a:extLst>
+            </p:cNvPr>
+            <p:cNvCxnSpPr>
+              <a:cxnSpLocks noChangeShapeType="1"/>
+            </p:cNvCxnSpPr>
+            <p:nvPr/>
+          </p:nvCxnSpPr>
+          <p:spPr bwMode="auto">
+            <a:xfrm flipV="1">
+              <a:off x="6742642" y="2930525"/>
+              <a:ext cx="7446" cy="2474089"/>
+            </a:xfrm>
+            <a:prstGeom prst="line">
+              <a:avLst/>
+            </a:prstGeom>
+            <a:noFill/>
+            <a:ln w="38100" cap="sq" algn="ctr">
+              <a:solidFill>
+                <a:srgbClr val="800000"/>
+              </a:solidFill>
+              <a:round/>
+              <a:headEnd type="none" w="sm" len="sm"/>
+              <a:tailEnd type="none" w="sm" len="sm"/>
+            </a:ln>
+          </p:spPr>
+        </p:cxnSp>
+        <p:cxnSp>
+          <p:nvCxnSpPr>
+            <p:cNvPr id="27" name="Straight Connector 52">
+              <a:extLst>
+                <a:ext uri="{FF2B5EF4-FFF2-40B4-BE49-F238E27FC236}">
+                  <a16:creationId xmlns:a16="http://schemas.microsoft.com/office/drawing/2014/main" id="{BC6485CC-5019-3F59-927F-62601ED04EEB}"/>
+                </a:ext>
+              </a:extLst>
+            </p:cNvPr>
+            <p:cNvCxnSpPr>
+              <a:cxnSpLocks noChangeShapeType="1"/>
+            </p:cNvCxnSpPr>
+            <p:nvPr/>
+          </p:nvCxnSpPr>
+          <p:spPr bwMode="auto">
+            <a:xfrm flipH="1">
+              <a:off x="5762761" y="2930525"/>
+              <a:ext cx="987327" cy="0"/>
+            </a:xfrm>
+            <a:prstGeom prst="line">
+              <a:avLst/>
+            </a:prstGeom>
+            <a:noFill/>
+            <a:ln w="38100" cap="sq" algn="ctr">
+              <a:solidFill>
+                <a:srgbClr val="800000"/>
+              </a:solidFill>
+              <a:round/>
+              <a:headEnd type="none" w="lg" len="med"/>
+              <a:tailEnd type="triangle" w="lg" len="med"/>
+            </a:ln>
+          </p:spPr>
+        </p:cxnSp>
+      </p:grpSp>
+      <p:sp>
+        <p:nvSpPr>
+          <p:cNvPr id="28" name="[TextBox 28]">
+            <a:extLst>
+              <a:ext uri="{FF2B5EF4-FFF2-40B4-BE49-F238E27FC236}">
+                <a16:creationId xmlns:a16="http://schemas.microsoft.com/office/drawing/2014/main" id="{355B7711-3EE3-2FAA-F020-933AB1900573}"/>
+              </a:ext>
+            </a:extLst>
+          </p:cNvPr>
+          <p:cNvSpPr txBox="1">
+            <a:spLocks noChangeArrowheads="1"/>
+          </p:cNvSpPr>
+          <p:nvPr/>
+        </p:nvSpPr>
+        <p:spPr bwMode="auto">
+          <a:xfrm>
+            <a:off x="6854825" y="2265362"/>
+            <a:ext cx="2060575" cy="1077218"/>
+          </a:xfrm>
+          <a:prstGeom prst="rect">
+            <a:avLst/>
+          </a:prstGeom>
+          <a:noFill/>
+          <a:ln w="9525">
+            <a:noFill/>
+            <a:miter lim="800000"/>
+            <a:headEnd/>
+            <a:tailEnd/>
+          </a:ln>
+        </p:spPr>
+        <p:txBody>
+          <a:bodyPr wrap="square">
+            <a:spAutoFit/>
+          </a:bodyPr>
+          <a:lstStyle/>
+          <a:p>
+            <a:pPr algn="ctr"/>
+            <a:r>
+              <a:rPr lang="en-US" sz="3200" i="1">
+                <a:solidFill>
+                  <a:srgbClr val="C00000"/>
+                </a:solidFill>
+                <a:latin typeface="+mn-lt"/>
+                <a:cs typeface="Andalus" pitchFamily="18" charset="-78"/>
+              </a:rPr>
+              <a:t>Iterative process</a:t>
+            </a:r>
+            <a:endParaRPr lang="en-US" sz="3200" i="1" dirty="0">
+              <a:solidFill>
+                <a:srgbClr val="C00000"/>
+              </a:solidFill>
+              <a:latin typeface="+mn-lt"/>
+              <a:cs typeface="Andalus" pitchFamily="18" charset="-78"/>
+            </a:endParaRPr>
+          </a:p>
+        </p:txBody>
+      </p:sp>
+      <p:sp>
+        <p:nvSpPr>
+          <p:cNvPr id="29" name="Rectangle 2">
+            <a:extLst>
+              <a:ext uri="{FF2B5EF4-FFF2-40B4-BE49-F238E27FC236}">
+                <a16:creationId xmlns:a16="http://schemas.microsoft.com/office/drawing/2014/main" id="{BDF01D19-60B6-6A80-70DF-BD6168E155ED}"/>
+              </a:ext>
+            </a:extLst>
+          </p:cNvPr>
+          <p:cNvSpPr txBox="1">
+            <a:spLocks noChangeArrowheads="1"/>
+          </p:cNvSpPr>
+          <p:nvPr/>
+        </p:nvSpPr>
+        <p:spPr>
+          <a:xfrm>
+            <a:off x="631334" y="459474"/>
+            <a:ext cx="2981538" cy="685800"/>
+          </a:xfrm>
+          <a:prstGeom prst="rect">
+            <a:avLst/>
+          </a:prstGeom>
+        </p:spPr>
+        <p:txBody>
+          <a:bodyPr vert="horz" lIns="91440" tIns="45720" rIns="91440" bIns="45720" rtlCol="0" anchor="ctr">
+            <a:normAutofit fontScale="97500"/>
+          </a:bodyPr>
+          <a:lstStyle>
+            <a:lvl1pPr algn="l" defTabSz="914400" rtl="0" eaLnBrk="1" latinLnBrk="0" hangingPunct="1">
+              <a:spcBef>
+                <a:spcPct val="0"/>
+              </a:spcBef>
+              <a:buNone/>
+              <a:defRPr sz="4000" kern="1200" spc="-100" baseline="0">
+                <a:solidFill>
+                  <a:schemeClr val="tx2"/>
+                </a:solidFill>
+                <a:latin typeface="+mj-lt"/>
+                <a:ea typeface="+mj-ea"/>
+                <a:cs typeface="+mj-cs"/>
+              </a:defRPr>
+            </a:lvl1pPr>
+          </a:lstStyle>
+          <a:p>
+            <a:pPr fontAlgn="auto">
+              <a:spcAft>
+                <a:spcPts val="0"/>
+              </a:spcAft>
+            </a:pPr>
+            <a:r>
+              <a:rPr lang="en-GB" sz="3600" dirty="0">
+                <a:solidFill>
+                  <a:srgbClr val="0000FF"/>
+                </a:solidFill>
+              </a:rPr>
+              <a:t>Algorithmic</a:t>
+            </a:r>
+          </a:p>
+        </p:txBody>
+      </p:sp>
+      <p:sp>
+        <p:nvSpPr>
+          <p:cNvPr id="30" name="[TextBox 24]">
+            <a:extLst>
+              <a:ext uri="{FF2B5EF4-FFF2-40B4-BE49-F238E27FC236}">
+                <a16:creationId xmlns:a16="http://schemas.microsoft.com/office/drawing/2014/main" id="{5099EA7F-E225-3426-A37A-3E1D22BF4B5A}"/>
+              </a:ext>
+            </a:extLst>
+          </p:cNvPr>
+          <p:cNvSpPr txBox="1">
+            <a:spLocks noChangeArrowheads="1"/>
+          </p:cNvSpPr>
+          <p:nvPr/>
+        </p:nvSpPr>
+        <p:spPr bwMode="auto">
+          <a:xfrm>
+            <a:off x="577683" y="1110064"/>
+            <a:ext cx="2209800" cy="1200329"/>
+          </a:xfrm>
+          <a:prstGeom prst="rect">
+            <a:avLst/>
+          </a:prstGeom>
+          <a:noFill/>
+          <a:ln w="9525">
+            <a:noFill/>
+            <a:miter lim="800000"/>
+            <a:headEnd/>
+            <a:tailEnd/>
+          </a:ln>
+        </p:spPr>
+        <p:txBody>
+          <a:bodyPr wrap="square">
+            <a:spAutoFit/>
+          </a:bodyPr>
+          <a:lstStyle/>
+          <a:p>
+            <a:pPr algn="ctr"/>
+            <a:r>
+              <a:rPr lang="en-US" sz="2400" i="1" dirty="0">
+                <a:latin typeface="Calibri" pitchFamily="34" charset="0"/>
+              </a:rPr>
+              <a:t>Determine problem features</a:t>
+            </a:r>
+          </a:p>
+        </p:txBody>
+      </p:sp>
+      <p:sp>
+        <p:nvSpPr>
+          <p:cNvPr id="31" name="[TextBox 25]">
+            <a:extLst>
+              <a:ext uri="{FF2B5EF4-FFF2-40B4-BE49-F238E27FC236}">
+                <a16:creationId xmlns:a16="http://schemas.microsoft.com/office/drawing/2014/main" id="{FB3707A8-E821-7778-ED91-0CE1A426651D}"/>
+              </a:ext>
+            </a:extLst>
+          </p:cNvPr>
+          <p:cNvSpPr txBox="1">
+            <a:spLocks noChangeArrowheads="1"/>
+          </p:cNvSpPr>
+          <p:nvPr/>
+        </p:nvSpPr>
+        <p:spPr bwMode="auto">
+          <a:xfrm>
+            <a:off x="612608" y="2562225"/>
+            <a:ext cx="2139950" cy="830997"/>
+          </a:xfrm>
+          <a:prstGeom prst="rect">
+            <a:avLst/>
+          </a:prstGeom>
+          <a:noFill/>
+          <a:ln w="9525">
+            <a:noFill/>
+            <a:miter lim="800000"/>
+            <a:headEnd/>
+            <a:tailEnd/>
+          </a:ln>
+        </p:spPr>
+        <p:txBody>
+          <a:bodyPr>
+            <a:spAutoFit/>
+          </a:bodyPr>
+          <a:lstStyle/>
+          <a:p>
+            <a:pPr algn="ctr"/>
+            <a:r>
+              <a:rPr lang="en-US" sz="2400" i="1" dirty="0">
+                <a:solidFill>
+                  <a:srgbClr val="008000"/>
+                </a:solidFill>
+                <a:latin typeface="Calibri" pitchFamily="34" charset="0"/>
+              </a:rPr>
+              <a:t>Write algorithm</a:t>
+            </a:r>
+          </a:p>
+        </p:txBody>
+      </p:sp>
+      <p:sp>
+        <p:nvSpPr>
+          <p:cNvPr id="32" name="[TextBox 26]">
+            <a:extLst>
+              <a:ext uri="{FF2B5EF4-FFF2-40B4-BE49-F238E27FC236}">
+                <a16:creationId xmlns:a16="http://schemas.microsoft.com/office/drawing/2014/main" id="{CC682A90-905B-FA8A-B07E-02133095E12E}"/>
+              </a:ext>
+            </a:extLst>
+          </p:cNvPr>
+          <p:cNvSpPr txBox="1">
+            <a:spLocks noChangeArrowheads="1"/>
+          </p:cNvSpPr>
+          <p:nvPr/>
+        </p:nvSpPr>
+        <p:spPr bwMode="auto">
+          <a:xfrm>
+            <a:off x="830776" y="3758480"/>
+            <a:ext cx="1703614" cy="830997"/>
+          </a:xfrm>
+          <a:prstGeom prst="rect">
+            <a:avLst/>
+          </a:prstGeom>
+          <a:noFill/>
+          <a:ln w="9525">
+            <a:noFill/>
+            <a:miter lim="800000"/>
+            <a:headEnd/>
+            <a:tailEnd/>
+          </a:ln>
+        </p:spPr>
+        <p:txBody>
+          <a:bodyPr wrap="square">
+            <a:spAutoFit/>
+          </a:bodyPr>
+          <a:lstStyle/>
+          <a:p>
+            <a:pPr algn="ctr"/>
+            <a:r>
+              <a:rPr lang="en-US" sz="2400" i="1" dirty="0">
+                <a:latin typeface="Calibri" pitchFamily="34" charset="0"/>
+              </a:rPr>
+              <a:t>Produce code</a:t>
+            </a:r>
+          </a:p>
+        </p:txBody>
+      </p:sp>
+      <p:sp>
+        <p:nvSpPr>
+          <p:cNvPr id="33" name="[TextBox 27]">
+            <a:extLst>
+              <a:ext uri="{FF2B5EF4-FFF2-40B4-BE49-F238E27FC236}">
+                <a16:creationId xmlns:a16="http://schemas.microsoft.com/office/drawing/2014/main" id="{6205835F-FAFF-D5F0-A6F6-D7C721DE322F}"/>
+              </a:ext>
+            </a:extLst>
+          </p:cNvPr>
+          <p:cNvSpPr txBox="1">
+            <a:spLocks noChangeArrowheads="1"/>
+          </p:cNvSpPr>
+          <p:nvPr/>
+        </p:nvSpPr>
+        <p:spPr bwMode="auto">
+          <a:xfrm>
+            <a:off x="414965" y="4922887"/>
+            <a:ext cx="2535237" cy="1200329"/>
+          </a:xfrm>
+          <a:prstGeom prst="rect">
+            <a:avLst/>
+          </a:prstGeom>
+          <a:noFill/>
+          <a:ln w="9525">
+            <a:noFill/>
+            <a:miter lim="800000"/>
+            <a:headEnd/>
+            <a:tailEnd/>
+          </a:ln>
+        </p:spPr>
+        <p:txBody>
+          <a:bodyPr>
+            <a:spAutoFit/>
+          </a:bodyPr>
+          <a:lstStyle/>
+          <a:p>
+            <a:pPr algn="ctr"/>
+            <a:r>
+              <a:rPr lang="en-US" sz="2400" i="1" dirty="0">
+                <a:solidFill>
+                  <a:srgbClr val="006600"/>
+                </a:solidFill>
+                <a:latin typeface="Calibri" pitchFamily="34" charset="0"/>
+              </a:rPr>
+              <a:t>Check for correctness and efficiency</a:t>
+            </a:r>
+          </a:p>
+        </p:txBody>
+      </p:sp>
+      <p:sp>
+        <p:nvSpPr>
+          <p:cNvPr id="4" name="Date Placeholder 3">
+            <a:extLst>
+              <a:ext uri="{FF2B5EF4-FFF2-40B4-BE49-F238E27FC236}">
+                <a16:creationId xmlns:a16="http://schemas.microsoft.com/office/drawing/2014/main" id="{0054E264-18ED-25FA-4D14-D683ED099259}"/>
+              </a:ext>
+            </a:extLst>
+          </p:cNvPr>
+          <p:cNvSpPr>
+            <a:spLocks noGrp="1"/>
+          </p:cNvSpPr>
+          <p:nvPr>
+            <p:ph type="dt" sz="half" idx="10"/>
+          </p:nvPr>
+        </p:nvSpPr>
+        <p:spPr/>
+        <p:txBody>
+          <a:bodyPr/>
+          <a:lstStyle/>
+          <a:p>
+            <a:pPr>
+              <a:defRPr/>
+            </a:pPr>
+            <a:r>
+              <a:rPr lang="en-US"/>
+              <a:t>© NUS</a:t>
+            </a:r>
+          </a:p>
+        </p:txBody>
+      </p:sp>
+    </p:spTree>
+    <p:extLst>
+      <p:ext uri="{BB962C8B-B14F-4D97-AF65-F5344CB8AC3E}">
+        <p14:creationId xmlns:p14="http://schemas.microsoft.com/office/powerpoint/2010/main" val="2802426808"/>
+      </p:ext>
+    </p:extLst>
+  </p:cSld>
+  <p:clrMapOvr>
+    <a:masterClrMapping/>
+  </p:clrMapOvr>
+  <p:transition>
+    <p:fade/>
+  </p:transition>
+</p:sld>
+</file>
+
+<file path=ppt/slides/slide11.xml><?xml version="1.0" encoding="utf-8"?>
+<p:sld xmlns:a="http://schemas.openxmlformats.org/drawingml/2006/main" xmlns:r="http://schemas.openxmlformats.org/officeDocument/2006/relationships" xmlns:p="http://schemas.openxmlformats.org/presentationml/2006/main">
+  <p:cSld>
+    <p:spTree>
+      <p:nvGrpSpPr>
+        <p:cNvPr id="1" name=""/>
+        <p:cNvGrpSpPr/>
+        <p:nvPr/>
+      </p:nvGrpSpPr>
+      <p:grpSpPr>
+        <a:xfrm>
+          <a:off x="0" y="0"/>
+          <a:ext cx="0" cy="0"/>
+          <a:chOff x="0" y="0"/>
+          <a:chExt cx="0" cy="0"/>
+        </a:xfrm>
+      </p:grpSpPr>
+      <p:sp>
+        <p:nvSpPr>
           <p:cNvPr id="8" name="HighlightTextShape201406241503265130"/>
           <p:cNvSpPr>
             <a:spLocks noChangeArrowheads="1"/>
@@ -7312,7 +7597,7 @@
               <a:pPr>
                 <a:defRPr/>
               </a:pPr>
-              <a:t>10</a:t>
+              <a:t>11</a:t>
             </a:fld>
             <a:endParaRPr lang="en-US" dirty="0"/>
           </a:p>
@@ -7388,6 +7673,66 @@
           <a:chExt cx="0" cy="0"/>
         </a:xfrm>
       </p:grpSpPr>
+      <p:pic>
+        <p:nvPicPr>
+          <p:cNvPr id="15" name="Picture 14">
+            <a:extLst>
+              <a:ext uri="{FF2B5EF4-FFF2-40B4-BE49-F238E27FC236}">
+                <a16:creationId xmlns:a16="http://schemas.microsoft.com/office/drawing/2014/main" id="{B8CEE51F-CA93-9146-D17A-A9C824721C66}"/>
+              </a:ext>
+            </a:extLst>
+          </p:cNvPr>
+          <p:cNvPicPr>
+            <a:picLocks noChangeAspect="1"/>
+          </p:cNvPicPr>
+          <p:nvPr/>
+        </p:nvPicPr>
+        <p:blipFill>
+          <a:blip r:embed="rId3"/>
+          <a:stretch>
+            <a:fillRect/>
+          </a:stretch>
+        </p:blipFill>
+        <p:spPr>
+          <a:xfrm>
+            <a:off x="4294771" y="3064998"/>
+            <a:ext cx="4493141" cy="3572566"/>
+          </a:xfrm>
+          <a:prstGeom prst="rect">
+            <a:avLst/>
+          </a:prstGeom>
+        </p:spPr>
+      </p:pic>
+      <p:pic>
+        <p:nvPicPr>
+          <p:cNvPr id="6" name="Picture 5">
+            <a:extLst>
+              <a:ext uri="{FF2B5EF4-FFF2-40B4-BE49-F238E27FC236}">
+                <a16:creationId xmlns:a16="http://schemas.microsoft.com/office/drawing/2014/main" id="{CF82E14C-F09D-F08E-8FED-AB210305528B}"/>
+              </a:ext>
+            </a:extLst>
+          </p:cNvPr>
+          <p:cNvPicPr>
+            <a:picLocks noChangeAspect="1"/>
+          </p:cNvPicPr>
+          <p:nvPr/>
+        </p:nvPicPr>
+        <p:blipFill>
+          <a:blip r:embed="rId4"/>
+          <a:stretch>
+            <a:fillRect/>
+          </a:stretch>
+        </p:blipFill>
+        <p:spPr>
+          <a:xfrm>
+            <a:off x="1147132" y="3371317"/>
+            <a:ext cx="2986774" cy="2893728"/>
+          </a:xfrm>
+          <a:prstGeom prst="rect">
+            <a:avLst/>
+          </a:prstGeom>
+        </p:spPr>
+      </p:pic>
       <p:sp>
         <p:nvSpPr>
           <p:cNvPr id="14338" name="Rectangle 2">
@@ -7728,106 +8073,6 @@
           </a:p>
         </p:txBody>
       </p:sp>
-      <p:pic>
-        <p:nvPicPr>
-          <p:cNvPr id="7" name="Picture 6" descr="A picture containing diagram&#10;&#10;Description automatically generated">
-            <a:extLst>
-              <a:ext uri="{FF2B5EF4-FFF2-40B4-BE49-F238E27FC236}">
-                <a16:creationId xmlns:a16="http://schemas.microsoft.com/office/drawing/2014/main" id="{D0152604-E4D0-7F95-C78A-689CBBE46706}"/>
-              </a:ext>
-            </a:extLst>
-          </p:cNvPr>
-          <p:cNvPicPr>
-            <a:picLocks noChangeAspect="1"/>
-          </p:cNvPicPr>
-          <p:nvPr/>
-        </p:nvPicPr>
-        <p:blipFill rotWithShape="1">
-          <a:blip r:embed="rId3">
-            <a:extLst>
-              <a:ext uri="{28A0092B-C50C-407E-A947-70E740481C1C}">
-                <a14:useLocalDpi xmlns:a14="http://schemas.microsoft.com/office/drawing/2010/main" val="0"/>
-              </a:ext>
-            </a:extLst>
-          </a:blip>
-          <a:srcRect l="28857" t="55612" r="22000"/>
-          <a:stretch/>
-        </p:blipFill>
-        <p:spPr>
-          <a:xfrm>
-            <a:off x="4650377" y="5011836"/>
-            <a:ext cx="4101313" cy="1447058"/>
-          </a:xfrm>
-          <a:prstGeom prst="rect">
-            <a:avLst/>
-          </a:prstGeom>
-        </p:spPr>
-      </p:pic>
-      <p:pic>
-        <p:nvPicPr>
-          <p:cNvPr id="10" name="Picture 9" descr="A picture containing diagram&#10;&#10;Description automatically generated">
-            <a:extLst>
-              <a:ext uri="{FF2B5EF4-FFF2-40B4-BE49-F238E27FC236}">
-                <a16:creationId xmlns:a16="http://schemas.microsoft.com/office/drawing/2014/main" id="{741E3252-5793-BC76-C690-21304EDB54AD}"/>
-              </a:ext>
-            </a:extLst>
-          </p:cNvPr>
-          <p:cNvPicPr>
-            <a:picLocks noChangeAspect="1"/>
-          </p:cNvPicPr>
-          <p:nvPr/>
-        </p:nvPicPr>
-        <p:blipFill rotWithShape="1">
-          <a:blip r:embed="rId3">
-            <a:extLst>
-              <a:ext uri="{28A0092B-C50C-407E-A947-70E740481C1C}">
-                <a14:useLocalDpi xmlns:a14="http://schemas.microsoft.com/office/drawing/2010/main" val="0"/>
-              </a:ext>
-            </a:extLst>
-          </a:blip>
-          <a:srcRect l="28857" r="22000" b="45559"/>
-          <a:stretch/>
-        </p:blipFill>
-        <p:spPr>
-          <a:xfrm>
-            <a:off x="4677385" y="3196145"/>
-            <a:ext cx="4036424" cy="1746723"/>
-          </a:xfrm>
-          <a:prstGeom prst="rect">
-            <a:avLst/>
-          </a:prstGeom>
-        </p:spPr>
-      </p:pic>
-      <p:pic>
-        <p:nvPicPr>
-          <p:cNvPr id="12" name="Picture 11">
-            <a:extLst>
-              <a:ext uri="{FF2B5EF4-FFF2-40B4-BE49-F238E27FC236}">
-                <a16:creationId xmlns:a16="http://schemas.microsoft.com/office/drawing/2014/main" id="{E106D820-8748-71AD-D22F-7F3273634EE1}"/>
-              </a:ext>
-            </a:extLst>
-          </p:cNvPr>
-          <p:cNvPicPr>
-            <a:picLocks noChangeAspect="1"/>
-          </p:cNvPicPr>
-          <p:nvPr/>
-        </p:nvPicPr>
-        <p:blipFill>
-          <a:blip r:embed="rId4"/>
-          <a:stretch>
-            <a:fillRect/>
-          </a:stretch>
-        </p:blipFill>
-        <p:spPr>
-          <a:xfrm>
-            <a:off x="1098685" y="3277228"/>
-            <a:ext cx="3438394" cy="3331279"/>
-          </a:xfrm>
-          <a:prstGeom prst="rect">
-            <a:avLst/>
-          </a:prstGeom>
-        </p:spPr>
-      </p:pic>
       <p:cxnSp>
         <p:nvCxnSpPr>
           <p:cNvPr id="13" name="Straight Arrow Connector 12">
@@ -7903,6 +8148,41 @@
           </a:p>
         </p:txBody>
       </p:sp>
+      <p:pic>
+        <p:nvPicPr>
+          <p:cNvPr id="5" name="Picture 4" descr="A waffles with a white background&#10;&#10;AI-generated content may be incorrect.">
+            <a:extLst>
+              <a:ext uri="{FF2B5EF4-FFF2-40B4-BE49-F238E27FC236}">
+                <a16:creationId xmlns:a16="http://schemas.microsoft.com/office/drawing/2014/main" id="{53C55348-3DE5-DACA-C2F9-49D0275D14FF}"/>
+              </a:ext>
+            </a:extLst>
+          </p:cNvPr>
+          <p:cNvPicPr>
+            <a:picLocks noChangeAspect="1"/>
+          </p:cNvPicPr>
+          <p:nvPr/>
+        </p:nvPicPr>
+        <p:blipFill>
+          <a:blip r:embed="rId5" cstate="print">
+            <a:extLst>
+              <a:ext uri="{28A0092B-C50C-407E-A947-70E740481C1C}">
+                <a14:useLocalDpi xmlns:a14="http://schemas.microsoft.com/office/drawing/2010/main" val="0"/>
+              </a:ext>
+            </a:extLst>
+          </a:blip>
+          <a:srcRect b="7751"/>
+          <a:stretch/>
+        </p:blipFill>
+        <p:spPr>
+          <a:xfrm>
+            <a:off x="8367538" y="4026406"/>
+            <a:ext cx="695539" cy="704225"/>
+          </a:xfrm>
+          <a:prstGeom prst="rect">
+            <a:avLst/>
+          </a:prstGeom>
+        </p:spPr>
+      </p:pic>
     </p:spTree>
     <p:extLst>
       <p:ext uri="{BB962C8B-B14F-4D97-AF65-F5344CB8AC3E}">
@@ -8110,60 +8390,15 @@
                                   </p:childTnLst>
                                 </p:cTn>
                               </p:par>
-                            </p:childTnLst>
-                          </p:cTn>
-                        </p:par>
-                      </p:childTnLst>
-                    </p:cTn>
-                  </p:par>
-                  <p:par>
-                    <p:cTn id="19" fill="hold">
-                      <p:stCondLst>
-                        <p:cond delay="indefinite"/>
-                      </p:stCondLst>
-                      <p:childTnLst>
-                        <p:par>
-                          <p:cTn id="20" fill="hold">
-                            <p:stCondLst>
-                              <p:cond delay="0"/>
-                            </p:stCondLst>
-                            <p:childTnLst>
                               <p:par>
-                                <p:cTn id="21" presetID="1" presetClass="entr" presetSubtype="0" fill="hold" nodeType="clickEffect">
+                                <p:cTn id="19" presetID="1" presetClass="entr" presetSubtype="0" fill="hold" nodeType="withEffect">
                                   <p:stCondLst>
                                     <p:cond delay="0"/>
                                   </p:stCondLst>
                                   <p:childTnLst>
                                     <p:set>
                                       <p:cBhvr>
-                                        <p:cTn id="22" dur="1" fill="hold">
-                                          <p:stCondLst>
-                                            <p:cond delay="0"/>
-                                          </p:stCondLst>
-                                        </p:cTn>
-                                        <p:tgtEl>
-                                          <p:spTgt spid="10"/>
-                                        </p:tgtEl>
-                                        <p:attrNameLst>
-                                          <p:attrName>style.visibility</p:attrName>
-                                        </p:attrNameLst>
-                                      </p:cBhvr>
-                                      <p:to>
-                                        <p:strVal val="visible"/>
-                                      </p:to>
-                                    </p:set>
-                                  </p:childTnLst>
-                                </p:cTn>
-                              </p:par>
-                              <p:par>
-                                <p:cTn id="23" presetID="1" presetClass="entr" presetSubtype="0" fill="hold" nodeType="withEffect">
-                                  <p:stCondLst>
-                                    <p:cond delay="0"/>
-                                  </p:stCondLst>
-                                  <p:childTnLst>
-                                    <p:set>
-                                      <p:cBhvr>
-                                        <p:cTn id="24" dur="1" fill="hold">
+                                        <p:cTn id="20" dur="1" fill="hold">
                                           <p:stCondLst>
                                             <p:cond delay="0"/>
                                           </p:stCondLst>
@@ -16020,7 +16255,7 @@
                 <a:latin typeface="Courier New" pitchFamily="49" charset="0"/>
                 <a:cs typeface="Courier New" pitchFamily="49" charset="0"/>
               </a:rPr>
-              <a:t>55224728</a:t>
+              <a:t>55224732</a:t>
             </a:r>
           </a:p>
         </p:txBody>
@@ -16039,10 +16274,10 @@
         </p:nvGrpSpPr>
         <p:grpSpPr>
           <a:xfrm>
-            <a:off x="7061064" y="4776819"/>
-            <a:ext cx="1928226" cy="1200329"/>
-            <a:chOff x="6958324" y="3985810"/>
-            <a:chExt cx="1928226" cy="1200329"/>
+            <a:off x="7061064" y="5049869"/>
+            <a:ext cx="1928226" cy="646331"/>
+            <a:chOff x="6958324" y="4258860"/>
+            <a:chExt cx="1928226" cy="646331"/>
           </a:xfrm>
         </p:grpSpPr>
         <p:cxnSp>
@@ -16143,8 +16378,8 @@
           </p:nvSpPr>
           <p:spPr>
             <a:xfrm>
-              <a:off x="7561385" y="3985810"/>
-              <a:ext cx="1325165" cy="1200329"/>
+              <a:off x="7561385" y="4258860"/>
+              <a:ext cx="1325165" cy="646331"/>
             </a:xfrm>
             <a:prstGeom prst="rect">
               <a:avLst/>
@@ -16158,14 +16393,14 @@
             <a:lstStyle/>
             <a:p>
               <a:r>
-                <a:rPr lang="en-US">
+                <a:rPr lang="en-US" dirty="0">
                   <a:solidFill>
                     <a:srgbClr val="C00000"/>
                   </a:solidFill>
                 </a:rPr>
-                <a:t>These 2 outputs will always be the same.</a:t>
+                <a:t>Always the same</a:t>
               </a:r>
-              <a:endParaRPr lang="en-SG">
+              <a:endParaRPr lang="en-SG" dirty="0">
                 <a:solidFill>
                   <a:srgbClr val="C00000"/>
                 </a:solidFill>
@@ -16205,6 +16440,94 @@
           </a:p>
         </p:txBody>
       </p:sp>
+      <p:cxnSp>
+        <p:nvCxnSpPr>
+          <p:cNvPr id="6" name="Straight Arrow Connector 5">
+            <a:extLst>
+              <a:ext uri="{FF2B5EF4-FFF2-40B4-BE49-F238E27FC236}">
+                <a16:creationId xmlns:a16="http://schemas.microsoft.com/office/drawing/2014/main" id="{BB9677F0-3898-7BDA-8730-4F78C3437C7B}"/>
+              </a:ext>
+            </a:extLst>
+          </p:cNvPr>
+          <p:cNvCxnSpPr>
+            <a:cxnSpLocks/>
+          </p:cNvCxnSpPr>
+          <p:nvPr/>
+        </p:nvCxnSpPr>
+        <p:spPr>
+          <a:xfrm flipH="1" flipV="1">
+            <a:off x="7084016" y="5848881"/>
+            <a:ext cx="659809" cy="303873"/>
+          </a:xfrm>
+          <a:prstGeom prst="straightConnector1">
+            <a:avLst/>
+          </a:prstGeom>
+          <a:ln w="28575">
+            <a:solidFill>
+              <a:srgbClr val="C00000"/>
+            </a:solidFill>
+            <a:tailEnd type="arrow"/>
+          </a:ln>
+        </p:spPr>
+        <p:style>
+          <a:lnRef idx="1">
+            <a:schemeClr val="accent1"/>
+          </a:lnRef>
+          <a:fillRef idx="0">
+            <a:schemeClr val="accent1"/>
+          </a:fillRef>
+          <a:effectRef idx="0">
+            <a:schemeClr val="accent1"/>
+          </a:effectRef>
+          <a:fontRef idx="minor">
+            <a:schemeClr val="tx1"/>
+          </a:fontRef>
+        </p:style>
+      </p:cxnSp>
+      <p:sp>
+        <p:nvSpPr>
+          <p:cNvPr id="10" name="TextBox 9">
+            <a:extLst>
+              <a:ext uri="{FF2B5EF4-FFF2-40B4-BE49-F238E27FC236}">
+                <a16:creationId xmlns:a16="http://schemas.microsoft.com/office/drawing/2014/main" id="{05A07E57-F734-BE7E-C6B2-F5E59B60BE98}"/>
+              </a:ext>
+            </a:extLst>
+          </p:cNvPr>
+          <p:cNvSpPr txBox="1"/>
+          <p:nvPr/>
+        </p:nvSpPr>
+        <p:spPr>
+          <a:xfrm>
+            <a:off x="7724775" y="5657671"/>
+            <a:ext cx="1325165" cy="923330"/>
+          </a:xfrm>
+          <a:prstGeom prst="rect">
+            <a:avLst/>
+          </a:prstGeom>
+          <a:noFill/>
+        </p:spPr>
+        <p:txBody>
+          <a:bodyPr wrap="square" rtlCol="0">
+            <a:spAutoFit/>
+          </a:bodyPr>
+          <a:lstStyle/>
+          <a:p>
+            <a:r>
+              <a:rPr lang="en-US" dirty="0">
+                <a:solidFill>
+                  <a:srgbClr val="C00000"/>
+                </a:solidFill>
+              </a:rPr>
+              <a:t>Depends on the data type</a:t>
+            </a:r>
+            <a:endParaRPr lang="en-SG" dirty="0">
+              <a:solidFill>
+                <a:srgbClr val="C00000"/>
+              </a:solidFill>
+            </a:endParaRPr>
+          </a:p>
+        </p:txBody>
+      </p:sp>
     </p:spTree>
     <p:extLst>
       <p:ext uri="{BB962C8B-B14F-4D97-AF65-F5344CB8AC3E}">
@@ -16218,6 +16541,87 @@
   <p:transition>
     <p:fade/>
   </p:transition>
+  <p:timing>
+    <p:tnLst>
+      <p:par>
+        <p:cTn id="1" dur="indefinite" restart="never" nodeType="tmRoot">
+          <p:childTnLst>
+            <p:seq concurrent="1" nextAc="seek">
+              <p:cTn id="2" dur="indefinite" nodeType="mainSeq">
+                <p:childTnLst>
+                  <p:par>
+                    <p:cTn id="3" fill="hold">
+                      <p:stCondLst>
+                        <p:cond delay="indefinite"/>
+                        <p:cond evt="onBegin" delay="0">
+                          <p:tn val="2"/>
+                        </p:cond>
+                      </p:stCondLst>
+                      <p:childTnLst>
+                        <p:par>
+                          <p:cTn id="4" fill="hold">
+                            <p:stCondLst>
+                              <p:cond delay="0"/>
+                            </p:stCondLst>
+                            <p:childTnLst>
+                              <p:par>
+                                <p:cTn id="5" presetID="1" presetClass="entr" presetSubtype="0" fill="hold" grpId="0" nodeType="withEffect">
+                                  <p:stCondLst>
+                                    <p:cond delay="0"/>
+                                  </p:stCondLst>
+                                  <p:childTnLst>
+                                    <p:set>
+                                      <p:cBhvr>
+                                        <p:cTn id="6" dur="1" fill="hold">
+                                          <p:stCondLst>
+                                            <p:cond delay="0"/>
+                                          </p:stCondLst>
+                                        </p:cTn>
+                                        <p:tgtEl>
+                                          <p:spTgt spid="10"/>
+                                        </p:tgtEl>
+                                        <p:attrNameLst>
+                                          <p:attrName>style.visibility</p:attrName>
+                                        </p:attrNameLst>
+                                      </p:cBhvr>
+                                      <p:to>
+                                        <p:strVal val="visible"/>
+                                      </p:to>
+                                    </p:set>
+                                  </p:childTnLst>
+                                </p:cTn>
+                              </p:par>
+                            </p:childTnLst>
+                          </p:cTn>
+                        </p:par>
+                      </p:childTnLst>
+                    </p:cTn>
+                  </p:par>
+                </p:childTnLst>
+              </p:cTn>
+              <p:prevCondLst>
+                <p:cond evt="onPrev" delay="0">
+                  <p:tgtEl>
+                    <p:sldTgt/>
+                  </p:tgtEl>
+                </p:cond>
+              </p:prevCondLst>
+              <p:nextCondLst>
+                <p:cond evt="onNext" delay="0">
+                  <p:tgtEl>
+                    <p:sldTgt/>
+                  </p:tgtEl>
+                </p:cond>
+              </p:nextCondLst>
+            </p:seq>
+          </p:childTnLst>
+        </p:cTn>
+      </p:par>
+    </p:tnLst>
+    <p:bldLst>
+      <p:bldP spid="10" grpId="0"/>
+    </p:bldLst>
+  </p:timing>
 </p:sld>
 </file>
 
@@ -22880,19 +23284,19 @@
           <a:p>
             <a:r>
               <a:rPr lang="it-IT" dirty="0"/>
-              <a:t>25-percentile: 10</a:t>
+              <a:t>25-percentile: 12</a:t>
             </a:r>
           </a:p>
           <a:p>
             <a:r>
               <a:rPr lang="it-IT" dirty="0"/>
-              <a:t>50-percentile: 12</a:t>
+              <a:t>50-percentile: 17</a:t>
             </a:r>
           </a:p>
           <a:p>
             <a:r>
               <a:rPr lang="it-IT" dirty="0"/>
-              <a:t>75-percentile: 15</a:t>
+              <a:t>75-percentile: 18.5</a:t>
             </a:r>
           </a:p>
           <a:p>
@@ -22919,7 +23323,7 @@
             </a:pPr>
             <a:r>
               <a:rPr lang="it-IT" dirty="0"/>
-              <a:t>Mean: 13</a:t>
+              <a:t>Mean: 14</a:t>
             </a:r>
           </a:p>
           <a:p>
@@ -22929,7 +23333,7 @@
             </a:pPr>
             <a:r>
               <a:rPr lang="it-IT" dirty="0"/>
-              <a:t>25-percentile: 9</a:t>
+              <a:t>25-percentile: 9.5</a:t>
             </a:r>
           </a:p>
           <a:p>
@@ -22949,7 +23353,7 @@
             </a:pPr>
             <a:r>
               <a:rPr lang="it-IT" dirty="0"/>
-              <a:t>75-percentile: 17</a:t>
+              <a:t>75-percentile: 19.5</a:t>
             </a:r>
           </a:p>
           <a:p>
@@ -23074,7 +23478,13 @@
   <p:cSld>
     <p:spTree>
       <p:nvGrpSpPr>
-        <p:cNvPr id="1" name=""/>
+        <p:cNvPr id="1" name="">
+          <a:extLst>
+            <a:ext uri="{FF2B5EF4-FFF2-40B4-BE49-F238E27FC236}">
+              <a16:creationId xmlns:a16="http://schemas.microsoft.com/office/drawing/2014/main" id="{7F1CA892-6CAF-BAB4-5FB2-4D2DE396FC03}"/>
+            </a:ext>
+          </a:extLst>
+        </p:cNvPr>
         <p:cNvGrpSpPr/>
         <p:nvPr/>
       </p:nvGrpSpPr>
@@ -23088,10 +23498,144 @@
       </p:grpSpPr>
       <p:sp>
         <p:nvSpPr>
+          <p:cNvPr id="43" name="Slide Number Placeholder 42">
+            <a:extLst>
+              <a:ext uri="{FF2B5EF4-FFF2-40B4-BE49-F238E27FC236}">
+                <a16:creationId xmlns:a16="http://schemas.microsoft.com/office/drawing/2014/main" id="{5F68C6FD-7CF7-4365-CFB2-DD8947C1880C}"/>
+              </a:ext>
+            </a:extLst>
+          </p:cNvPr>
+          <p:cNvSpPr>
+            <a:spLocks noGrp="1"/>
+          </p:cNvSpPr>
+          <p:nvPr>
+            <p:ph type="sldNum" sz="quarter" idx="12"/>
+          </p:nvPr>
+        </p:nvSpPr>
+        <p:spPr/>
+        <p:txBody>
+          <a:bodyPr>
+            <a:normAutofit/>
+          </a:bodyPr>
+          <a:lstStyle/>
+          <a:p>
+            <a:pPr>
+              <a:defRPr/>
+            </a:pPr>
+            <a:r>
+              <a:rPr lang="en-US" sz="1200" dirty="0"/>
+              <a:t>Week6R</a:t>
+            </a:r>
+            <a:r>
+              <a:rPr dirty="0"/>
+              <a:t> - </a:t>
+            </a:r>
+            <a:fld id="{628B8346-B709-406B-887E-3E0CC6DA1327}" type="slidenum">
+              <a:rPr smtClean="0"/>
+              <a:pPr>
+                <a:defRPr/>
+              </a:pPr>
+              <a:t>8</a:t>
+            </a:fld>
+            <a:endParaRPr dirty="0"/>
+          </a:p>
+        </p:txBody>
+      </p:sp>
+      <p:sp>
+        <p:nvSpPr>
+          <p:cNvPr id="10" name="HighlightBackgroundShapeeee31423-879f-470c-ac44-148c4404b3a6">
+            <a:extLst>
+              <a:ext uri="{FF2B5EF4-FFF2-40B4-BE49-F238E27FC236}">
+                <a16:creationId xmlns:a16="http://schemas.microsoft.com/office/drawing/2014/main" id="{2B97676B-F140-1854-8A83-DAC5C60F5075}"/>
+              </a:ext>
+            </a:extLst>
+          </p:cNvPr>
+          <p:cNvSpPr>
+            <a:spLocks noChangeArrowheads="1"/>
+          </p:cNvSpPr>
+          <p:nvPr/>
+        </p:nvSpPr>
+        <p:spPr bwMode="auto">
+          <a:xfrm>
+            <a:off x="491319" y="1219200"/>
+            <a:ext cx="8134521" cy="5074920"/>
+          </a:xfrm>
+          <a:prstGeom prst="rect">
+            <a:avLst/>
+          </a:prstGeom>
+          <a:noFill/>
+          <a:ln w="9525">
+            <a:noFill/>
+            <a:miter lim="800000"/>
+            <a:headEnd/>
+            <a:tailEnd/>
+          </a:ln>
+        </p:spPr>
+        <p:txBody>
+          <a:bodyPr/>
+          <a:lstStyle/>
+          <a:p>
+            <a:pPr marL="342900" indent="-342900">
+              <a:spcBef>
+                <a:spcPts val="1200"/>
+              </a:spcBef>
+              <a:buClr>
+                <a:schemeClr val="accent4">
+                  <a:lumMod val="60000"/>
+                  <a:lumOff val="40000"/>
+                </a:schemeClr>
+              </a:buClr>
+              <a:buSzPct val="75000"/>
+              <a:buFont typeface="Wingdings" pitchFamily="2" charset="2"/>
+              <a:buChar char="n"/>
+            </a:pPr>
+            <a:endParaRPr lang="en-US" sz="2400" dirty="0"/>
+          </a:p>
+        </p:txBody>
+      </p:sp>
+      <p:sp>
+        <p:nvSpPr>
+          <p:cNvPr id="6" name="[Date Placeholder 3]">
+            <a:extLst>
+              <a:ext uri="{FF2B5EF4-FFF2-40B4-BE49-F238E27FC236}">
+                <a16:creationId xmlns:a16="http://schemas.microsoft.com/office/drawing/2014/main" id="{B5CB08D5-11F8-C9B9-1E03-BE91F6E77D7F}"/>
+              </a:ext>
+            </a:extLst>
+          </p:cNvPr>
+          <p:cNvSpPr>
+            <a:spLocks noGrp="1"/>
+          </p:cNvSpPr>
+          <p:nvPr>
+            <p:ph type="dt" sz="half" idx="10"/>
+          </p:nvPr>
+        </p:nvSpPr>
+        <p:spPr>
+          <a:xfrm>
+            <a:off x="457200" y="18288"/>
+            <a:ext cx="2895600" cy="329184"/>
+          </a:xfrm>
+        </p:spPr>
+        <p:txBody>
+          <a:bodyPr/>
+          <a:lstStyle/>
+          <a:p>
+            <a:pPr>
+              <a:defRPr/>
+            </a:pPr>
+            <a:r>
+              <a:rPr lang="en-US"/>
+              <a:t>© NUS</a:t>
+            </a:r>
+            <a:endParaRPr lang="en-US" dirty="0"/>
+          </a:p>
+        </p:txBody>
+      </p:sp>
+      <p:sp>
+        <p:nvSpPr>
           <p:cNvPr id="2" name="Footer Placeholder 1">
             <a:extLst>
               <a:ext uri="{FF2B5EF4-FFF2-40B4-BE49-F238E27FC236}">
-                <a16:creationId xmlns:a16="http://schemas.microsoft.com/office/drawing/2014/main" id="{F00CF889-8BFE-01EA-A63A-1A40E622316A}"/>
+                <a16:creationId xmlns:a16="http://schemas.microsoft.com/office/drawing/2014/main" id="{8897C9AD-7766-C088-3BCC-207B488CEC32}"/>
               </a:ext>
             </a:extLst>
           </p:cNvPr>
@@ -23111,7 +23655,7 @@
               <a:defRPr/>
             </a:pPr>
             <a:r>
-              <a:rPr lang="en-US"/>
+              <a:rPr lang="en-US" dirty="0"/>
               <a:t>CS1010: Programming Methodology</a:t>
             </a:r>
           </a:p>
@@ -23119,351 +23663,10 @@
       </p:sp>
       <p:sp>
         <p:nvSpPr>
-          <p:cNvPr id="3" name="Slide Number Placeholder 2">
+          <p:cNvPr id="5" name="Rectangle 2">
             <a:extLst>
               <a:ext uri="{FF2B5EF4-FFF2-40B4-BE49-F238E27FC236}">
-                <a16:creationId xmlns:a16="http://schemas.microsoft.com/office/drawing/2014/main" id="{C3EBAA06-A369-CA77-B91F-58CCFB7351E4}"/>
-              </a:ext>
-            </a:extLst>
-          </p:cNvPr>
-          <p:cNvSpPr>
-            <a:spLocks noGrp="1"/>
-          </p:cNvSpPr>
-          <p:nvPr>
-            <p:ph type="sldNum" sz="quarter" idx="12"/>
-          </p:nvPr>
-        </p:nvSpPr>
-        <p:spPr/>
-        <p:txBody>
-          <a:bodyPr/>
-          <a:lstStyle/>
-          <a:p>
-            <a:pPr>
-              <a:defRPr/>
-            </a:pPr>
-            <a:r>
-              <a:rPr lang="en-US" dirty="0"/>
-              <a:t>Week6R - </a:t>
-            </a:r>
-            <a:fld id="{2E4790E1-2590-4AEE-892D-AB46A7688113}" type="slidenum">
-              <a:rPr lang="en-US" smtClean="0"/>
-              <a:pPr>
-                <a:defRPr/>
-              </a:pPr>
-              <a:t>8</a:t>
-            </a:fld>
-            <a:endParaRPr lang="en-US" dirty="0"/>
-          </a:p>
-        </p:txBody>
-      </p:sp>
-      <p:sp>
-        <p:nvSpPr>
-          <p:cNvPr id="6" name="Content Placeholder 5">
-            <a:extLst>
-              <a:ext uri="{FF2B5EF4-FFF2-40B4-BE49-F238E27FC236}">
-                <a16:creationId xmlns:a16="http://schemas.microsoft.com/office/drawing/2014/main" id="{00568286-6850-338C-8176-699E16332DA1}"/>
-              </a:ext>
-            </a:extLst>
-          </p:cNvPr>
-          <p:cNvSpPr>
-            <a:spLocks noGrp="1"/>
-          </p:cNvSpPr>
-          <p:nvPr>
-            <p:ph idx="1"/>
-          </p:nvPr>
-        </p:nvSpPr>
-        <p:spPr>
-          <a:xfrm>
-            <a:off x="587375" y="1187450"/>
-            <a:ext cx="8292856" cy="5450114"/>
-          </a:xfrm>
-        </p:spPr>
-        <p:txBody>
-          <a:bodyPr>
-            <a:noAutofit/>
-          </a:bodyPr>
-          <a:lstStyle/>
-          <a:p>
-            <a:pPr marL="347663" indent="-347663">
-              <a:spcBef>
-                <a:spcPts val="600"/>
-              </a:spcBef>
-              <a:buClr>
-                <a:schemeClr val="tx1">
-                  <a:lumMod val="90000"/>
-                  <a:lumOff val="10000"/>
-                </a:schemeClr>
-              </a:buClr>
-              <a:buSzPct val="100000"/>
-              <a:buFont typeface="Wingdings" panose="05000000000000000000" pitchFamily="2" charset="2"/>
-              <a:buChar char="§"/>
-              <a:defRPr/>
-            </a:pPr>
-            <a:r>
-              <a:rPr lang="en-US" dirty="0"/>
-              <a:t>Avoid compilation errors and warnings</a:t>
-            </a:r>
-          </a:p>
-          <a:p>
-            <a:pPr marL="621983" lvl="1" indent="-347663">
-              <a:spcBef>
-                <a:spcPts val="600"/>
-              </a:spcBef>
-              <a:buClr>
-                <a:schemeClr val="tx1">
-                  <a:lumMod val="90000"/>
-                  <a:lumOff val="10000"/>
-                </a:schemeClr>
-              </a:buClr>
-              <a:buSzPct val="100000"/>
-              <a:buFont typeface="Wingdings" panose="05000000000000000000" pitchFamily="2" charset="2"/>
-              <a:buChar char="§"/>
-              <a:defRPr/>
-            </a:pPr>
-            <a:r>
-              <a:rPr lang="en-US" dirty="0"/>
-              <a:t>Incremental Coding</a:t>
-            </a:r>
-          </a:p>
-          <a:p>
-            <a:pPr marL="621983" lvl="1" indent="-347663">
-              <a:spcBef>
-                <a:spcPts val="600"/>
-              </a:spcBef>
-              <a:buClr>
-                <a:schemeClr val="tx1">
-                  <a:lumMod val="90000"/>
-                  <a:lumOff val="10000"/>
-                </a:schemeClr>
-              </a:buClr>
-              <a:buSzPct val="100000"/>
-              <a:buFont typeface="Wingdings" panose="05000000000000000000" pitchFamily="2" charset="2"/>
-              <a:buChar char="§"/>
-              <a:defRPr/>
-            </a:pPr>
-            <a:endParaRPr lang="en-US" dirty="0">
-              <a:highlight>
-                <a:srgbClr val="FFFF00"/>
-              </a:highlight>
-            </a:endParaRPr>
-          </a:p>
-          <a:p>
-            <a:pPr marL="347663" indent="-347663">
-              <a:spcBef>
-                <a:spcPts val="600"/>
-              </a:spcBef>
-              <a:buClr>
-                <a:schemeClr val="tx1">
-                  <a:lumMod val="90000"/>
-                  <a:lumOff val="10000"/>
-                </a:schemeClr>
-              </a:buClr>
-              <a:buSzPct val="100000"/>
-              <a:buFont typeface="Wingdings" panose="05000000000000000000" pitchFamily="2" charset="2"/>
-              <a:buChar char="§"/>
-              <a:defRPr/>
-            </a:pPr>
-            <a:r>
-              <a:rPr lang="en-US" dirty="0"/>
-              <a:t>Avoid deduction on style</a:t>
-            </a:r>
-          </a:p>
-          <a:p>
-            <a:pPr marL="621983" lvl="1" indent="-347663">
-              <a:spcBef>
-                <a:spcPts val="600"/>
-              </a:spcBef>
-              <a:buClr>
-                <a:schemeClr val="tx1">
-                  <a:lumMod val="90000"/>
-                  <a:lumOff val="10000"/>
-                </a:schemeClr>
-              </a:buClr>
-              <a:buSzPct val="100000"/>
-              <a:buFont typeface="Wingdings" panose="05000000000000000000" pitchFamily="2" charset="2"/>
-              <a:buChar char="§"/>
-              <a:defRPr/>
-            </a:pPr>
-            <a:r>
-              <a:rPr lang="en-US" dirty="0"/>
-              <a:t>Check and follow CS1010 Stye Guide</a:t>
-            </a:r>
-          </a:p>
-          <a:p>
-            <a:pPr marL="621983" lvl="1" indent="-347663">
-              <a:spcBef>
-                <a:spcPts val="600"/>
-              </a:spcBef>
-              <a:buClr>
-                <a:schemeClr val="tx1">
-                  <a:lumMod val="90000"/>
-                  <a:lumOff val="10000"/>
-                </a:schemeClr>
-              </a:buClr>
-              <a:buSzPct val="100000"/>
-              <a:buFont typeface="Wingdings" panose="05000000000000000000" pitchFamily="2" charset="2"/>
-              <a:buChar char="§"/>
-              <a:defRPr/>
-            </a:pPr>
-            <a:endParaRPr lang="en-US" dirty="0"/>
-          </a:p>
-          <a:p>
-            <a:pPr marL="347663" indent="-347663">
-              <a:spcBef>
-                <a:spcPts val="600"/>
-              </a:spcBef>
-              <a:buClr>
-                <a:schemeClr val="tx1">
-                  <a:lumMod val="90000"/>
-                  <a:lumOff val="10000"/>
-                </a:schemeClr>
-              </a:buClr>
-              <a:buSzPct val="100000"/>
-              <a:buFont typeface="Wingdings" panose="05000000000000000000" pitchFamily="2" charset="2"/>
-              <a:buChar char="§"/>
-              <a:defRPr/>
-            </a:pPr>
-            <a:r>
-              <a:rPr lang="en-US" dirty="0"/>
-              <a:t>No recursion</a:t>
-            </a:r>
-          </a:p>
-          <a:p>
-            <a:pPr marL="621983" lvl="1" indent="-347663">
-              <a:spcBef>
-                <a:spcPts val="600"/>
-              </a:spcBef>
-              <a:buClr>
-                <a:schemeClr val="tx1">
-                  <a:lumMod val="90000"/>
-                  <a:lumOff val="10000"/>
-                </a:schemeClr>
-              </a:buClr>
-              <a:buSzPct val="100000"/>
-              <a:buFont typeface="Wingdings" panose="05000000000000000000" pitchFamily="2" charset="2"/>
-              <a:buChar char="§"/>
-              <a:defRPr/>
-            </a:pPr>
-            <a:r>
-              <a:rPr lang="en-US" dirty="0"/>
-              <a:t>Focus on using loops for repetition</a:t>
-            </a:r>
-          </a:p>
-          <a:p>
-            <a:pPr marL="621983" lvl="1" indent="-347663">
-              <a:spcBef>
-                <a:spcPts val="600"/>
-              </a:spcBef>
-              <a:buClr>
-                <a:schemeClr val="tx1">
-                  <a:lumMod val="90000"/>
-                  <a:lumOff val="10000"/>
-                </a:schemeClr>
-              </a:buClr>
-              <a:buSzPct val="100000"/>
-              <a:buFont typeface="Wingdings" panose="05000000000000000000" pitchFamily="2" charset="2"/>
-              <a:buChar char="§"/>
-              <a:defRPr/>
-            </a:pPr>
-            <a:endParaRPr lang="en-US" dirty="0"/>
-          </a:p>
-          <a:p>
-            <a:pPr marL="347663" indent="-347663">
-              <a:spcBef>
-                <a:spcPts val="600"/>
-              </a:spcBef>
-              <a:buClr>
-                <a:schemeClr val="tx1">
-                  <a:lumMod val="90000"/>
-                  <a:lumOff val="10000"/>
-                </a:schemeClr>
-              </a:buClr>
-              <a:buSzPct val="100000"/>
-              <a:buFont typeface="Wingdings" panose="05000000000000000000" pitchFamily="2" charset="2"/>
-              <a:buChar char="§"/>
-              <a:defRPr/>
-            </a:pPr>
-            <a:r>
-              <a:rPr lang="en-US" dirty="0"/>
-              <a:t>No dynamic arrays</a:t>
-            </a:r>
-          </a:p>
-          <a:p>
-            <a:pPr marL="621983" lvl="1" indent="-347663">
-              <a:spcBef>
-                <a:spcPts val="600"/>
-              </a:spcBef>
-              <a:buClr>
-                <a:schemeClr val="tx1">
-                  <a:lumMod val="90000"/>
-                  <a:lumOff val="10000"/>
-                </a:schemeClr>
-              </a:buClr>
-              <a:buSzPct val="100000"/>
-              <a:buFont typeface="Wingdings" panose="05000000000000000000" pitchFamily="2" charset="2"/>
-              <a:buChar char="§"/>
-              <a:defRPr/>
-            </a:pPr>
-            <a:r>
-              <a:rPr lang="en-US" dirty="0"/>
-              <a:t>Only fixed length arrays</a:t>
-            </a:r>
-          </a:p>
-          <a:p>
-            <a:pPr marL="621983" lvl="1" indent="-347663">
-              <a:spcBef>
-                <a:spcPts val="600"/>
-              </a:spcBef>
-              <a:buClr>
-                <a:schemeClr val="tx1">
-                  <a:lumMod val="90000"/>
-                  <a:lumOff val="10000"/>
-                </a:schemeClr>
-              </a:buClr>
-              <a:buSzPct val="100000"/>
-              <a:buFont typeface="Wingdings" panose="05000000000000000000" pitchFamily="2" charset="2"/>
-              <a:buChar char="§"/>
-              <a:defRPr/>
-            </a:pPr>
-            <a:endParaRPr lang="en-US" dirty="0"/>
-          </a:p>
-          <a:p>
-            <a:pPr marL="347663" indent="-347663">
-              <a:spcBef>
-                <a:spcPts val="600"/>
-              </a:spcBef>
-              <a:buClr>
-                <a:schemeClr val="tx1">
-                  <a:lumMod val="90000"/>
-                  <a:lumOff val="10000"/>
-                </a:schemeClr>
-              </a:buClr>
-              <a:buSzPct val="100000"/>
-              <a:buFont typeface="Wingdings" panose="05000000000000000000" pitchFamily="2" charset="2"/>
-              <a:buChar char="§"/>
-              <a:defRPr/>
-            </a:pPr>
-            <a:r>
-              <a:rPr lang="en-US" dirty="0"/>
-              <a:t>No </a:t>
-            </a:r>
-            <a:r>
-              <a:rPr lang="en-US"/>
-              <a:t>trivial questions</a:t>
-            </a:r>
-            <a:br>
-              <a:rPr lang="en-US" dirty="0"/>
-            </a:br>
-            <a:endParaRPr lang="en-US" dirty="0"/>
-          </a:p>
-        </p:txBody>
-      </p:sp>
-      <p:sp>
-        <p:nvSpPr>
-          <p:cNvPr id="13" name="Rectangle 2">
-            <a:extLst>
-              <a:ext uri="{FF2B5EF4-FFF2-40B4-BE49-F238E27FC236}">
-                <a16:creationId xmlns:a16="http://schemas.microsoft.com/office/drawing/2014/main" id="{DE802AD8-E3DD-1D13-E1EA-E65539750AA2}"/>
+                <a16:creationId xmlns:a16="http://schemas.microsoft.com/office/drawing/2014/main" id="{5FFB8BAB-4C2A-0B3D-48A1-99993A14B541}"/>
               </a:ext>
             </a:extLst>
           </p:cNvPr>
@@ -23476,62 +23679,363 @@
         </p:nvSpPr>
         <p:spPr>
           <a:xfrm>
-            <a:off x="533400" y="381000"/>
-            <a:ext cx="8382000" cy="838200"/>
+            <a:off x="533400" y="457200"/>
+            <a:ext cx="8153400" cy="685800"/>
           </a:xfrm>
         </p:spPr>
         <p:txBody>
           <a:bodyPr>
-            <a:normAutofit/>
+            <a:normAutofit fontScale="90000"/>
           </a:bodyPr>
           <a:lstStyle/>
           <a:p>
-            <a:r>
-              <a:rPr lang="en-GB" sz="3600" dirty="0">
+            <a:pPr eaLnBrk="1" hangingPunct="1"/>
+            <a:r>
+              <a:rPr lang="en-GB" dirty="0">
                 <a:solidFill>
                   <a:srgbClr val="0000FF"/>
                 </a:solidFill>
               </a:rPr>
-              <a:t>Quick tips for PE1</a:t>
+              <a:t>PE1</a:t>
             </a:r>
           </a:p>
         </p:txBody>
       </p:sp>
       <p:sp>
         <p:nvSpPr>
-          <p:cNvPr id="4" name="Date Placeholder 3">
+          <p:cNvPr id="7" name="HighlightBackgroundShapeeee31423-879f-470c-ac44-148c4404b3a6">
             <a:extLst>
               <a:ext uri="{FF2B5EF4-FFF2-40B4-BE49-F238E27FC236}">
-                <a16:creationId xmlns:a16="http://schemas.microsoft.com/office/drawing/2014/main" id="{F67AE948-18D5-176F-FC15-1CD28F403184}"/>
+                <a16:creationId xmlns:a16="http://schemas.microsoft.com/office/drawing/2014/main" id="{68FE83B9-5DAF-C4E0-7BA6-EE8195BF0690}"/>
               </a:ext>
             </a:extLst>
           </p:cNvPr>
           <p:cNvSpPr>
-            <a:spLocks noGrp="1"/>
+            <a:spLocks noChangeArrowheads="1"/>
           </p:cNvSpPr>
-          <p:nvPr>
-            <p:ph type="dt" sz="half" idx="10"/>
-          </p:nvPr>
+          <p:nvPr/>
         </p:nvSpPr>
-        <p:spPr/>
+        <p:spPr bwMode="auto">
+          <a:xfrm>
+            <a:off x="643719" y="1371600"/>
+            <a:ext cx="8134521" cy="5074920"/>
+          </a:xfrm>
+          <a:prstGeom prst="rect">
+            <a:avLst/>
+          </a:prstGeom>
+          <a:noFill/>
+          <a:ln w="9525">
+            <a:noFill/>
+            <a:miter lim="800000"/>
+            <a:headEnd/>
+            <a:tailEnd/>
+          </a:ln>
+        </p:spPr>
         <p:txBody>
           <a:bodyPr/>
           <a:lstStyle/>
           <a:p>
+            <a:pPr marL="342900" indent="-342900">
+              <a:spcBef>
+                <a:spcPts val="1200"/>
+              </a:spcBef>
+              <a:buClr>
+                <a:schemeClr val="accent4">
+                  <a:lumMod val="60000"/>
+                  <a:lumOff val="40000"/>
+                </a:schemeClr>
+              </a:buClr>
+              <a:buSzPct val="75000"/>
+              <a:buFont typeface="Wingdings" pitchFamily="2" charset="2"/>
+              <a:buChar char="n"/>
+            </a:pPr>
+            <a:r>
+              <a:rPr lang="en-US" sz="2400" dirty="0"/>
+              <a:t>Basic Info</a:t>
+            </a:r>
+          </a:p>
+          <a:p>
+            <a:pPr marL="800100" lvl="1" indent="-342900">
+              <a:spcBef>
+                <a:spcPts val="1200"/>
+              </a:spcBef>
+              <a:buClr>
+                <a:schemeClr val="accent4">
+                  <a:lumMod val="60000"/>
+                  <a:lumOff val="40000"/>
+                </a:schemeClr>
+              </a:buClr>
+              <a:buSzPct val="75000"/>
+              <a:buFont typeface="Wingdings" pitchFamily="2" charset="2"/>
+              <a:buChar char="n"/>
+            </a:pPr>
+            <a:r>
+              <a:rPr lang="en-US" sz="2000" dirty="0"/>
+              <a:t>Date: </a:t>
+            </a:r>
+            <a:r>
+              <a:rPr lang="en-US" sz="2000" dirty="0">
+                <a:solidFill>
+                  <a:srgbClr val="0000FF"/>
+                </a:solidFill>
+              </a:rPr>
+              <a:t>17 Mar (Tue)</a:t>
+            </a:r>
+          </a:p>
+          <a:p>
+            <a:pPr marL="800100" lvl="1" indent="-342900">
+              <a:spcBef>
+                <a:spcPts val="1200"/>
+              </a:spcBef>
+              <a:buClr>
+                <a:schemeClr val="accent4">
+                  <a:lumMod val="60000"/>
+                  <a:lumOff val="40000"/>
+                </a:schemeClr>
+              </a:buClr>
+              <a:buSzPct val="75000"/>
+              <a:buFont typeface="Wingdings" pitchFamily="2" charset="2"/>
+              <a:buChar char="n"/>
+            </a:pPr>
+            <a:r>
+              <a:rPr lang="en-US" sz="2000" dirty="0"/>
+              <a:t>Time: </a:t>
+            </a:r>
+            <a:r>
+              <a:rPr lang="en-US" sz="2000" dirty="0">
+                <a:solidFill>
+                  <a:srgbClr val="0000FF"/>
+                </a:solidFill>
+              </a:rPr>
+              <a:t>6 pm to 9 pm</a:t>
+            </a:r>
+          </a:p>
+          <a:p>
+            <a:pPr marL="800100" lvl="1" indent="-342900">
+              <a:spcBef>
+                <a:spcPts val="1200"/>
+              </a:spcBef>
+              <a:buClr>
+                <a:schemeClr val="accent4">
+                  <a:lumMod val="60000"/>
+                  <a:lumOff val="40000"/>
+                </a:schemeClr>
+              </a:buClr>
+              <a:buSzPct val="75000"/>
+              <a:buFont typeface="Wingdings" pitchFamily="2" charset="2"/>
+              <a:buChar char="n"/>
+            </a:pPr>
+            <a:r>
+              <a:rPr lang="en-US" sz="2000" dirty="0"/>
+              <a:t>Venue: </a:t>
+            </a:r>
+            <a:r>
+              <a:rPr lang="en-US" sz="2000" dirty="0">
+                <a:solidFill>
+                  <a:srgbClr val="0000FF"/>
+                </a:solidFill>
+              </a:rPr>
+              <a:t>PL4 (COM1-B111)</a:t>
+            </a:r>
+          </a:p>
+          <a:p>
+            <a:pPr marL="800100" lvl="1" indent="-342900">
+              <a:spcBef>
+                <a:spcPts val="1200"/>
+              </a:spcBef>
+              <a:buClr>
+                <a:schemeClr val="accent4">
+                  <a:lumMod val="60000"/>
+                  <a:lumOff val="40000"/>
+                </a:schemeClr>
+              </a:buClr>
+              <a:buSzPct val="75000"/>
+              <a:buFont typeface="Wingdings" pitchFamily="2" charset="2"/>
+              <a:buChar char="n"/>
+            </a:pPr>
+            <a:r>
+              <a:rPr lang="en-US" sz="2000" dirty="0"/>
+              <a:t>Scope: </a:t>
+            </a:r>
+            <a:r>
+              <a:rPr lang="en-US" sz="2000" dirty="0">
+                <a:solidFill>
+                  <a:srgbClr val="0000FF"/>
+                </a:solidFill>
+              </a:rPr>
+              <a:t>Units 1-14 and Exercises 0-3</a:t>
+            </a:r>
+          </a:p>
+          <a:p>
+            <a:pPr marL="800100" lvl="1" indent="-342900">
+              <a:spcBef>
+                <a:spcPts val="1200"/>
+              </a:spcBef>
+              <a:buClr>
+                <a:schemeClr val="accent4">
+                  <a:lumMod val="60000"/>
+                  <a:lumOff val="40000"/>
+                </a:schemeClr>
+              </a:buClr>
+              <a:buSzPct val="75000"/>
+              <a:buFont typeface="Wingdings" pitchFamily="2" charset="2"/>
+              <a:buChar char="n"/>
+            </a:pPr>
+            <a:r>
+              <a:rPr lang="en-US" sz="2000" dirty="0"/>
+              <a:t>Format: </a:t>
+            </a:r>
+            <a:r>
+              <a:rPr lang="en-US" sz="2000" dirty="0">
+                <a:solidFill>
+                  <a:srgbClr val="0000FF"/>
+                </a:solidFill>
+              </a:rPr>
+              <a:t>4</a:t>
+            </a:r>
+            <a:r>
+              <a:rPr lang="en-US" sz="2000" dirty="0"/>
+              <a:t> programming questions, easy to hard</a:t>
+            </a:r>
+          </a:p>
+          <a:p>
+            <a:pPr marL="800100" lvl="1" indent="-342900">
+              <a:spcBef>
+                <a:spcPts val="1200"/>
+              </a:spcBef>
+              <a:buClr>
+                <a:schemeClr val="accent4">
+                  <a:lumMod val="60000"/>
+                  <a:lumOff val="40000"/>
+                </a:schemeClr>
+              </a:buClr>
+              <a:buSzPct val="75000"/>
+              <a:buFont typeface="Wingdings" pitchFamily="2" charset="2"/>
+              <a:buChar char="n"/>
+            </a:pPr>
+            <a:r>
+              <a:rPr lang="en-US" sz="2000" dirty="0"/>
+              <a:t>Duration: </a:t>
+            </a:r>
+            <a:r>
+              <a:rPr lang="en-US" sz="2000" dirty="0">
+                <a:solidFill>
+                  <a:srgbClr val="0000FF"/>
+                </a:solidFill>
+              </a:rPr>
+              <a:t>2.5 hours</a:t>
+            </a:r>
+          </a:p>
+          <a:p>
+            <a:pPr marL="800100" lvl="1" indent="-342900">
+              <a:spcBef>
+                <a:spcPts val="1200"/>
+              </a:spcBef>
+              <a:buClr>
+                <a:schemeClr val="accent4">
+                  <a:lumMod val="60000"/>
+                  <a:lumOff val="40000"/>
+                </a:schemeClr>
+              </a:buClr>
+              <a:buSzPct val="75000"/>
+              <a:buFont typeface="Wingdings" pitchFamily="2" charset="2"/>
+              <a:buChar char="n"/>
+            </a:pPr>
+            <a:r>
+              <a:rPr lang="en-US" sz="2000" dirty="0"/>
+              <a:t>Open Book (Analog references only but calculators allowed)</a:t>
+            </a:r>
+          </a:p>
+          <a:p>
+            <a:pPr marL="800100" lvl="1" indent="-342900">
+              <a:spcBef>
+                <a:spcPts val="1200"/>
+              </a:spcBef>
+              <a:buClr>
+                <a:schemeClr val="accent4">
+                  <a:lumMod val="60000"/>
+                  <a:lumOff val="40000"/>
+                </a:schemeClr>
+              </a:buClr>
+              <a:buSzPct val="75000"/>
+              <a:buFont typeface="Wingdings" pitchFamily="2" charset="2"/>
+              <a:buChar char="n"/>
+            </a:pPr>
+            <a:endParaRPr lang="en-US" sz="2000" dirty="0"/>
+          </a:p>
+          <a:p>
+            <a:pPr marL="342900" indent="-342900">
+              <a:spcBef>
+                <a:spcPts val="1200"/>
+              </a:spcBef>
+              <a:buClr>
+                <a:schemeClr val="accent4">
+                  <a:lumMod val="60000"/>
+                  <a:lumOff val="40000"/>
+                </a:schemeClr>
+              </a:buClr>
+              <a:buSzPct val="75000"/>
+              <a:buFont typeface="Wingdings" pitchFamily="2" charset="2"/>
+              <a:buChar char="n"/>
+            </a:pPr>
+            <a:r>
+              <a:rPr lang="en-US" sz="2400" dirty="0"/>
+              <a:t>Past year paper available in Canvas</a:t>
+            </a:r>
+          </a:p>
+          <a:p>
+            <a:pPr lvl="1">
+              <a:spcBef>
+                <a:spcPts val="1200"/>
+              </a:spcBef>
+              <a:buClr>
+                <a:schemeClr val="accent4">
+                  <a:lumMod val="60000"/>
+                  <a:lumOff val="40000"/>
+                </a:schemeClr>
+              </a:buClr>
+              <a:buSzPct val="75000"/>
+            </a:pPr>
+            <a:endParaRPr lang="en-US" sz="2400" dirty="0"/>
+          </a:p>
+          <a:p>
             <a:pPr>
-              <a:defRPr/>
+              <a:spcBef>
+                <a:spcPts val="1200"/>
+              </a:spcBef>
+              <a:buClr>
+                <a:schemeClr val="accent4">
+                  <a:lumMod val="60000"/>
+                  <a:lumOff val="40000"/>
+                </a:schemeClr>
+              </a:buClr>
+              <a:buSzPct val="75000"/>
             </a:pPr>
-            <a:r>
-              <a:rPr lang="en-US"/>
-              <a:t>© NUS</a:t>
-            </a:r>
+            <a:endParaRPr lang="en-US" sz="2400" dirty="0"/>
+          </a:p>
+          <a:p>
+            <a:pPr marL="342900" indent="-342900">
+              <a:spcBef>
+                <a:spcPts val="1200"/>
+              </a:spcBef>
+              <a:buClr>
+                <a:schemeClr val="accent4">
+                  <a:lumMod val="60000"/>
+                  <a:lumOff val="40000"/>
+                </a:schemeClr>
+              </a:buClr>
+              <a:buSzPct val="75000"/>
+              <a:buFont typeface="Wingdings" pitchFamily="2" charset="2"/>
+              <a:buChar char="n"/>
+            </a:pPr>
+            <a:endParaRPr lang="en-US" sz="2400" dirty="0"/>
           </a:p>
         </p:txBody>
       </p:sp>
     </p:spTree>
     <p:extLst>
       <p:ext uri="{BB962C8B-B14F-4D97-AF65-F5344CB8AC3E}">
-        <p14:creationId xmlns:p14="http://schemas.microsoft.com/office/powerpoint/2010/main" val="4078418712"/>
+        <p14:creationId xmlns:p14="http://schemas.microsoft.com/office/powerpoint/2010/main" val="1414353441"/>
       </p:ext>
     </p:extLst>
   </p:cSld>
@@ -23633,10 +24137,252 @@
       </p:sp>
       <p:sp>
         <p:nvSpPr>
-          <p:cNvPr id="9" name="Rectangle 2">
+          <p:cNvPr id="6" name="Content Placeholder 5">
             <a:extLst>
               <a:ext uri="{FF2B5EF4-FFF2-40B4-BE49-F238E27FC236}">
-                <a16:creationId xmlns:a16="http://schemas.microsoft.com/office/drawing/2014/main" id="{4E812EE8-7A20-DB7E-0630-5C7863012CED}"/>
+                <a16:creationId xmlns:a16="http://schemas.microsoft.com/office/drawing/2014/main" id="{00568286-6850-338C-8176-699E16332DA1}"/>
+              </a:ext>
+            </a:extLst>
+          </p:cNvPr>
+          <p:cNvSpPr>
+            <a:spLocks noGrp="1"/>
+          </p:cNvSpPr>
+          <p:nvPr>
+            <p:ph idx="1"/>
+          </p:nvPr>
+        </p:nvSpPr>
+        <p:spPr>
+          <a:xfrm>
+            <a:off x="587375" y="1187450"/>
+            <a:ext cx="8292856" cy="5450114"/>
+          </a:xfrm>
+        </p:spPr>
+        <p:txBody>
+          <a:bodyPr>
+            <a:noAutofit/>
+          </a:bodyPr>
+          <a:lstStyle/>
+          <a:p>
+            <a:pPr marL="347663" indent="-347663">
+              <a:spcBef>
+                <a:spcPts val="600"/>
+              </a:spcBef>
+              <a:buClr>
+                <a:schemeClr val="tx1">
+                  <a:lumMod val="90000"/>
+                  <a:lumOff val="10000"/>
+                </a:schemeClr>
+              </a:buClr>
+              <a:buSzPct val="100000"/>
+              <a:buFont typeface="Wingdings" panose="05000000000000000000" pitchFamily="2" charset="2"/>
+              <a:buChar char="§"/>
+              <a:defRPr/>
+            </a:pPr>
+            <a:r>
+              <a:rPr lang="en-US" dirty="0"/>
+              <a:t>Avoid compilation errors and warnings</a:t>
+            </a:r>
+          </a:p>
+          <a:p>
+            <a:pPr marL="621983" lvl="1" indent="-347663">
+              <a:spcBef>
+                <a:spcPts val="600"/>
+              </a:spcBef>
+              <a:buClr>
+                <a:schemeClr val="tx1">
+                  <a:lumMod val="90000"/>
+                  <a:lumOff val="10000"/>
+                </a:schemeClr>
+              </a:buClr>
+              <a:buSzPct val="100000"/>
+              <a:buFont typeface="Wingdings" panose="05000000000000000000" pitchFamily="2" charset="2"/>
+              <a:buChar char="§"/>
+              <a:defRPr/>
+            </a:pPr>
+            <a:r>
+              <a:rPr lang="en-US" dirty="0"/>
+              <a:t>Incremental Coding</a:t>
+            </a:r>
+          </a:p>
+          <a:p>
+            <a:pPr marL="621983" lvl="1" indent="-347663">
+              <a:spcBef>
+                <a:spcPts val="600"/>
+              </a:spcBef>
+              <a:buClr>
+                <a:schemeClr val="tx1">
+                  <a:lumMod val="90000"/>
+                  <a:lumOff val="10000"/>
+                </a:schemeClr>
+              </a:buClr>
+              <a:buSzPct val="100000"/>
+              <a:buFont typeface="Wingdings" panose="05000000000000000000" pitchFamily="2" charset="2"/>
+              <a:buChar char="§"/>
+              <a:defRPr/>
+            </a:pPr>
+            <a:endParaRPr lang="en-US" dirty="0">
+              <a:highlight>
+                <a:srgbClr val="FFFF00"/>
+              </a:highlight>
+            </a:endParaRPr>
+          </a:p>
+          <a:p>
+            <a:pPr marL="347663" indent="-347663">
+              <a:spcBef>
+                <a:spcPts val="600"/>
+              </a:spcBef>
+              <a:buClr>
+                <a:schemeClr val="tx1">
+                  <a:lumMod val="90000"/>
+                  <a:lumOff val="10000"/>
+                </a:schemeClr>
+              </a:buClr>
+              <a:buSzPct val="100000"/>
+              <a:buFont typeface="Wingdings" panose="05000000000000000000" pitchFamily="2" charset="2"/>
+              <a:buChar char="§"/>
+              <a:defRPr/>
+            </a:pPr>
+            <a:r>
+              <a:rPr lang="en-US" dirty="0"/>
+              <a:t>Avoid deduction on style</a:t>
+            </a:r>
+          </a:p>
+          <a:p>
+            <a:pPr marL="621983" lvl="1" indent="-347663">
+              <a:spcBef>
+                <a:spcPts val="600"/>
+              </a:spcBef>
+              <a:buClr>
+                <a:schemeClr val="tx1">
+                  <a:lumMod val="90000"/>
+                  <a:lumOff val="10000"/>
+                </a:schemeClr>
+              </a:buClr>
+              <a:buSzPct val="100000"/>
+              <a:buFont typeface="Wingdings" panose="05000000000000000000" pitchFamily="2" charset="2"/>
+              <a:buChar char="§"/>
+              <a:defRPr/>
+            </a:pPr>
+            <a:r>
+              <a:rPr lang="en-US" dirty="0"/>
+              <a:t>Check and follow CS1010 </a:t>
+            </a:r>
+            <a:r>
+              <a:rPr lang="en-US"/>
+              <a:t>Stye Guide</a:t>
+            </a:r>
+          </a:p>
+          <a:p>
+            <a:pPr marL="621983" lvl="1" indent="-347663">
+              <a:spcBef>
+                <a:spcPts val="600"/>
+              </a:spcBef>
+              <a:buClr>
+                <a:schemeClr val="tx1">
+                  <a:lumMod val="90000"/>
+                  <a:lumOff val="10000"/>
+                </a:schemeClr>
+              </a:buClr>
+              <a:buSzPct val="100000"/>
+              <a:buFont typeface="Wingdings" panose="05000000000000000000" pitchFamily="2" charset="2"/>
+              <a:buChar char="§"/>
+              <a:defRPr/>
+            </a:pPr>
+            <a:endParaRPr lang="en-US" dirty="0"/>
+          </a:p>
+          <a:p>
+            <a:pPr marL="347663" indent="-347663">
+              <a:spcBef>
+                <a:spcPts val="600"/>
+              </a:spcBef>
+              <a:buClr>
+                <a:schemeClr val="tx1">
+                  <a:lumMod val="90000"/>
+                  <a:lumOff val="10000"/>
+                </a:schemeClr>
+              </a:buClr>
+              <a:buSzPct val="100000"/>
+              <a:buFont typeface="Wingdings" panose="05000000000000000000" pitchFamily="2" charset="2"/>
+              <a:buChar char="§"/>
+              <a:defRPr/>
+            </a:pPr>
+            <a:r>
+              <a:rPr lang="en-US" dirty="0"/>
+              <a:t>No dynamic arrays</a:t>
+            </a:r>
+          </a:p>
+          <a:p>
+            <a:pPr marL="621983" lvl="1" indent="-347663">
+              <a:spcBef>
+                <a:spcPts val="600"/>
+              </a:spcBef>
+              <a:buClr>
+                <a:schemeClr val="tx1">
+                  <a:lumMod val="90000"/>
+                  <a:lumOff val="10000"/>
+                </a:schemeClr>
+              </a:buClr>
+              <a:buSzPct val="100000"/>
+              <a:buFont typeface="Wingdings" panose="05000000000000000000" pitchFamily="2" charset="2"/>
+              <a:buChar char="§"/>
+              <a:defRPr/>
+            </a:pPr>
+            <a:r>
+              <a:rPr lang="en-US" dirty="0"/>
+              <a:t>Only fixed length arrays</a:t>
+            </a:r>
+          </a:p>
+          <a:p>
+            <a:pPr marL="621983" lvl="1" indent="-347663">
+              <a:spcBef>
+                <a:spcPts val="600"/>
+              </a:spcBef>
+              <a:buClr>
+                <a:schemeClr val="tx1">
+                  <a:lumMod val="90000"/>
+                  <a:lumOff val="10000"/>
+                </a:schemeClr>
+              </a:buClr>
+              <a:buSzPct val="100000"/>
+              <a:buFont typeface="Wingdings" panose="05000000000000000000" pitchFamily="2" charset="2"/>
+              <a:buChar char="§"/>
+              <a:defRPr/>
+            </a:pPr>
+            <a:endParaRPr lang="en-US" dirty="0"/>
+          </a:p>
+          <a:p>
+            <a:pPr marL="347663" indent="-347663">
+              <a:spcBef>
+                <a:spcPts val="600"/>
+              </a:spcBef>
+              <a:buClr>
+                <a:schemeClr val="tx1">
+                  <a:lumMod val="90000"/>
+                  <a:lumOff val="10000"/>
+                </a:schemeClr>
+              </a:buClr>
+              <a:buSzPct val="100000"/>
+              <a:buFont typeface="Wingdings" panose="05000000000000000000" pitchFamily="2" charset="2"/>
+              <a:buChar char="§"/>
+              <a:defRPr/>
+            </a:pPr>
+            <a:r>
+              <a:rPr lang="en-US" dirty="0"/>
+              <a:t>No trivial questions</a:t>
+            </a:r>
+            <a:br>
+              <a:rPr lang="en-US" dirty="0"/>
+            </a:br>
+            <a:endParaRPr lang="en-US" dirty="0"/>
+          </a:p>
+        </p:txBody>
+      </p:sp>
+      <p:sp>
+        <p:nvSpPr>
+          <p:cNvPr id="13" name="Rectangle 2">
+            <a:extLst>
+              <a:ext uri="{FF2B5EF4-FFF2-40B4-BE49-F238E27FC236}">
+                <a16:creationId xmlns:a16="http://schemas.microsoft.com/office/drawing/2014/main" id="{DE802AD8-E3DD-1D13-E1EA-E65539750AA2}"/>
               </a:ext>
             </a:extLst>
           </p:cNvPr>
@@ -23649,1056 +24395,23 @@
         </p:nvSpPr>
         <p:spPr>
           <a:xfrm>
-            <a:off x="2841134" y="445546"/>
-            <a:ext cx="5595851" cy="685800"/>
+            <a:off x="533400" y="381000"/>
+            <a:ext cx="8382000" cy="838200"/>
           </a:xfrm>
         </p:spPr>
         <p:txBody>
           <a:bodyPr>
-            <a:normAutofit fontScale="90000"/>
+            <a:normAutofit/>
           </a:bodyPr>
           <a:lstStyle/>
           <a:p>
-            <a:pPr eaLnBrk="1" hangingPunct="1"/>
-            <a:r>
-              <a:rPr lang="en-GB" dirty="0">
+            <a:r>
+              <a:rPr lang="en-GB" sz="3600" dirty="0">
                 <a:solidFill>
                   <a:srgbClr val="0000FF"/>
                 </a:solidFill>
               </a:rPr>
-              <a:t>Problem Solving Process</a:t>
-            </a:r>
-          </a:p>
-        </p:txBody>
-      </p:sp>
-      <p:grpSp>
-        <p:nvGrpSpPr>
-          <p:cNvPr id="10" name="[Group 28]">
-            <a:extLst>
-              <a:ext uri="{FF2B5EF4-FFF2-40B4-BE49-F238E27FC236}">
-                <a16:creationId xmlns:a16="http://schemas.microsoft.com/office/drawing/2014/main" id="{CAC017AD-F270-3C1F-5B11-0E2FEEE39DA5}"/>
-              </a:ext>
-            </a:extLst>
-          </p:cNvPr>
-          <p:cNvGrpSpPr/>
-          <p:nvPr/>
-        </p:nvGrpSpPr>
-        <p:grpSpPr>
-          <a:xfrm>
-            <a:off x="2895600" y="1377278"/>
-            <a:ext cx="3854488" cy="4406263"/>
-            <a:chOff x="2895600" y="1377278"/>
-            <a:chExt cx="3854488" cy="4406263"/>
-          </a:xfrm>
-        </p:grpSpPr>
-        <p:sp>
-          <p:nvSpPr>
-            <p:cNvPr id="11" name="TextBox 10">
-              <a:extLst>
-                <a:ext uri="{FF2B5EF4-FFF2-40B4-BE49-F238E27FC236}">
-                  <a16:creationId xmlns:a16="http://schemas.microsoft.com/office/drawing/2014/main" id="{9B6714A7-94AA-0189-17E3-F181678B106D}"/>
-                </a:ext>
-              </a:extLst>
-            </p:cNvPr>
-            <p:cNvSpPr txBox="1"/>
-            <p:nvPr/>
-          </p:nvSpPr>
-          <p:spPr bwMode="auto">
-            <a:xfrm>
-              <a:off x="2903851" y="1377278"/>
-              <a:ext cx="2768009" cy="523220"/>
-            </a:xfrm>
-            <a:prstGeom prst="rect">
-              <a:avLst/>
-            </a:prstGeom>
-            <a:gradFill flip="none" rotWithShape="1">
-              <a:gsLst>
-                <a:gs pos="0">
-                  <a:srgbClr val="9900CC">
-                    <a:shade val="30000"/>
-                    <a:satMod val="115000"/>
-                  </a:srgbClr>
-                </a:gs>
-                <a:gs pos="50000">
-                  <a:srgbClr val="CC00FF"/>
-                </a:gs>
-                <a:gs pos="100000">
-                  <a:srgbClr val="CC66FF"/>
-                </a:gs>
-              </a:gsLst>
-              <a:lin ang="2700000" scaled="1"/>
-              <a:tileRect/>
-            </a:gradFill>
-          </p:spPr>
-          <p:style>
-            <a:lnRef idx="0">
-              <a:schemeClr val="accent1"/>
-            </a:lnRef>
-            <a:fillRef idx="3">
-              <a:schemeClr val="accent1"/>
-            </a:fillRef>
-            <a:effectRef idx="3">
-              <a:schemeClr val="accent1"/>
-            </a:effectRef>
-            <a:fontRef idx="minor">
-              <a:schemeClr val="lt1"/>
-            </a:fontRef>
-          </p:style>
-          <p:txBody>
-            <a:bodyPr wrap="square">
-              <a:spAutoFit/>
-            </a:bodyPr>
-            <a:lstStyle/>
-            <a:p>
-              <a:pPr algn="ctr">
-                <a:defRPr/>
-              </a:pPr>
-              <a:r>
-                <a:rPr lang="en-US" sz="2800" dirty="0">
-                  <a:solidFill>
-                    <a:srgbClr val="FFFFFF"/>
-                  </a:solidFill>
-                </a:rPr>
-                <a:t>Analysis</a:t>
-              </a:r>
-              <a:endParaRPr lang="en-SG" sz="2800" dirty="0">
-                <a:solidFill>
-                  <a:srgbClr val="FFFFFF"/>
-                </a:solidFill>
-              </a:endParaRPr>
-            </a:p>
-          </p:txBody>
-        </p:sp>
-        <p:sp>
-          <p:nvSpPr>
-            <p:cNvPr id="12" name="TextBox 11">
-              <a:extLst>
-                <a:ext uri="{FF2B5EF4-FFF2-40B4-BE49-F238E27FC236}">
-                  <a16:creationId xmlns:a16="http://schemas.microsoft.com/office/drawing/2014/main" id="{57BB6960-99BB-D1F7-5E1E-5C21F7563470}"/>
-                </a:ext>
-              </a:extLst>
-            </p:cNvPr>
-            <p:cNvSpPr txBox="1"/>
-            <p:nvPr/>
-          </p:nvSpPr>
-          <p:spPr bwMode="auto">
-            <a:xfrm>
-              <a:off x="2895600" y="2656034"/>
-              <a:ext cx="2784511" cy="523220"/>
-            </a:xfrm>
-            <a:prstGeom prst="rect">
-              <a:avLst/>
-            </a:prstGeom>
-            <a:gradFill flip="none" rotWithShape="1">
-              <a:gsLst>
-                <a:gs pos="0">
-                  <a:srgbClr val="006600"/>
-                </a:gs>
-                <a:gs pos="50000">
-                  <a:srgbClr val="00CC00"/>
-                </a:gs>
-                <a:gs pos="100000">
-                  <a:srgbClr val="92D050"/>
-                </a:gs>
-              </a:gsLst>
-              <a:lin ang="2700000" scaled="1"/>
-              <a:tileRect/>
-            </a:gradFill>
-          </p:spPr>
-          <p:style>
-            <a:lnRef idx="0">
-              <a:schemeClr val="accent1"/>
-            </a:lnRef>
-            <a:fillRef idx="3">
-              <a:schemeClr val="accent1"/>
-            </a:fillRef>
-            <a:effectRef idx="3">
-              <a:schemeClr val="accent1"/>
-            </a:effectRef>
-            <a:fontRef idx="minor">
-              <a:schemeClr val="lt1"/>
-            </a:fontRef>
-          </p:style>
-          <p:txBody>
-            <a:bodyPr wrap="square">
-              <a:spAutoFit/>
-            </a:bodyPr>
-            <a:lstStyle/>
-            <a:p>
-              <a:pPr algn="ctr">
-                <a:defRPr/>
-              </a:pPr>
-              <a:r>
-                <a:rPr lang="en-US" sz="2800" dirty="0">
-                  <a:solidFill>
-                    <a:srgbClr val="FFFFFF"/>
-                  </a:solidFill>
-                </a:rPr>
-                <a:t>Design</a:t>
-              </a:r>
-              <a:endParaRPr lang="en-SG" sz="2800" dirty="0">
-                <a:solidFill>
-                  <a:srgbClr val="FFFFFF"/>
-                </a:solidFill>
-              </a:endParaRPr>
-            </a:p>
-          </p:txBody>
-        </p:sp>
-        <p:sp>
-          <p:nvSpPr>
-            <p:cNvPr id="14" name="TextBox 13">
-              <a:extLst>
-                <a:ext uri="{FF2B5EF4-FFF2-40B4-BE49-F238E27FC236}">
-                  <a16:creationId xmlns:a16="http://schemas.microsoft.com/office/drawing/2014/main" id="{BE699B9A-B227-8619-09DF-96FEC20DB90C}"/>
-                </a:ext>
-              </a:extLst>
-            </p:cNvPr>
-            <p:cNvSpPr txBox="1"/>
-            <p:nvPr/>
-          </p:nvSpPr>
-          <p:spPr bwMode="auto">
-            <a:xfrm>
-              <a:off x="2918632" y="3963128"/>
-              <a:ext cx="2738446" cy="523220"/>
-            </a:xfrm>
-            <a:prstGeom prst="rect">
-              <a:avLst/>
-            </a:prstGeom>
-            <a:gradFill>
-              <a:gsLst>
-                <a:gs pos="0">
-                  <a:srgbClr val="000099"/>
-                </a:gs>
-                <a:gs pos="50000">
-                  <a:srgbClr val="3333FF"/>
-                </a:gs>
-                <a:gs pos="100000">
-                  <a:srgbClr val="99CCFF"/>
-                </a:gs>
-              </a:gsLst>
-              <a:lin ang="2700000" scaled="1"/>
-            </a:gradFill>
-          </p:spPr>
-          <p:style>
-            <a:lnRef idx="0">
-              <a:schemeClr val="accent1"/>
-            </a:lnRef>
-            <a:fillRef idx="3">
-              <a:schemeClr val="accent1"/>
-            </a:fillRef>
-            <a:effectRef idx="3">
-              <a:schemeClr val="accent1"/>
-            </a:effectRef>
-            <a:fontRef idx="minor">
-              <a:schemeClr val="lt1"/>
-            </a:fontRef>
-          </p:style>
-          <p:txBody>
-            <a:bodyPr wrap="square">
-              <a:spAutoFit/>
-            </a:bodyPr>
-            <a:lstStyle/>
-            <a:p>
-              <a:pPr algn="ctr">
-                <a:defRPr/>
-              </a:pPr>
-              <a:r>
-                <a:rPr lang="en-US" sz="2800" dirty="0">
-                  <a:solidFill>
-                    <a:srgbClr val="FFFFFF"/>
-                  </a:solidFill>
-                </a:rPr>
-                <a:t>Implementation</a:t>
-              </a:r>
-              <a:endParaRPr lang="en-SG" sz="2800" dirty="0">
-                <a:solidFill>
-                  <a:srgbClr val="FFFFFF"/>
-                </a:solidFill>
-              </a:endParaRPr>
-            </a:p>
-          </p:txBody>
-        </p:sp>
-        <p:sp>
-          <p:nvSpPr>
-            <p:cNvPr id="15" name="TextBox 14">
-              <a:extLst>
-                <a:ext uri="{FF2B5EF4-FFF2-40B4-BE49-F238E27FC236}">
-                  <a16:creationId xmlns:a16="http://schemas.microsoft.com/office/drawing/2014/main" id="{B5F14E4F-4D2A-E5D6-5434-2A929D9CB1F3}"/>
-                </a:ext>
-              </a:extLst>
-            </p:cNvPr>
-            <p:cNvSpPr txBox="1"/>
-            <p:nvPr/>
-          </p:nvSpPr>
-          <p:spPr bwMode="auto">
-            <a:xfrm>
-              <a:off x="2904300" y="5260321"/>
-              <a:ext cx="2767111" cy="523220"/>
-            </a:xfrm>
-            <a:prstGeom prst="rect">
-              <a:avLst/>
-            </a:prstGeom>
-            <a:gradFill flip="none" rotWithShape="1">
-              <a:gsLst>
-                <a:gs pos="0">
-                  <a:srgbClr val="FF0000"/>
-                </a:gs>
-                <a:gs pos="50000">
-                  <a:srgbClr val="FF6600"/>
-                </a:gs>
-                <a:gs pos="100000">
-                  <a:srgbClr val="FF9966"/>
-                </a:gs>
-              </a:gsLst>
-              <a:lin ang="2700000" scaled="1"/>
-              <a:tileRect/>
-            </a:gradFill>
-          </p:spPr>
-          <p:style>
-            <a:lnRef idx="0">
-              <a:schemeClr val="accent1"/>
-            </a:lnRef>
-            <a:fillRef idx="3">
-              <a:schemeClr val="accent1"/>
-            </a:fillRef>
-            <a:effectRef idx="3">
-              <a:schemeClr val="accent1"/>
-            </a:effectRef>
-            <a:fontRef idx="minor">
-              <a:schemeClr val="lt1"/>
-            </a:fontRef>
-          </p:style>
-          <p:txBody>
-            <a:bodyPr wrap="square">
-              <a:spAutoFit/>
-            </a:bodyPr>
-            <a:lstStyle/>
-            <a:p>
-              <a:pPr algn="ctr">
-                <a:defRPr/>
-              </a:pPr>
-              <a:r>
-                <a:rPr lang="en-US" sz="2800" dirty="0">
-                  <a:solidFill>
-                    <a:srgbClr val="FFFFFF"/>
-                  </a:solidFill>
-                </a:rPr>
-                <a:t>Testing</a:t>
-              </a:r>
-              <a:endParaRPr lang="en-SG" sz="2800" dirty="0">
-                <a:solidFill>
-                  <a:srgbClr val="FFFFFF"/>
-                </a:solidFill>
-              </a:endParaRPr>
-            </a:p>
-          </p:txBody>
-        </p:sp>
-        <p:cxnSp>
-          <p:nvCxnSpPr>
-            <p:cNvPr id="16" name="Straight Arrow Connector 12">
-              <a:extLst>
-                <a:ext uri="{FF2B5EF4-FFF2-40B4-BE49-F238E27FC236}">
-                  <a16:creationId xmlns:a16="http://schemas.microsoft.com/office/drawing/2014/main" id="{9F76D268-050C-BE9F-020F-60B563AAE4C7}"/>
-                </a:ext>
-              </a:extLst>
-            </p:cNvPr>
-            <p:cNvCxnSpPr>
-              <a:cxnSpLocks noChangeShapeType="1"/>
-              <a:stCxn id="11" idx="2"/>
-              <a:endCxn id="12" idx="0"/>
-            </p:cNvCxnSpPr>
-            <p:nvPr/>
-          </p:nvCxnSpPr>
-          <p:spPr bwMode="auto">
-            <a:xfrm>
-              <a:off x="4287856" y="1900498"/>
-              <a:ext cx="0" cy="755536"/>
-            </a:xfrm>
-            <a:prstGeom prst="straightConnector1">
-              <a:avLst/>
-            </a:prstGeom>
-            <a:noFill/>
-            <a:ln w="38100" cap="sq" algn="ctr">
-              <a:solidFill>
-                <a:srgbClr val="660066"/>
-              </a:solidFill>
-              <a:round/>
-              <a:headEnd type="triangle" w="lg" len="med"/>
-              <a:tailEnd type="triangle" w="lg" len="med"/>
-            </a:ln>
-          </p:spPr>
-        </p:cxnSp>
-        <p:cxnSp>
-          <p:nvCxnSpPr>
-            <p:cNvPr id="17" name="Straight Arrow Connector 14">
-              <a:extLst>
-                <a:ext uri="{FF2B5EF4-FFF2-40B4-BE49-F238E27FC236}">
-                  <a16:creationId xmlns:a16="http://schemas.microsoft.com/office/drawing/2014/main" id="{EDEF90E4-B9C6-294A-DFC1-201888570D0B}"/>
-                </a:ext>
-              </a:extLst>
-            </p:cNvPr>
-            <p:cNvCxnSpPr>
-              <a:cxnSpLocks noChangeShapeType="1"/>
-              <a:stCxn id="12" idx="2"/>
-              <a:endCxn id="14" idx="0"/>
-            </p:cNvCxnSpPr>
-            <p:nvPr/>
-          </p:nvCxnSpPr>
-          <p:spPr bwMode="auto">
-            <a:xfrm flipH="1">
-              <a:off x="4287855" y="3179254"/>
-              <a:ext cx="1" cy="783874"/>
-            </a:xfrm>
-            <a:prstGeom prst="straightConnector1">
-              <a:avLst/>
-            </a:prstGeom>
-            <a:noFill/>
-            <a:ln w="38100" cap="sq" algn="ctr">
-              <a:solidFill>
-                <a:srgbClr val="660066"/>
-              </a:solidFill>
-              <a:round/>
-              <a:headEnd type="triangle" w="lg" len="med"/>
-              <a:tailEnd type="triangle" w="lg" len="med"/>
-            </a:ln>
-          </p:spPr>
-        </p:cxnSp>
-        <p:cxnSp>
-          <p:nvCxnSpPr>
-            <p:cNvPr id="18" name="Straight Arrow Connector 15">
-              <a:extLst>
-                <a:ext uri="{FF2B5EF4-FFF2-40B4-BE49-F238E27FC236}">
-                  <a16:creationId xmlns:a16="http://schemas.microsoft.com/office/drawing/2014/main" id="{3E05A97A-829A-0150-469A-117B56C5CF30}"/>
-                </a:ext>
-              </a:extLst>
-            </p:cNvPr>
-            <p:cNvCxnSpPr>
-              <a:cxnSpLocks noChangeShapeType="1"/>
-              <a:stCxn id="14" idx="2"/>
-              <a:endCxn id="15" idx="0"/>
-            </p:cNvCxnSpPr>
-            <p:nvPr/>
-          </p:nvCxnSpPr>
-          <p:spPr bwMode="auto">
-            <a:xfrm>
-              <a:off x="4287855" y="4486348"/>
-              <a:ext cx="1" cy="773973"/>
-            </a:xfrm>
-            <a:prstGeom prst="straightConnector1">
-              <a:avLst/>
-            </a:prstGeom>
-            <a:noFill/>
-            <a:ln w="38100" cap="sq" algn="ctr">
-              <a:solidFill>
-                <a:srgbClr val="660066"/>
-              </a:solidFill>
-              <a:round/>
-              <a:headEnd type="triangle" w="lg" len="med"/>
-              <a:tailEnd type="triangle" w="lg" len="med"/>
-            </a:ln>
-          </p:spPr>
-        </p:cxnSp>
-        <p:cxnSp>
-          <p:nvCxnSpPr>
-            <p:cNvPr id="19" name="Straight Connector 26">
-              <a:extLst>
-                <a:ext uri="{FF2B5EF4-FFF2-40B4-BE49-F238E27FC236}">
-                  <a16:creationId xmlns:a16="http://schemas.microsoft.com/office/drawing/2014/main" id="{D1C2933B-D8ED-29CC-8A84-8F2FB2AA88F5}"/>
-                </a:ext>
-              </a:extLst>
-            </p:cNvPr>
-            <p:cNvCxnSpPr>
-              <a:cxnSpLocks noChangeShapeType="1"/>
-            </p:cNvCxnSpPr>
-            <p:nvPr/>
-          </p:nvCxnSpPr>
-          <p:spPr bwMode="auto">
-            <a:xfrm>
-              <a:off x="5662710" y="4202706"/>
-              <a:ext cx="593714" cy="22032"/>
-            </a:xfrm>
-            <a:prstGeom prst="line">
-              <a:avLst/>
-            </a:prstGeom>
-            <a:noFill/>
-            <a:ln w="38100" cap="sq" algn="ctr">
-              <a:solidFill>
-                <a:schemeClr val="tx1"/>
-              </a:solidFill>
-              <a:round/>
-              <a:headEnd type="none" w="sm" len="sm"/>
-              <a:tailEnd type="none" w="sm" len="sm"/>
-            </a:ln>
-          </p:spPr>
-        </p:cxnSp>
-        <p:cxnSp>
-          <p:nvCxnSpPr>
-            <p:cNvPr id="20" name="Straight Connector 29">
-              <a:extLst>
-                <a:ext uri="{FF2B5EF4-FFF2-40B4-BE49-F238E27FC236}">
-                  <a16:creationId xmlns:a16="http://schemas.microsoft.com/office/drawing/2014/main" id="{2C34C445-3E93-7E1C-9836-39C13E529D63}"/>
-                </a:ext>
-              </a:extLst>
-            </p:cNvPr>
-            <p:cNvCxnSpPr>
-              <a:cxnSpLocks noChangeShapeType="1"/>
-            </p:cNvCxnSpPr>
-            <p:nvPr/>
-          </p:nvCxnSpPr>
-          <p:spPr bwMode="auto">
-            <a:xfrm flipV="1">
-              <a:off x="6256424" y="1821677"/>
-              <a:ext cx="0" cy="2403061"/>
-            </a:xfrm>
-            <a:prstGeom prst="line">
-              <a:avLst/>
-            </a:prstGeom>
-            <a:noFill/>
-            <a:ln w="38100" cap="sq" algn="ctr">
-              <a:solidFill>
-                <a:schemeClr val="tx1"/>
-              </a:solidFill>
-              <a:round/>
-              <a:headEnd type="none" w="sm" len="sm"/>
-              <a:tailEnd type="none" w="sm" len="sm"/>
-            </a:ln>
-          </p:spPr>
-        </p:cxnSp>
-        <p:cxnSp>
-          <p:nvCxnSpPr>
-            <p:cNvPr id="21" name="Straight Connector 31">
-              <a:extLst>
-                <a:ext uri="{FF2B5EF4-FFF2-40B4-BE49-F238E27FC236}">
-                  <a16:creationId xmlns:a16="http://schemas.microsoft.com/office/drawing/2014/main" id="{CFA8BA1B-C225-2DAF-44A9-0B02F1BAF26A}"/>
-                </a:ext>
-              </a:extLst>
-            </p:cNvPr>
-            <p:cNvCxnSpPr>
-              <a:cxnSpLocks noChangeShapeType="1"/>
-            </p:cNvCxnSpPr>
-            <p:nvPr/>
-          </p:nvCxnSpPr>
-          <p:spPr bwMode="auto">
-            <a:xfrm flipH="1">
-              <a:off x="5747828" y="1821677"/>
-              <a:ext cx="508596" cy="0"/>
-            </a:xfrm>
-            <a:prstGeom prst="line">
-              <a:avLst/>
-            </a:prstGeom>
-            <a:noFill/>
-            <a:ln w="38100" cap="sq" algn="ctr">
-              <a:solidFill>
-                <a:schemeClr val="tx1"/>
-              </a:solidFill>
-              <a:round/>
-              <a:headEnd type="none" w="lg" len="med"/>
-              <a:tailEnd type="triangle" w="lg" len="med"/>
-            </a:ln>
-          </p:spPr>
-        </p:cxnSp>
-        <p:cxnSp>
-          <p:nvCxnSpPr>
-            <p:cNvPr id="22" name="Straight Connector 21">
-              <a:extLst>
-                <a:ext uri="{FF2B5EF4-FFF2-40B4-BE49-F238E27FC236}">
-                  <a16:creationId xmlns:a16="http://schemas.microsoft.com/office/drawing/2014/main" id="{911465F3-E803-88C2-7006-E3308D10DC77}"/>
-                </a:ext>
-              </a:extLst>
-            </p:cNvPr>
-            <p:cNvCxnSpPr>
-              <a:cxnSpLocks noChangeShapeType="1"/>
-            </p:cNvCxnSpPr>
-            <p:nvPr/>
-          </p:nvCxnSpPr>
-          <p:spPr bwMode="auto">
-            <a:xfrm>
-              <a:off x="5747828" y="5615139"/>
-              <a:ext cx="748649" cy="0"/>
-            </a:xfrm>
-            <a:prstGeom prst="line">
-              <a:avLst/>
-            </a:prstGeom>
-            <a:noFill/>
-            <a:ln w="38100" cap="sq" algn="ctr">
-              <a:solidFill>
-                <a:srgbClr val="006600"/>
-              </a:solidFill>
-              <a:round/>
-              <a:headEnd type="none" w="sm" len="sm"/>
-              <a:tailEnd type="none" w="sm" len="sm"/>
-            </a:ln>
-          </p:spPr>
-        </p:cxnSp>
-        <p:cxnSp>
-          <p:nvCxnSpPr>
-            <p:cNvPr id="23" name="Straight Connector 37">
-              <a:extLst>
-                <a:ext uri="{FF2B5EF4-FFF2-40B4-BE49-F238E27FC236}">
-                  <a16:creationId xmlns:a16="http://schemas.microsoft.com/office/drawing/2014/main" id="{9C476DE4-5ADC-7DEA-7EDB-B4046197927F}"/>
-                </a:ext>
-              </a:extLst>
-            </p:cNvPr>
-            <p:cNvCxnSpPr>
-              <a:cxnSpLocks noChangeShapeType="1"/>
-            </p:cNvCxnSpPr>
-            <p:nvPr/>
-          </p:nvCxnSpPr>
-          <p:spPr bwMode="auto">
-            <a:xfrm flipV="1">
-              <a:off x="6496477" y="1586719"/>
-              <a:ext cx="0" cy="4028421"/>
-            </a:xfrm>
-            <a:prstGeom prst="line">
-              <a:avLst/>
-            </a:prstGeom>
-            <a:noFill/>
-            <a:ln w="38100" cap="sq" algn="ctr">
-              <a:solidFill>
-                <a:srgbClr val="006600"/>
-              </a:solidFill>
-              <a:round/>
-              <a:headEnd type="none" w="sm" len="sm"/>
-              <a:tailEnd type="none" w="sm" len="sm"/>
-            </a:ln>
-          </p:spPr>
-        </p:cxnSp>
-        <p:cxnSp>
-          <p:nvCxnSpPr>
-            <p:cNvPr id="24" name="Straight Connector 41">
-              <a:extLst>
-                <a:ext uri="{FF2B5EF4-FFF2-40B4-BE49-F238E27FC236}">
-                  <a16:creationId xmlns:a16="http://schemas.microsoft.com/office/drawing/2014/main" id="{8643015E-3EA7-83BC-FDB6-9E0BD4DF1C40}"/>
-                </a:ext>
-              </a:extLst>
-            </p:cNvPr>
-            <p:cNvCxnSpPr>
-              <a:cxnSpLocks noChangeShapeType="1"/>
-            </p:cNvCxnSpPr>
-            <p:nvPr/>
-          </p:nvCxnSpPr>
-          <p:spPr bwMode="auto">
-            <a:xfrm flipH="1">
-              <a:off x="5734096" y="1586719"/>
-              <a:ext cx="762381" cy="0"/>
-            </a:xfrm>
-            <a:prstGeom prst="line">
-              <a:avLst/>
-            </a:prstGeom>
-            <a:noFill/>
-            <a:ln w="38100" cap="sq" algn="ctr">
-              <a:solidFill>
-                <a:srgbClr val="006600"/>
-              </a:solidFill>
-              <a:round/>
-              <a:headEnd type="none" w="lg" len="med"/>
-              <a:tailEnd type="triangle" w="lg" len="med"/>
-            </a:ln>
-          </p:spPr>
-        </p:cxnSp>
-        <p:cxnSp>
-          <p:nvCxnSpPr>
-            <p:cNvPr id="25" name="Straight Connector 48">
-              <a:extLst>
-                <a:ext uri="{FF2B5EF4-FFF2-40B4-BE49-F238E27FC236}">
-                  <a16:creationId xmlns:a16="http://schemas.microsoft.com/office/drawing/2014/main" id="{DD5EDC08-20EE-8FAB-9E87-A6633C3B661B}"/>
-                </a:ext>
-              </a:extLst>
-            </p:cNvPr>
-            <p:cNvCxnSpPr>
-              <a:cxnSpLocks noChangeShapeType="1"/>
-            </p:cNvCxnSpPr>
-            <p:nvPr/>
-          </p:nvCxnSpPr>
-          <p:spPr bwMode="auto">
-            <a:xfrm>
-              <a:off x="5734096" y="5404614"/>
-              <a:ext cx="1008546" cy="0"/>
-            </a:xfrm>
-            <a:prstGeom prst="line">
-              <a:avLst/>
-            </a:prstGeom>
-            <a:noFill/>
-            <a:ln w="38100" cap="sq" algn="ctr">
-              <a:solidFill>
-                <a:srgbClr val="800000"/>
-              </a:solidFill>
-              <a:round/>
-              <a:headEnd type="none" w="sm" len="sm"/>
-              <a:tailEnd type="none" w="sm" len="sm"/>
-            </a:ln>
-          </p:spPr>
-        </p:cxnSp>
-        <p:cxnSp>
-          <p:nvCxnSpPr>
-            <p:cNvPr id="26" name="Straight Connector 50">
-              <a:extLst>
-                <a:ext uri="{FF2B5EF4-FFF2-40B4-BE49-F238E27FC236}">
-                  <a16:creationId xmlns:a16="http://schemas.microsoft.com/office/drawing/2014/main" id="{0BC89241-8D29-4059-A38E-FA54DE15C4FB}"/>
-                </a:ext>
-              </a:extLst>
-            </p:cNvPr>
-            <p:cNvCxnSpPr>
-              <a:cxnSpLocks noChangeShapeType="1"/>
-            </p:cNvCxnSpPr>
-            <p:nvPr/>
-          </p:nvCxnSpPr>
-          <p:spPr bwMode="auto">
-            <a:xfrm flipV="1">
-              <a:off x="6742642" y="2930525"/>
-              <a:ext cx="7446" cy="2474089"/>
-            </a:xfrm>
-            <a:prstGeom prst="line">
-              <a:avLst/>
-            </a:prstGeom>
-            <a:noFill/>
-            <a:ln w="38100" cap="sq" algn="ctr">
-              <a:solidFill>
-                <a:srgbClr val="800000"/>
-              </a:solidFill>
-              <a:round/>
-              <a:headEnd type="none" w="sm" len="sm"/>
-              <a:tailEnd type="none" w="sm" len="sm"/>
-            </a:ln>
-          </p:spPr>
-        </p:cxnSp>
-        <p:cxnSp>
-          <p:nvCxnSpPr>
-            <p:cNvPr id="27" name="Straight Connector 52">
-              <a:extLst>
-                <a:ext uri="{FF2B5EF4-FFF2-40B4-BE49-F238E27FC236}">
-                  <a16:creationId xmlns:a16="http://schemas.microsoft.com/office/drawing/2014/main" id="{BC6485CC-5019-3F59-927F-62601ED04EEB}"/>
-                </a:ext>
-              </a:extLst>
-            </p:cNvPr>
-            <p:cNvCxnSpPr>
-              <a:cxnSpLocks noChangeShapeType="1"/>
-            </p:cNvCxnSpPr>
-            <p:nvPr/>
-          </p:nvCxnSpPr>
-          <p:spPr bwMode="auto">
-            <a:xfrm flipH="1">
-              <a:off x="5762761" y="2930525"/>
-              <a:ext cx="987327" cy="0"/>
-            </a:xfrm>
-            <a:prstGeom prst="line">
-              <a:avLst/>
-            </a:prstGeom>
-            <a:noFill/>
-            <a:ln w="38100" cap="sq" algn="ctr">
-              <a:solidFill>
-                <a:srgbClr val="800000"/>
-              </a:solidFill>
-              <a:round/>
-              <a:headEnd type="none" w="lg" len="med"/>
-              <a:tailEnd type="triangle" w="lg" len="med"/>
-            </a:ln>
-          </p:spPr>
-        </p:cxnSp>
-      </p:grpSp>
-      <p:sp>
-        <p:nvSpPr>
-          <p:cNvPr id="28" name="[TextBox 28]">
-            <a:extLst>
-              <a:ext uri="{FF2B5EF4-FFF2-40B4-BE49-F238E27FC236}">
-                <a16:creationId xmlns:a16="http://schemas.microsoft.com/office/drawing/2014/main" id="{355B7711-3EE3-2FAA-F020-933AB1900573}"/>
-              </a:ext>
-            </a:extLst>
-          </p:cNvPr>
-          <p:cNvSpPr txBox="1">
-            <a:spLocks noChangeArrowheads="1"/>
-          </p:cNvSpPr>
-          <p:nvPr/>
-        </p:nvSpPr>
-        <p:spPr bwMode="auto">
-          <a:xfrm>
-            <a:off x="6854825" y="2265362"/>
-            <a:ext cx="2060575" cy="1077218"/>
-          </a:xfrm>
-          <a:prstGeom prst="rect">
-            <a:avLst/>
-          </a:prstGeom>
-          <a:noFill/>
-          <a:ln w="9525">
-            <a:noFill/>
-            <a:miter lim="800000"/>
-            <a:headEnd/>
-            <a:tailEnd/>
-          </a:ln>
-        </p:spPr>
-        <p:txBody>
-          <a:bodyPr wrap="square">
-            <a:spAutoFit/>
-          </a:bodyPr>
-          <a:lstStyle/>
-          <a:p>
-            <a:pPr algn="ctr"/>
-            <a:r>
-              <a:rPr lang="en-US" sz="3200" i="1">
-                <a:solidFill>
-                  <a:srgbClr val="C00000"/>
-                </a:solidFill>
-                <a:latin typeface="+mn-lt"/>
-                <a:cs typeface="Andalus" pitchFamily="18" charset="-78"/>
-              </a:rPr>
-              <a:t>Iterative process</a:t>
-            </a:r>
-            <a:endParaRPr lang="en-US" sz="3200" i="1" dirty="0">
-              <a:solidFill>
-                <a:srgbClr val="C00000"/>
-              </a:solidFill>
-              <a:latin typeface="+mn-lt"/>
-              <a:cs typeface="Andalus" pitchFamily="18" charset="-78"/>
-            </a:endParaRPr>
-          </a:p>
-        </p:txBody>
-      </p:sp>
-      <p:sp>
-        <p:nvSpPr>
-          <p:cNvPr id="29" name="Rectangle 2">
-            <a:extLst>
-              <a:ext uri="{FF2B5EF4-FFF2-40B4-BE49-F238E27FC236}">
-                <a16:creationId xmlns:a16="http://schemas.microsoft.com/office/drawing/2014/main" id="{BDF01D19-60B6-6A80-70DF-BD6168E155ED}"/>
-              </a:ext>
-            </a:extLst>
-          </p:cNvPr>
-          <p:cNvSpPr txBox="1">
-            <a:spLocks noChangeArrowheads="1"/>
-          </p:cNvSpPr>
-          <p:nvPr/>
-        </p:nvSpPr>
-        <p:spPr>
-          <a:xfrm>
-            <a:off x="631334" y="459474"/>
-            <a:ext cx="2981538" cy="685800"/>
-          </a:xfrm>
-          <a:prstGeom prst="rect">
-            <a:avLst/>
-          </a:prstGeom>
-        </p:spPr>
-        <p:txBody>
-          <a:bodyPr vert="horz" lIns="91440" tIns="45720" rIns="91440" bIns="45720" rtlCol="0" anchor="ctr">
-            <a:normAutofit fontScale="97500"/>
-          </a:bodyPr>
-          <a:lstStyle>
-            <a:lvl1pPr algn="l" defTabSz="914400" rtl="0" eaLnBrk="1" latinLnBrk="0" hangingPunct="1">
-              <a:spcBef>
-                <a:spcPct val="0"/>
-              </a:spcBef>
-              <a:buNone/>
-              <a:defRPr sz="4000" kern="1200" spc="-100" baseline="0">
-                <a:solidFill>
-                  <a:schemeClr val="tx2"/>
-                </a:solidFill>
-                <a:latin typeface="+mj-lt"/>
-                <a:ea typeface="+mj-ea"/>
-                <a:cs typeface="+mj-cs"/>
-              </a:defRPr>
-            </a:lvl1pPr>
-          </a:lstStyle>
-          <a:p>
-            <a:pPr fontAlgn="auto">
-              <a:spcAft>
-                <a:spcPts val="0"/>
-              </a:spcAft>
-            </a:pPr>
-            <a:r>
-              <a:rPr lang="en-GB" sz="3600" dirty="0">
-                <a:solidFill>
-                  <a:srgbClr val="0000FF"/>
-                </a:solidFill>
-              </a:rPr>
-              <a:t>Algorithmic</a:t>
-            </a:r>
-          </a:p>
-        </p:txBody>
-      </p:sp>
-      <p:sp>
-        <p:nvSpPr>
-          <p:cNvPr id="30" name="[TextBox 24]">
-            <a:extLst>
-              <a:ext uri="{FF2B5EF4-FFF2-40B4-BE49-F238E27FC236}">
-                <a16:creationId xmlns:a16="http://schemas.microsoft.com/office/drawing/2014/main" id="{5099EA7F-E225-3426-A37A-3E1D22BF4B5A}"/>
-              </a:ext>
-            </a:extLst>
-          </p:cNvPr>
-          <p:cNvSpPr txBox="1">
-            <a:spLocks noChangeArrowheads="1"/>
-          </p:cNvSpPr>
-          <p:nvPr/>
-        </p:nvSpPr>
-        <p:spPr bwMode="auto">
-          <a:xfrm>
-            <a:off x="577683" y="1110064"/>
-            <a:ext cx="2209800" cy="1200329"/>
-          </a:xfrm>
-          <a:prstGeom prst="rect">
-            <a:avLst/>
-          </a:prstGeom>
-          <a:noFill/>
-          <a:ln w="9525">
-            <a:noFill/>
-            <a:miter lim="800000"/>
-            <a:headEnd/>
-            <a:tailEnd/>
-          </a:ln>
-        </p:spPr>
-        <p:txBody>
-          <a:bodyPr wrap="square">
-            <a:spAutoFit/>
-          </a:bodyPr>
-          <a:lstStyle/>
-          <a:p>
-            <a:pPr algn="ctr"/>
-            <a:r>
-              <a:rPr lang="en-US" sz="2400" i="1" dirty="0">
-                <a:latin typeface="Calibri" pitchFamily="34" charset="0"/>
-              </a:rPr>
-              <a:t>Determine problem features</a:t>
-            </a:r>
-          </a:p>
-        </p:txBody>
-      </p:sp>
-      <p:sp>
-        <p:nvSpPr>
-          <p:cNvPr id="31" name="[TextBox 25]">
-            <a:extLst>
-              <a:ext uri="{FF2B5EF4-FFF2-40B4-BE49-F238E27FC236}">
-                <a16:creationId xmlns:a16="http://schemas.microsoft.com/office/drawing/2014/main" id="{FB3707A8-E821-7778-ED91-0CE1A426651D}"/>
-              </a:ext>
-            </a:extLst>
-          </p:cNvPr>
-          <p:cNvSpPr txBox="1">
-            <a:spLocks noChangeArrowheads="1"/>
-          </p:cNvSpPr>
-          <p:nvPr/>
-        </p:nvSpPr>
-        <p:spPr bwMode="auto">
-          <a:xfrm>
-            <a:off x="612608" y="2562225"/>
-            <a:ext cx="2139950" cy="830997"/>
-          </a:xfrm>
-          <a:prstGeom prst="rect">
-            <a:avLst/>
-          </a:prstGeom>
-          <a:noFill/>
-          <a:ln w="9525">
-            <a:noFill/>
-            <a:miter lim="800000"/>
-            <a:headEnd/>
-            <a:tailEnd/>
-          </a:ln>
-        </p:spPr>
-        <p:txBody>
-          <a:bodyPr>
-            <a:spAutoFit/>
-          </a:bodyPr>
-          <a:lstStyle/>
-          <a:p>
-            <a:pPr algn="ctr"/>
-            <a:r>
-              <a:rPr lang="en-US" sz="2400" i="1" dirty="0">
-                <a:solidFill>
-                  <a:srgbClr val="008000"/>
-                </a:solidFill>
-                <a:latin typeface="Calibri" pitchFamily="34" charset="0"/>
-              </a:rPr>
-              <a:t>Write algorithm</a:t>
-            </a:r>
-          </a:p>
-        </p:txBody>
-      </p:sp>
-      <p:sp>
-        <p:nvSpPr>
-          <p:cNvPr id="32" name="[TextBox 26]">
-            <a:extLst>
-              <a:ext uri="{FF2B5EF4-FFF2-40B4-BE49-F238E27FC236}">
-                <a16:creationId xmlns:a16="http://schemas.microsoft.com/office/drawing/2014/main" id="{CC682A90-905B-FA8A-B07E-02133095E12E}"/>
-              </a:ext>
-            </a:extLst>
-          </p:cNvPr>
-          <p:cNvSpPr txBox="1">
-            <a:spLocks noChangeArrowheads="1"/>
-          </p:cNvSpPr>
-          <p:nvPr/>
-        </p:nvSpPr>
-        <p:spPr bwMode="auto">
-          <a:xfrm>
-            <a:off x="830776" y="3758480"/>
-            <a:ext cx="1703614" cy="830997"/>
-          </a:xfrm>
-          <a:prstGeom prst="rect">
-            <a:avLst/>
-          </a:prstGeom>
-          <a:noFill/>
-          <a:ln w="9525">
-            <a:noFill/>
-            <a:miter lim="800000"/>
-            <a:headEnd/>
-            <a:tailEnd/>
-          </a:ln>
-        </p:spPr>
-        <p:txBody>
-          <a:bodyPr wrap="square">
-            <a:spAutoFit/>
-          </a:bodyPr>
-          <a:lstStyle/>
-          <a:p>
-            <a:pPr algn="ctr"/>
-            <a:r>
-              <a:rPr lang="en-US" sz="2400" i="1" dirty="0">
-                <a:latin typeface="Calibri" pitchFamily="34" charset="0"/>
-              </a:rPr>
-              <a:t>Produce code</a:t>
-            </a:r>
-          </a:p>
-        </p:txBody>
-      </p:sp>
-      <p:sp>
-        <p:nvSpPr>
-          <p:cNvPr id="33" name="[TextBox 27]">
-            <a:extLst>
-              <a:ext uri="{FF2B5EF4-FFF2-40B4-BE49-F238E27FC236}">
-                <a16:creationId xmlns:a16="http://schemas.microsoft.com/office/drawing/2014/main" id="{6205835F-FAFF-D5F0-A6F6-D7C721DE322F}"/>
-              </a:ext>
-            </a:extLst>
-          </p:cNvPr>
-          <p:cNvSpPr txBox="1">
-            <a:spLocks noChangeArrowheads="1"/>
-          </p:cNvSpPr>
-          <p:nvPr/>
-        </p:nvSpPr>
-        <p:spPr bwMode="auto">
-          <a:xfrm>
-            <a:off x="414965" y="4922887"/>
-            <a:ext cx="2535237" cy="1200329"/>
-          </a:xfrm>
-          <a:prstGeom prst="rect">
-            <a:avLst/>
-          </a:prstGeom>
-          <a:noFill/>
-          <a:ln w="9525">
-            <a:noFill/>
-            <a:miter lim="800000"/>
-            <a:headEnd/>
-            <a:tailEnd/>
-          </a:ln>
-        </p:spPr>
-        <p:txBody>
-          <a:bodyPr>
-            <a:spAutoFit/>
-          </a:bodyPr>
-          <a:lstStyle/>
-          <a:p>
-            <a:pPr algn="ctr"/>
-            <a:r>
-              <a:rPr lang="en-US" sz="2400" i="1" dirty="0">
-                <a:solidFill>
-                  <a:srgbClr val="006600"/>
-                </a:solidFill>
-                <a:latin typeface="Calibri" pitchFamily="34" charset="0"/>
-              </a:rPr>
-              <a:t>Check for correctness and efficiency</a:t>
+              <a:t>Quick tips for PE1</a:t>
             </a:r>
           </a:p>
         </p:txBody>
@@ -24708,7 +24421,7 @@
           <p:cNvPr id="4" name="Date Placeholder 3">
             <a:extLst>
               <a:ext uri="{FF2B5EF4-FFF2-40B4-BE49-F238E27FC236}">
-                <a16:creationId xmlns:a16="http://schemas.microsoft.com/office/drawing/2014/main" id="{0054E264-18ED-25FA-4D14-D683ED099259}"/>
+                <a16:creationId xmlns:a16="http://schemas.microsoft.com/office/drawing/2014/main" id="{F67AE948-18D5-176F-FC15-1CD28F403184}"/>
               </a:ext>
             </a:extLst>
           </p:cNvPr>
@@ -24737,7 +24450,7 @@
     </p:spTree>
     <p:extLst>
       <p:ext uri="{BB962C8B-B14F-4D97-AF65-F5344CB8AC3E}">
-        <p14:creationId xmlns:p14="http://schemas.microsoft.com/office/powerpoint/2010/main" val="2802426808"/>
+        <p14:creationId xmlns:p14="http://schemas.microsoft.com/office/powerpoint/2010/main" val="4078418712"/>
       </p:ext>
     </p:extLst>
   </p:cSld>
